--- a/output/wordlabs-ary-suffix-3day.pptx
+++ b/output/wordlabs-ary-suffix-3day.pptx
@@ -6057,7 +6057,7 @@
                 <a:ea typeface="Calibri" pitchFamily="34" charset="-122"/>
                 <a:cs typeface="Calibri" pitchFamily="34" charset="-120"/>
               </a:rPr>
-              <a:t>elementary</a:t>
+              <a:t>secretary</a:t>
             </a:r>
             <a:pPr algn="l" indent="0" marL="0">
               <a:buNone/>
@@ -6071,7 +6071,7 @@
                 <a:ea typeface="Calibri" pitchFamily="34" charset="-122"/>
                 <a:cs typeface="Calibri" pitchFamily="34" charset="-120"/>
               </a:rPr>
-              <a:t> school had an extraordinary </a:t>
+              <a:t> kept an </a:t>
             </a:r>
             <a:pPr algn="l" indent="0" marL="0">
               <a:buNone/>
@@ -6088,7 +6088,7 @@
                 <a:ea typeface="Calibri" pitchFamily="34" charset="-122"/>
                 <a:cs typeface="Calibri" pitchFamily="34" charset="-120"/>
               </a:rPr>
-              <a:t>library</a:t>
+              <a:t>elementary</a:t>
             </a:r>
             <a:pPr algn="l" indent="0" marL="0">
               <a:buNone/>
@@ -6102,7 +6102,7 @@
                 <a:ea typeface="Calibri" pitchFamily="34" charset="-122"/>
                 <a:cs typeface="Calibri" pitchFamily="34" charset="-120"/>
               </a:rPr>
-              <a:t> full of wonderful books.</a:t>
+              <a:t> record of all the students.</a:t>
             </a:r>
             <a:endParaRPr lang="en-US" sz="1800" dirty="0"/>
           </a:p>
@@ -6257,7 +6257,7 @@
                 <a:ea typeface="Trebuchet MS" pitchFamily="34" charset="-122"/>
                 <a:cs typeface="Trebuchet MS" pitchFamily="34" charset="-120"/>
               </a:rPr>
-              <a:t>elementary</a:t>
+              <a:t>secretary</a:t>
             </a:r>
             <a:endParaRPr lang="en-US" sz="1400" dirty="0"/>
           </a:p>
@@ -6385,7 +6385,7 @@
                 <a:ea typeface="Trebuchet MS" pitchFamily="34" charset="-122"/>
                 <a:cs typeface="Trebuchet MS" pitchFamily="34" charset="-120"/>
               </a:rPr>
-              <a:t>library</a:t>
+              <a:t>elementary</a:t>
             </a:r>
             <a:endParaRPr lang="en-US" sz="1400" dirty="0"/>
           </a:p>
@@ -6855,7 +6855,7 @@
                 <a:ea typeface="Trebuchet MS" pitchFamily="34" charset="-122"/>
                 <a:cs typeface="Trebuchet MS" pitchFamily="34" charset="-120"/>
               </a:rPr>
-              <a:t>elementary</a:t>
+              <a:t>secretary</a:t>
             </a:r>
             <a:endParaRPr lang="en-US" sz="2800" dirty="0"/>
           </a:p>
@@ -7682,7 +7682,7 @@
                 <a:ea typeface="Trebuchet MS" pitchFamily="34" charset="-122"/>
                 <a:cs typeface="Trebuchet MS" pitchFamily="34" charset="-120"/>
               </a:rPr>
-              <a:t>elementary</a:t>
+              <a:t>secretary</a:t>
             </a:r>
             <a:endParaRPr lang="en-US" sz="2800" dirty="0"/>
           </a:p>
@@ -7821,7 +7821,7 @@
                 <a:ea typeface="Trebuchet MS" pitchFamily="34" charset="-122"/>
                 <a:cs typeface="Trebuchet MS" pitchFamily="34" charset="-120"/>
               </a:rPr>
-              <a:t>element</a:t>
+              <a:t>secret</a:t>
             </a:r>
             <a:endParaRPr lang="en-US" sz="1300" dirty="0"/>
           </a:p>
@@ -7860,7 +7860,7 @@
                 <a:ea typeface="Calibri" pitchFamily="34" charset="-122"/>
                 <a:cs typeface="Calibri" pitchFamily="34" charset="-120"/>
               </a:rPr>
-              <a:t>basic building block</a:t>
+              <a:t>secret, set apart</a:t>
             </a:r>
             <a:endParaRPr lang="en-US" sz="850" dirty="0"/>
           </a:p>
@@ -8667,7 +8667,7 @@
                 <a:ea typeface="Trebuchet MS" pitchFamily="34" charset="-122"/>
                 <a:cs typeface="Trebuchet MS" pitchFamily="34" charset="-120"/>
               </a:rPr>
-              <a:t>elementary</a:t>
+              <a:t>secretary</a:t>
             </a:r>
             <a:endParaRPr lang="en-US" sz="2800" dirty="0"/>
           </a:p>
@@ -8806,7 +8806,7 @@
                 <a:ea typeface="Trebuchet MS" pitchFamily="34" charset="-122"/>
                 <a:cs typeface="Trebuchet MS" pitchFamily="34" charset="-120"/>
               </a:rPr>
-              <a:t>element</a:t>
+              <a:t>secret</a:t>
             </a:r>
             <a:endParaRPr lang="en-US" sz="1300" dirty="0"/>
           </a:p>
@@ -8845,7 +8845,7 @@
                 <a:ea typeface="Calibri" pitchFamily="34" charset="-122"/>
                 <a:cs typeface="Calibri" pitchFamily="34" charset="-120"/>
               </a:rPr>
-              <a:t>basic building block</a:t>
+              <a:t>secret, set apart</a:t>
             </a:r>
             <a:endParaRPr lang="en-US" sz="850" dirty="0"/>
           </a:p>
@@ -9064,8 +9064,8 @@
         </p:nvSpPr>
         <p:spPr>
           <a:xfrm>
-            <a:off x="1978152" y="3364992"/>
-            <a:ext cx="1225296" cy="475488"/>
+            <a:off x="1975104" y="3364992"/>
+            <a:ext cx="1554480" cy="475488"/>
           </a:xfrm>
           <a:prstGeom prst="rect">
             <a:avLst>
@@ -9091,8 +9091,8 @@
         </p:nvSpPr>
         <p:spPr>
           <a:xfrm>
-            <a:off x="1978152" y="3364992"/>
-            <a:ext cx="1225296" cy="475488"/>
+            <a:off x="1975104" y="3364992"/>
+            <a:ext cx="1554480" cy="475488"/>
           </a:xfrm>
           <a:prstGeom prst="rect">
             <a:avLst/>
@@ -9116,7 +9116,7 @@
                 <a:ea typeface="Trebuchet MS" pitchFamily="34" charset="-122"/>
                 <a:cs typeface="Trebuchet MS" pitchFamily="34" charset="-120"/>
               </a:rPr>
-              <a:t>el</a:t>
+              <a:t>sec</a:t>
             </a:r>
             <a:endParaRPr lang="en-US" sz="1400" dirty="0"/>
           </a:p>
@@ -9130,8 +9130,8 @@
         </p:nvSpPr>
         <p:spPr>
           <a:xfrm>
-            <a:off x="3203448" y="3364992"/>
-            <a:ext cx="76200" cy="475488"/>
+            <a:off x="3529584" y="3364992"/>
+            <a:ext cx="73152" cy="475488"/>
           </a:xfrm>
           <a:prstGeom prst="rect">
             <a:avLst/>
@@ -9169,8 +9169,8 @@
         </p:nvSpPr>
         <p:spPr>
           <a:xfrm>
-            <a:off x="3279648" y="3364992"/>
-            <a:ext cx="1225296" cy="475488"/>
+            <a:off x="3602736" y="3364992"/>
+            <a:ext cx="1554480" cy="475488"/>
           </a:xfrm>
           <a:prstGeom prst="rect">
             <a:avLst>
@@ -9196,8 +9196,8 @@
         </p:nvSpPr>
         <p:spPr>
           <a:xfrm>
-            <a:off x="3279648" y="3364992"/>
-            <a:ext cx="1225296" cy="475488"/>
+            <a:off x="3602736" y="3364992"/>
+            <a:ext cx="1554480" cy="475488"/>
           </a:xfrm>
           <a:prstGeom prst="rect">
             <a:avLst/>
@@ -9221,7 +9221,7 @@
                 <a:ea typeface="Trebuchet MS" pitchFamily="34" charset="-122"/>
                 <a:cs typeface="Trebuchet MS" pitchFamily="34" charset="-120"/>
               </a:rPr>
-              <a:t>e</a:t>
+              <a:t>re</a:t>
             </a:r>
             <a:endParaRPr lang="en-US" sz="1400" dirty="0"/>
           </a:p>
@@ -9235,8 +9235,8 @@
         </p:nvSpPr>
         <p:spPr>
           <a:xfrm>
-            <a:off x="4504944" y="3364992"/>
-            <a:ext cx="76200" cy="475488"/>
+            <a:off x="5157216" y="3364992"/>
+            <a:ext cx="73152" cy="475488"/>
           </a:xfrm>
           <a:prstGeom prst="rect">
             <a:avLst/>
@@ -9274,8 +9274,8 @@
         </p:nvSpPr>
         <p:spPr>
           <a:xfrm>
-            <a:off x="4581144" y="3364992"/>
-            <a:ext cx="1225296" cy="475488"/>
+            <a:off x="5230368" y="3364992"/>
+            <a:ext cx="1554480" cy="475488"/>
           </a:xfrm>
           <a:prstGeom prst="rect">
             <a:avLst>
@@ -9301,8 +9301,8 @@
         </p:nvSpPr>
         <p:spPr>
           <a:xfrm>
-            <a:off x="4581144" y="3364992"/>
-            <a:ext cx="1225296" cy="475488"/>
+            <a:off x="5230368" y="3364992"/>
+            <a:ext cx="1554480" cy="475488"/>
           </a:xfrm>
           <a:prstGeom prst="rect">
             <a:avLst/>
@@ -9326,7 +9326,7 @@
                 <a:ea typeface="Trebuchet MS" pitchFamily="34" charset="-122"/>
                 <a:cs typeface="Trebuchet MS" pitchFamily="34" charset="-120"/>
               </a:rPr>
-              <a:t>men</a:t>
+              <a:t>ta</a:t>
             </a:r>
             <a:endParaRPr lang="en-US" sz="1400" dirty="0"/>
           </a:p>
@@ -9340,8 +9340,8 @@
         </p:nvSpPr>
         <p:spPr>
           <a:xfrm>
-            <a:off x="5806440" y="3364992"/>
-            <a:ext cx="76200" cy="475488"/>
+            <a:off x="6784848" y="3364992"/>
+            <a:ext cx="73152" cy="475488"/>
           </a:xfrm>
           <a:prstGeom prst="rect">
             <a:avLst/>
@@ -9379,8 +9379,8 @@
         </p:nvSpPr>
         <p:spPr>
           <a:xfrm>
-            <a:off x="5882640" y="3364992"/>
-            <a:ext cx="1225296" cy="475488"/>
+            <a:off x="6858000" y="3364992"/>
+            <a:ext cx="1554480" cy="475488"/>
           </a:xfrm>
           <a:prstGeom prst="rect">
             <a:avLst>
@@ -9406,8 +9406,8 @@
         </p:nvSpPr>
         <p:spPr>
           <a:xfrm>
-            <a:off x="5882640" y="3364992"/>
-            <a:ext cx="1225296" cy="475488"/>
+            <a:off x="6858000" y="3364992"/>
+            <a:ext cx="1554480" cy="475488"/>
           </a:xfrm>
           <a:prstGeom prst="rect">
             <a:avLst/>
@@ -9431,7 +9431,7 @@
                 <a:ea typeface="Trebuchet MS" pitchFamily="34" charset="-122"/>
                 <a:cs typeface="Trebuchet MS" pitchFamily="34" charset="-120"/>
               </a:rPr>
-              <a:t>ta</a:t>
+              <a:t>ry</a:t>
             </a:r>
             <a:endParaRPr lang="en-US" sz="1400" dirty="0"/>
           </a:p>
@@ -9439,119 +9439,80 @@
       </p:sp>
       <p:sp>
         <p:nvSpPr>
-          <p:cNvPr id="36" name="Text 34"/>
-          <p:cNvSpPr/>
-          <p:nvPr/>
-        </p:nvSpPr>
-        <p:spPr>
-          <a:xfrm>
-            <a:off x="7107936" y="3364992"/>
-            <a:ext cx="76200" cy="475488"/>
-          </a:xfrm>
-          <a:prstGeom prst="rect">
-            <a:avLst/>
-          </a:prstGeom>
-          <a:noFill/>
-          <a:ln/>
-        </p:spPr>
-        <p:txBody>
-          <a:bodyPr wrap="square" lIns="0" tIns="0" rIns="0" bIns="0" rtlCol="0" anchor="ctr"/>
-          <a:lstStyle/>
-          <a:p>
-            <a:pPr algn="ctr" indent="0" marL="0">
-              <a:buNone/>
-            </a:pPr>
-            <a:r>
-              <a:rPr lang="en-US" sz="1600" b="1" dirty="0">
-                <a:solidFill>
-                  <a:srgbClr val="0D9488"/>
+          <p:cNvPr id="36" name="Shape 34"/>
+          <p:cNvSpPr/>
+          <p:nvPr/>
+        </p:nvSpPr>
+        <p:spPr>
+          <a:xfrm>
+            <a:off x="365760" y="4096512"/>
+            <a:ext cx="1371600" cy="804672"/>
+          </a:xfrm>
+          <a:prstGeom prst="rect">
+            <a:avLst>
+              <a:gd name="adj" fmla="val 6818"/>
+            </a:avLst>
+          </a:prstGeom>
+          <a:solidFill>
+            <a:srgbClr val="E2E8F0"/>
+          </a:solidFill>
+          <a:ln w="12700">
+            <a:solidFill>
+              <a:srgbClr val="E2E8F0"/>
+            </a:solidFill>
+            <a:prstDash val="solid"/>
+          </a:ln>
+        </p:spPr>
+      </p:sp>
+      <p:sp>
+        <p:nvSpPr>
+          <p:cNvPr id="37" name="Text 35"/>
+          <p:cNvSpPr/>
+          <p:nvPr/>
+        </p:nvSpPr>
+        <p:spPr>
+          <a:xfrm>
+            <a:off x="365760" y="4096512"/>
+            <a:ext cx="1371600" cy="804672"/>
+          </a:xfrm>
+          <a:prstGeom prst="rect">
+            <a:avLst/>
+          </a:prstGeom>
+          <a:noFill/>
+          <a:ln/>
+        </p:spPr>
+        <p:txBody>
+          <a:bodyPr wrap="square" lIns="0" tIns="0" rIns="0" bIns="0" rtlCol="0" anchor="ctr"/>
+          <a:lstStyle/>
+          <a:p>
+            <a:pPr algn="ctr" indent="0" marL="0">
+              <a:buNone/>
+            </a:pPr>
+            <a:r>
+              <a:rPr lang="en-US" sz="1100" b="1" dirty="0">
+                <a:solidFill>
+                  <a:srgbClr val="475569"/>
                 </a:solidFill>
                 <a:latin typeface="Trebuchet MS" pitchFamily="34" charset="0"/>
                 <a:ea typeface="Trebuchet MS" pitchFamily="34" charset="-122"/>
                 <a:cs typeface="Trebuchet MS" pitchFamily="34" charset="-120"/>
               </a:rPr>
-              <a:t>·</a:t>
-            </a:r>
-            <a:endParaRPr lang="en-US" sz="1600" dirty="0"/>
-          </a:p>
-        </p:txBody>
-      </p:sp>
-      <p:sp>
-        <p:nvSpPr>
-          <p:cNvPr id="37" name="Shape 35"/>
-          <p:cNvSpPr/>
-          <p:nvPr/>
-        </p:nvSpPr>
-        <p:spPr>
-          <a:xfrm>
-            <a:off x="7184136" y="3364992"/>
-            <a:ext cx="1225296" cy="475488"/>
-          </a:xfrm>
-          <a:prstGeom prst="rect">
-            <a:avLst>
-              <a:gd name="adj" fmla="val 9615"/>
-            </a:avLst>
-          </a:prstGeom>
-          <a:solidFill>
-            <a:srgbClr val="FFFFFF"/>
-          </a:solidFill>
-          <a:ln w="12700">
-            <a:solidFill>
-              <a:srgbClr val="0D9488"/>
-            </a:solidFill>
-            <a:prstDash val="solid"/>
-          </a:ln>
-        </p:spPr>
-      </p:sp>
-      <p:sp>
-        <p:nvSpPr>
-          <p:cNvPr id="38" name="Text 36"/>
-          <p:cNvSpPr/>
-          <p:nvPr/>
-        </p:nvSpPr>
-        <p:spPr>
-          <a:xfrm>
-            <a:off x="7184136" y="3364992"/>
-            <a:ext cx="1225296" cy="475488"/>
-          </a:xfrm>
-          <a:prstGeom prst="rect">
-            <a:avLst/>
-          </a:prstGeom>
-          <a:noFill/>
-          <a:ln/>
-        </p:spPr>
-        <p:txBody>
-          <a:bodyPr wrap="square" lIns="0" tIns="0" rIns="0" bIns="0" rtlCol="0" anchor="ctr"/>
-          <a:lstStyle/>
-          <a:p>
-            <a:pPr algn="ctr" indent="0" marL="0">
-              <a:buNone/>
-            </a:pPr>
-            <a:r>
-              <a:rPr lang="en-US" sz="1400" b="1" dirty="0">
-                <a:solidFill>
-                  <a:srgbClr val="0D9488"/>
-                </a:solidFill>
-                <a:latin typeface="Trebuchet MS" pitchFamily="34" charset="0"/>
-                <a:ea typeface="Trebuchet MS" pitchFamily="34" charset="-122"/>
-                <a:cs typeface="Trebuchet MS" pitchFamily="34" charset="-120"/>
-              </a:rPr>
-              <a:t>ry</a:t>
-            </a:r>
-            <a:endParaRPr lang="en-US" sz="1400" dirty="0"/>
-          </a:p>
-        </p:txBody>
-      </p:sp>
-      <p:sp>
-        <p:nvSpPr>
-          <p:cNvPr id="39" name="Shape 37"/>
-          <p:cNvSpPr/>
-          <p:nvPr/>
-        </p:nvSpPr>
-        <p:spPr>
-          <a:xfrm>
-            <a:off x="365760" y="4096512"/>
-            <a:ext cx="1371600" cy="804672"/>
+              <a:t>Phonemes</a:t>
+            </a:r>
+            <a:endParaRPr lang="en-US" sz="1100" dirty="0"/>
+          </a:p>
+        </p:txBody>
+      </p:sp>
+      <p:sp>
+        <p:nvSpPr>
+          <p:cNvPr id="38" name="Shape 36"/>
+          <p:cNvSpPr/>
+          <p:nvPr/>
+        </p:nvSpPr>
+        <p:spPr>
+          <a:xfrm>
+            <a:off x="1874520" y="4096512"/>
+            <a:ext cx="6903720" cy="804672"/>
           </a:xfrm>
           <a:prstGeom prst="rect">
             <a:avLst>
@@ -9559,85 +9520,19 @@
             </a:avLst>
           </a:prstGeom>
           <a:solidFill>
-            <a:srgbClr val="E2E8F0"/>
+            <a:srgbClr val="F8FAFC"/>
           </a:solidFill>
           <a:ln w="12700">
             <a:solidFill>
               <a:srgbClr val="E2E8F0"/>
             </a:solidFill>
-            <a:prstDash val="solid"/>
-          </a:ln>
-        </p:spPr>
-      </p:sp>
-      <p:sp>
-        <p:nvSpPr>
-          <p:cNvPr id="40" name="Text 38"/>
-          <p:cNvSpPr/>
-          <p:nvPr/>
-        </p:nvSpPr>
-        <p:spPr>
-          <a:xfrm>
-            <a:off x="365760" y="4096512"/>
-            <a:ext cx="1371600" cy="804672"/>
-          </a:xfrm>
-          <a:prstGeom prst="rect">
-            <a:avLst/>
-          </a:prstGeom>
-          <a:noFill/>
-          <a:ln/>
-        </p:spPr>
-        <p:txBody>
-          <a:bodyPr wrap="square" lIns="0" tIns="0" rIns="0" bIns="0" rtlCol="0" anchor="ctr"/>
-          <a:lstStyle/>
-          <a:p>
-            <a:pPr algn="ctr" indent="0" marL="0">
-              <a:buNone/>
-            </a:pPr>
-            <a:r>
-              <a:rPr lang="en-US" sz="1100" b="1" dirty="0">
-                <a:solidFill>
-                  <a:srgbClr val="475569"/>
-                </a:solidFill>
-                <a:latin typeface="Trebuchet MS" pitchFamily="34" charset="0"/>
-                <a:ea typeface="Trebuchet MS" pitchFamily="34" charset="-122"/>
-                <a:cs typeface="Trebuchet MS" pitchFamily="34" charset="-120"/>
-              </a:rPr>
-              <a:t>Phonemes</a:t>
-            </a:r>
-            <a:endParaRPr lang="en-US" sz="1100" dirty="0"/>
-          </a:p>
-        </p:txBody>
-      </p:sp>
-      <p:sp>
-        <p:nvSpPr>
-          <p:cNvPr id="41" name="Shape 39"/>
-          <p:cNvSpPr/>
-          <p:nvPr/>
-        </p:nvSpPr>
-        <p:spPr>
-          <a:xfrm>
-            <a:off x="1874520" y="4096512"/>
-            <a:ext cx="6903720" cy="804672"/>
-          </a:xfrm>
-          <a:prstGeom prst="rect">
-            <a:avLst>
-              <a:gd name="adj" fmla="val 6818"/>
-            </a:avLst>
-          </a:prstGeom>
-          <a:solidFill>
-            <a:srgbClr val="F8FAFC"/>
-          </a:solidFill>
-          <a:ln w="12700">
-            <a:solidFill>
-              <a:srgbClr val="E2E8F0"/>
-            </a:solidFill>
             <a:prstDash val="dash"/>
           </a:ln>
         </p:spPr>
       </p:sp>
       <p:sp>
         <p:nvSpPr>
-          <p:cNvPr id="42" name="Text 40"/>
+          <p:cNvPr id="39" name="Text 37"/>
           <p:cNvSpPr/>
           <p:nvPr/>
         </p:nvSpPr>
@@ -10099,7 +9994,7 @@
                 <a:ea typeface="Trebuchet MS" pitchFamily="34" charset="-122"/>
                 <a:cs typeface="Trebuchet MS" pitchFamily="34" charset="-120"/>
               </a:rPr>
-              <a:t>elementary</a:t>
+              <a:t>secretary</a:t>
             </a:r>
             <a:endParaRPr lang="en-US" sz="2800" dirty="0"/>
           </a:p>
@@ -10238,7 +10133,7 @@
                 <a:ea typeface="Trebuchet MS" pitchFamily="34" charset="-122"/>
                 <a:cs typeface="Trebuchet MS" pitchFamily="34" charset="-120"/>
               </a:rPr>
-              <a:t>element</a:t>
+              <a:t>secret</a:t>
             </a:r>
             <a:endParaRPr lang="en-US" sz="1300" dirty="0"/>
           </a:p>
@@ -10277,7 +10172,7 @@
                 <a:ea typeface="Calibri" pitchFamily="34" charset="-122"/>
                 <a:cs typeface="Calibri" pitchFamily="34" charset="-120"/>
               </a:rPr>
-              <a:t>basic building block</a:t>
+              <a:t>secret, set apart</a:t>
             </a:r>
             <a:endParaRPr lang="en-US" sz="850" dirty="0"/>
           </a:p>
@@ -10496,8 +10391,8 @@
         </p:nvSpPr>
         <p:spPr>
           <a:xfrm>
-            <a:off x="1978152" y="3364992"/>
-            <a:ext cx="1225296" cy="475488"/>
+            <a:off x="1975104" y="3364992"/>
+            <a:ext cx="1554480" cy="475488"/>
           </a:xfrm>
           <a:prstGeom prst="rect">
             <a:avLst>
@@ -10523,8 +10418,8 @@
         </p:nvSpPr>
         <p:spPr>
           <a:xfrm>
-            <a:off x="1978152" y="3364992"/>
-            <a:ext cx="1225296" cy="475488"/>
+            <a:off x="1975104" y="3364992"/>
+            <a:ext cx="1554480" cy="475488"/>
           </a:xfrm>
           <a:prstGeom prst="rect">
             <a:avLst/>
@@ -10548,7 +10443,7 @@
                 <a:ea typeface="Trebuchet MS" pitchFamily="34" charset="-122"/>
                 <a:cs typeface="Trebuchet MS" pitchFamily="34" charset="-120"/>
               </a:rPr>
-              <a:t>el</a:t>
+              <a:t>sec</a:t>
             </a:r>
             <a:endParaRPr lang="en-US" sz="1400" dirty="0"/>
           </a:p>
@@ -10562,8 +10457,8 @@
         </p:nvSpPr>
         <p:spPr>
           <a:xfrm>
-            <a:off x="3203448" y="3364992"/>
-            <a:ext cx="76200" cy="475488"/>
+            <a:off x="3529584" y="3364992"/>
+            <a:ext cx="73152" cy="475488"/>
           </a:xfrm>
           <a:prstGeom prst="rect">
             <a:avLst/>
@@ -10601,8 +10496,8 @@
         </p:nvSpPr>
         <p:spPr>
           <a:xfrm>
-            <a:off x="3279648" y="3364992"/>
-            <a:ext cx="1225296" cy="475488"/>
+            <a:off x="3602736" y="3364992"/>
+            <a:ext cx="1554480" cy="475488"/>
           </a:xfrm>
           <a:prstGeom prst="rect">
             <a:avLst>
@@ -10628,8 +10523,8 @@
         </p:nvSpPr>
         <p:spPr>
           <a:xfrm>
-            <a:off x="3279648" y="3364992"/>
-            <a:ext cx="1225296" cy="475488"/>
+            <a:off x="3602736" y="3364992"/>
+            <a:ext cx="1554480" cy="475488"/>
           </a:xfrm>
           <a:prstGeom prst="rect">
             <a:avLst/>
@@ -10653,7 +10548,7 @@
                 <a:ea typeface="Trebuchet MS" pitchFamily="34" charset="-122"/>
                 <a:cs typeface="Trebuchet MS" pitchFamily="34" charset="-120"/>
               </a:rPr>
-              <a:t>e</a:t>
+              <a:t>re</a:t>
             </a:r>
             <a:endParaRPr lang="en-US" sz="1400" dirty="0"/>
           </a:p>
@@ -10667,8 +10562,8 @@
         </p:nvSpPr>
         <p:spPr>
           <a:xfrm>
-            <a:off x="4504944" y="3364992"/>
-            <a:ext cx="76200" cy="475488"/>
+            <a:off x="5157216" y="3364992"/>
+            <a:ext cx="73152" cy="475488"/>
           </a:xfrm>
           <a:prstGeom prst="rect">
             <a:avLst/>
@@ -10706,8 +10601,8 @@
         </p:nvSpPr>
         <p:spPr>
           <a:xfrm>
-            <a:off x="4581144" y="3364992"/>
-            <a:ext cx="1225296" cy="475488"/>
+            <a:off x="5230368" y="3364992"/>
+            <a:ext cx="1554480" cy="475488"/>
           </a:xfrm>
           <a:prstGeom prst="rect">
             <a:avLst>
@@ -10733,8 +10628,8 @@
         </p:nvSpPr>
         <p:spPr>
           <a:xfrm>
-            <a:off x="4581144" y="3364992"/>
-            <a:ext cx="1225296" cy="475488"/>
+            <a:off x="5230368" y="3364992"/>
+            <a:ext cx="1554480" cy="475488"/>
           </a:xfrm>
           <a:prstGeom prst="rect">
             <a:avLst/>
@@ -10758,7 +10653,7 @@
                 <a:ea typeface="Trebuchet MS" pitchFamily="34" charset="-122"/>
                 <a:cs typeface="Trebuchet MS" pitchFamily="34" charset="-120"/>
               </a:rPr>
-              <a:t>men</a:t>
+              <a:t>ta</a:t>
             </a:r>
             <a:endParaRPr lang="en-US" sz="1400" dirty="0"/>
           </a:p>
@@ -10772,8 +10667,8 @@
         </p:nvSpPr>
         <p:spPr>
           <a:xfrm>
-            <a:off x="5806440" y="3364992"/>
-            <a:ext cx="76200" cy="475488"/>
+            <a:off x="6784848" y="3364992"/>
+            <a:ext cx="73152" cy="475488"/>
           </a:xfrm>
           <a:prstGeom prst="rect">
             <a:avLst/>
@@ -10811,8 +10706,8 @@
         </p:nvSpPr>
         <p:spPr>
           <a:xfrm>
-            <a:off x="5882640" y="3364992"/>
-            <a:ext cx="1225296" cy="475488"/>
+            <a:off x="6858000" y="3364992"/>
+            <a:ext cx="1554480" cy="475488"/>
           </a:xfrm>
           <a:prstGeom prst="rect">
             <a:avLst>
@@ -10838,8 +10733,8 @@
         </p:nvSpPr>
         <p:spPr>
           <a:xfrm>
-            <a:off x="5882640" y="3364992"/>
-            <a:ext cx="1225296" cy="475488"/>
+            <a:off x="6858000" y="3364992"/>
+            <a:ext cx="1554480" cy="475488"/>
           </a:xfrm>
           <a:prstGeom prst="rect">
             <a:avLst/>
@@ -10863,7 +10758,7 @@
                 <a:ea typeface="Trebuchet MS" pitchFamily="34" charset="-122"/>
                 <a:cs typeface="Trebuchet MS" pitchFamily="34" charset="-120"/>
               </a:rPr>
-              <a:t>ta</a:t>
+              <a:t>ry</a:t>
             </a:r>
             <a:endParaRPr lang="en-US" sz="1400" dirty="0"/>
           </a:p>
@@ -10871,193 +10766,247 @@
       </p:sp>
       <p:sp>
         <p:nvSpPr>
-          <p:cNvPr id="36" name="Text 34"/>
-          <p:cNvSpPr/>
-          <p:nvPr/>
-        </p:nvSpPr>
-        <p:spPr>
-          <a:xfrm>
-            <a:off x="7107936" y="3364992"/>
-            <a:ext cx="76200" cy="475488"/>
-          </a:xfrm>
-          <a:prstGeom prst="rect">
-            <a:avLst/>
-          </a:prstGeom>
-          <a:noFill/>
-          <a:ln/>
-        </p:spPr>
-        <p:txBody>
-          <a:bodyPr wrap="square" lIns="0" tIns="0" rIns="0" bIns="0" rtlCol="0" anchor="ctr"/>
-          <a:lstStyle/>
-          <a:p>
-            <a:pPr algn="ctr" indent="0" marL="0">
-              <a:buNone/>
-            </a:pPr>
-            <a:r>
-              <a:rPr lang="en-US" sz="1600" b="1" dirty="0">
-                <a:solidFill>
-                  <a:srgbClr val="0D9488"/>
+          <p:cNvPr id="36" name="Shape 34"/>
+          <p:cNvSpPr/>
+          <p:nvPr/>
+        </p:nvSpPr>
+        <p:spPr>
+          <a:xfrm>
+            <a:off x="365760" y="4096512"/>
+            <a:ext cx="1371600" cy="804672"/>
+          </a:xfrm>
+          <a:prstGeom prst="rect">
+            <a:avLst>
+              <a:gd name="adj" fmla="val 6818"/>
+            </a:avLst>
+          </a:prstGeom>
+          <a:solidFill>
+            <a:srgbClr val="E2E8F0"/>
+          </a:solidFill>
+          <a:ln w="12700">
+            <a:solidFill>
+              <a:srgbClr val="E2E8F0"/>
+            </a:solidFill>
+            <a:prstDash val="solid"/>
+          </a:ln>
+        </p:spPr>
+      </p:sp>
+      <p:sp>
+        <p:nvSpPr>
+          <p:cNvPr id="37" name="Text 35"/>
+          <p:cNvSpPr/>
+          <p:nvPr/>
+        </p:nvSpPr>
+        <p:spPr>
+          <a:xfrm>
+            <a:off x="365760" y="4096512"/>
+            <a:ext cx="1371600" cy="804672"/>
+          </a:xfrm>
+          <a:prstGeom prst="rect">
+            <a:avLst/>
+          </a:prstGeom>
+          <a:noFill/>
+          <a:ln/>
+        </p:spPr>
+        <p:txBody>
+          <a:bodyPr wrap="square" lIns="0" tIns="0" rIns="0" bIns="0" rtlCol="0" anchor="ctr"/>
+          <a:lstStyle/>
+          <a:p>
+            <a:pPr algn="ctr" indent="0" marL="0">
+              <a:buNone/>
+            </a:pPr>
+            <a:r>
+              <a:rPr lang="en-US" sz="1100" b="1" dirty="0">
+                <a:solidFill>
+                  <a:srgbClr val="475569"/>
                 </a:solidFill>
                 <a:latin typeface="Trebuchet MS" pitchFamily="34" charset="0"/>
                 <a:ea typeface="Trebuchet MS" pitchFamily="34" charset="-122"/>
                 <a:cs typeface="Trebuchet MS" pitchFamily="34" charset="-120"/>
               </a:rPr>
-              <a:t>·</a:t>
-            </a:r>
-            <a:endParaRPr lang="en-US" sz="1600" dirty="0"/>
-          </a:p>
-        </p:txBody>
-      </p:sp>
-      <p:sp>
-        <p:nvSpPr>
-          <p:cNvPr id="37" name="Shape 35"/>
-          <p:cNvSpPr/>
-          <p:nvPr/>
-        </p:nvSpPr>
-        <p:spPr>
-          <a:xfrm>
-            <a:off x="7184136" y="3364992"/>
-            <a:ext cx="1225296" cy="475488"/>
+              <a:t>Phonemes</a:t>
+            </a:r>
+            <a:endParaRPr lang="en-US" sz="1100" dirty="0"/>
+          </a:p>
+        </p:txBody>
+      </p:sp>
+      <p:sp>
+        <p:nvSpPr>
+          <p:cNvPr id="38" name="Shape 36"/>
+          <p:cNvSpPr/>
+          <p:nvPr/>
+        </p:nvSpPr>
+        <p:spPr>
+          <a:xfrm>
+            <a:off x="1874520" y="4096512"/>
+            <a:ext cx="6903720" cy="804672"/>
           </a:xfrm>
           <a:prstGeom prst="rect">
             <a:avLst>
-              <a:gd name="adj" fmla="val 9615"/>
+              <a:gd name="adj" fmla="val 6818"/>
             </a:avLst>
           </a:prstGeom>
           <a:solidFill>
+            <a:srgbClr val="FCE7F3"/>
+          </a:solidFill>
+          <a:ln w="12700">
+            <a:solidFill>
+              <a:srgbClr val="DB2777"/>
+            </a:solidFill>
+            <a:prstDash val="solid"/>
+          </a:ln>
+        </p:spPr>
+      </p:sp>
+      <p:sp>
+        <p:nvSpPr>
+          <p:cNvPr id="39" name="Shape 37"/>
+          <p:cNvSpPr/>
+          <p:nvPr/>
+        </p:nvSpPr>
+        <p:spPr>
+          <a:xfrm>
+            <a:off x="1951330" y="4169664"/>
+            <a:ext cx="676656" cy="384048"/>
+          </a:xfrm>
+          <a:prstGeom prst="rect">
+            <a:avLst>
+              <a:gd name="adj" fmla="val 9524"/>
+            </a:avLst>
+          </a:prstGeom>
+          <a:solidFill>
             <a:srgbClr val="FFFFFF"/>
           </a:solidFill>
           <a:ln w="12700">
             <a:solidFill>
-              <a:srgbClr val="0D9488"/>
-            </a:solidFill>
-            <a:prstDash val="solid"/>
-          </a:ln>
-        </p:spPr>
-      </p:sp>
-      <p:sp>
-        <p:nvSpPr>
-          <p:cNvPr id="38" name="Text 36"/>
-          <p:cNvSpPr/>
-          <p:nvPr/>
-        </p:nvSpPr>
-        <p:spPr>
-          <a:xfrm>
-            <a:off x="7184136" y="3364992"/>
-            <a:ext cx="1225296" cy="475488"/>
-          </a:xfrm>
-          <a:prstGeom prst="rect">
-            <a:avLst/>
-          </a:prstGeom>
-          <a:noFill/>
-          <a:ln/>
-        </p:spPr>
-        <p:txBody>
-          <a:bodyPr wrap="square" lIns="0" tIns="0" rIns="0" bIns="0" rtlCol="0" anchor="ctr"/>
-          <a:lstStyle/>
-          <a:p>
-            <a:pPr algn="ctr" indent="0" marL="0">
-              <a:buNone/>
-            </a:pPr>
-            <a:r>
-              <a:rPr lang="en-US" sz="1400" b="1" dirty="0">
-                <a:solidFill>
-                  <a:srgbClr val="0D9488"/>
+              <a:srgbClr val="DB2777"/>
+            </a:solidFill>
+            <a:prstDash val="solid"/>
+          </a:ln>
+        </p:spPr>
+      </p:sp>
+      <p:sp>
+        <p:nvSpPr>
+          <p:cNvPr id="40" name="Text 38"/>
+          <p:cNvSpPr/>
+          <p:nvPr/>
+        </p:nvSpPr>
+        <p:spPr>
+          <a:xfrm>
+            <a:off x="1951330" y="4169664"/>
+            <a:ext cx="676656" cy="384048"/>
+          </a:xfrm>
+          <a:prstGeom prst="rect">
+            <a:avLst/>
+          </a:prstGeom>
+          <a:noFill/>
+          <a:ln/>
+        </p:spPr>
+        <p:txBody>
+          <a:bodyPr wrap="square" lIns="0" tIns="0" rIns="0" bIns="0" rtlCol="0" anchor="ctr"/>
+          <a:lstStyle/>
+          <a:p>
+            <a:pPr algn="ctr" indent="0" marL="0">
+              <a:buNone/>
+            </a:pPr>
+            <a:r>
+              <a:rPr lang="en-US" sz="900" b="1" dirty="0">
+                <a:solidFill>
+                  <a:srgbClr val="9D174D"/>
                 </a:solidFill>
                 <a:latin typeface="Trebuchet MS" pitchFamily="34" charset="0"/>
                 <a:ea typeface="Trebuchet MS" pitchFamily="34" charset="-122"/>
                 <a:cs typeface="Trebuchet MS" pitchFamily="34" charset="-120"/>
               </a:rPr>
-              <a:t>ry</a:t>
-            </a:r>
-            <a:endParaRPr lang="en-US" sz="1400" dirty="0"/>
-          </a:p>
-        </p:txBody>
-      </p:sp>
-      <p:sp>
-        <p:nvSpPr>
-          <p:cNvPr id="39" name="Shape 37"/>
-          <p:cNvSpPr/>
-          <p:nvPr/>
-        </p:nvSpPr>
-        <p:spPr>
-          <a:xfrm>
-            <a:off x="365760" y="4096512"/>
-            <a:ext cx="1371600" cy="804672"/>
+              <a:t>s</a:t>
+            </a:r>
+            <a:endParaRPr lang="en-US" sz="900" dirty="0"/>
+          </a:p>
+        </p:txBody>
+      </p:sp>
+      <p:sp>
+        <p:nvSpPr>
+          <p:cNvPr id="41" name="Shape 39"/>
+          <p:cNvSpPr/>
+          <p:nvPr/>
+        </p:nvSpPr>
+        <p:spPr>
+          <a:xfrm>
+            <a:off x="2677363" y="4169664"/>
+            <a:ext cx="676656" cy="384048"/>
           </a:xfrm>
           <a:prstGeom prst="rect">
             <a:avLst>
-              <a:gd name="adj" fmla="val 6818"/>
+              <a:gd name="adj" fmla="val 9524"/>
             </a:avLst>
           </a:prstGeom>
           <a:solidFill>
-            <a:srgbClr val="E2E8F0"/>
-          </a:solidFill>
-          <a:ln w="12700">
-            <a:solidFill>
-              <a:srgbClr val="E2E8F0"/>
-            </a:solidFill>
-            <a:prstDash val="solid"/>
-          </a:ln>
-        </p:spPr>
-      </p:sp>
-      <p:sp>
-        <p:nvSpPr>
-          <p:cNvPr id="40" name="Text 38"/>
-          <p:cNvSpPr/>
-          <p:nvPr/>
-        </p:nvSpPr>
-        <p:spPr>
-          <a:xfrm>
-            <a:off x="365760" y="4096512"/>
-            <a:ext cx="1371600" cy="804672"/>
-          </a:xfrm>
-          <a:prstGeom prst="rect">
-            <a:avLst/>
-          </a:prstGeom>
-          <a:noFill/>
-          <a:ln/>
-        </p:spPr>
-        <p:txBody>
-          <a:bodyPr wrap="square" lIns="0" tIns="0" rIns="0" bIns="0" rtlCol="0" anchor="ctr"/>
-          <a:lstStyle/>
-          <a:p>
-            <a:pPr algn="ctr" indent="0" marL="0">
-              <a:buNone/>
-            </a:pPr>
-            <a:r>
-              <a:rPr lang="en-US" sz="1100" b="1" dirty="0">
-                <a:solidFill>
-                  <a:srgbClr val="475569"/>
+            <a:srgbClr val="FFFFFF"/>
+          </a:solidFill>
+          <a:ln w="12700">
+            <a:solidFill>
+              <a:srgbClr val="DB2777"/>
+            </a:solidFill>
+            <a:prstDash val="solid"/>
+          </a:ln>
+        </p:spPr>
+      </p:sp>
+      <p:sp>
+        <p:nvSpPr>
+          <p:cNvPr id="42" name="Text 40"/>
+          <p:cNvSpPr/>
+          <p:nvPr/>
+        </p:nvSpPr>
+        <p:spPr>
+          <a:xfrm>
+            <a:off x="2677363" y="4169664"/>
+            <a:ext cx="676656" cy="384048"/>
+          </a:xfrm>
+          <a:prstGeom prst="rect">
+            <a:avLst/>
+          </a:prstGeom>
+          <a:noFill/>
+          <a:ln/>
+        </p:spPr>
+        <p:txBody>
+          <a:bodyPr wrap="square" lIns="0" tIns="0" rIns="0" bIns="0" rtlCol="0" anchor="ctr"/>
+          <a:lstStyle/>
+          <a:p>
+            <a:pPr algn="ctr" indent="0" marL="0">
+              <a:buNone/>
+            </a:pPr>
+            <a:r>
+              <a:rPr lang="en-US" sz="900" b="1" dirty="0">
+                <a:solidFill>
+                  <a:srgbClr val="9D174D"/>
                 </a:solidFill>
                 <a:latin typeface="Trebuchet MS" pitchFamily="34" charset="0"/>
                 <a:ea typeface="Trebuchet MS" pitchFamily="34" charset="-122"/>
                 <a:cs typeface="Trebuchet MS" pitchFamily="34" charset="-120"/>
               </a:rPr>
-              <a:t>Phonemes</a:t>
-            </a:r>
-            <a:endParaRPr lang="en-US" sz="1100" dirty="0"/>
-          </a:p>
-        </p:txBody>
-      </p:sp>
-      <p:sp>
-        <p:nvSpPr>
-          <p:cNvPr id="41" name="Shape 39"/>
-          <p:cNvSpPr/>
-          <p:nvPr/>
-        </p:nvSpPr>
-        <p:spPr>
-          <a:xfrm>
-            <a:off x="1874520" y="4096512"/>
-            <a:ext cx="6903720" cy="658368"/>
+              <a:t>e</a:t>
+            </a:r>
+            <a:endParaRPr lang="en-US" sz="900" dirty="0"/>
+          </a:p>
+        </p:txBody>
+      </p:sp>
+      <p:sp>
+        <p:nvSpPr>
+          <p:cNvPr id="43" name="Shape 41"/>
+          <p:cNvSpPr/>
+          <p:nvPr/>
+        </p:nvSpPr>
+        <p:spPr>
+          <a:xfrm>
+            <a:off x="3403397" y="4169664"/>
+            <a:ext cx="676656" cy="384048"/>
           </a:xfrm>
           <a:prstGeom prst="rect">
             <a:avLst>
-              <a:gd name="adj" fmla="val 8333"/>
+              <a:gd name="adj" fmla="val 9524"/>
             </a:avLst>
           </a:prstGeom>
           <a:solidFill>
-            <a:srgbClr val="FCE7F3"/>
+            <a:srgbClr val="FFFFFF"/>
           </a:solidFill>
           <a:ln w="12700">
             <a:solidFill>
@@ -11069,41 +11018,14 @@
       </p:sp>
       <p:sp>
         <p:nvSpPr>
-          <p:cNvPr id="42" name="Shape 40"/>
-          <p:cNvSpPr/>
-          <p:nvPr/>
-        </p:nvSpPr>
-        <p:spPr>
-          <a:xfrm>
-            <a:off x="1951828" y="4169664"/>
-            <a:ext cx="603504" cy="475488"/>
-          </a:xfrm>
-          <a:prstGeom prst="rect">
-            <a:avLst>
-              <a:gd name="adj" fmla="val 7692"/>
-            </a:avLst>
-          </a:prstGeom>
-          <a:solidFill>
-            <a:srgbClr val="FFFFFF"/>
-          </a:solidFill>
-          <a:ln w="12700">
-            <a:solidFill>
-              <a:srgbClr val="DB2777"/>
-            </a:solidFill>
-            <a:prstDash val="solid"/>
-          </a:ln>
-        </p:spPr>
-      </p:sp>
-      <p:sp>
-        <p:nvSpPr>
-          <p:cNvPr id="43" name="Text 41"/>
-          <p:cNvSpPr/>
-          <p:nvPr/>
-        </p:nvSpPr>
-        <p:spPr>
-          <a:xfrm>
-            <a:off x="1951828" y="4169664"/>
-            <a:ext cx="603504" cy="475488"/>
+          <p:cNvPr id="44" name="Text 42"/>
+          <p:cNvSpPr/>
+          <p:nvPr/>
+        </p:nvSpPr>
+        <p:spPr>
+          <a:xfrm>
+            <a:off x="3403397" y="4169664"/>
+            <a:ext cx="676656" cy="384048"/>
           </a:xfrm>
           <a:prstGeom prst="rect">
             <a:avLst/>
@@ -11127,7 +11049,7 @@
                 <a:ea typeface="Trebuchet MS" pitchFamily="34" charset="-122"/>
                 <a:cs typeface="Trebuchet MS" pitchFamily="34" charset="-120"/>
               </a:rPr>
-              <a:t>e</a:t>
+              <a:t>c</a:t>
             </a:r>
             <a:endParaRPr lang="en-US" sz="900" dirty="0"/>
           </a:p>
@@ -11135,18 +11057,57 @@
       </p:sp>
       <p:sp>
         <p:nvSpPr>
-          <p:cNvPr id="44" name="Shape 42"/>
-          <p:cNvSpPr/>
-          <p:nvPr/>
-        </p:nvSpPr>
-        <p:spPr>
-          <a:xfrm>
-            <a:off x="2605209" y="4169664"/>
-            <a:ext cx="603504" cy="475488"/>
+          <p:cNvPr id="45" name="Text 43"/>
+          <p:cNvSpPr/>
+          <p:nvPr/>
+        </p:nvSpPr>
+        <p:spPr>
+          <a:xfrm>
+            <a:off x="3403397" y="4572000"/>
+            <a:ext cx="676656" cy="219456"/>
+          </a:xfrm>
+          <a:prstGeom prst="rect">
+            <a:avLst/>
+          </a:prstGeom>
+          <a:noFill/>
+          <a:ln/>
+        </p:spPr>
+        <p:txBody>
+          <a:bodyPr wrap="square" lIns="0" tIns="0" rIns="0" bIns="0" rtlCol="0" anchor="t"/>
+          <a:lstStyle/>
+          <a:p>
+            <a:pPr algn="ctr" indent="0" marL="0">
+              <a:buNone/>
+            </a:pPr>
+            <a:r>
+              <a:rPr lang="en-US" sz="750" i="1" dirty="0">
+                <a:solidFill>
+                  <a:srgbClr val="94A3B8"/>
+                </a:solidFill>
+                <a:latin typeface="Calibri" pitchFamily="34" charset="0"/>
+                <a:ea typeface="Calibri" pitchFamily="34" charset="-122"/>
+                <a:cs typeface="Calibri" pitchFamily="34" charset="-120"/>
+              </a:rPr>
+              <a:t>/k/</a:t>
+            </a:r>
+            <a:endParaRPr lang="en-US" sz="750" dirty="0"/>
+          </a:p>
+        </p:txBody>
+      </p:sp>
+      <p:sp>
+        <p:nvSpPr>
+          <p:cNvPr id="46" name="Shape 44"/>
+          <p:cNvSpPr/>
+          <p:nvPr/>
+        </p:nvSpPr>
+        <p:spPr>
+          <a:xfrm>
+            <a:off x="4129430" y="4169664"/>
+            <a:ext cx="676656" cy="384048"/>
           </a:xfrm>
           <a:prstGeom prst="rect">
             <a:avLst>
-              <a:gd name="adj" fmla="val 7692"/>
+              <a:gd name="adj" fmla="val 9524"/>
             </a:avLst>
           </a:prstGeom>
           <a:solidFill>
@@ -11162,14 +11123,14 @@
       </p:sp>
       <p:sp>
         <p:nvSpPr>
-          <p:cNvPr id="45" name="Text 43"/>
-          <p:cNvSpPr/>
-          <p:nvPr/>
-        </p:nvSpPr>
-        <p:spPr>
-          <a:xfrm>
-            <a:off x="2605209" y="4169664"/>
-            <a:ext cx="603504" cy="475488"/>
+          <p:cNvPr id="47" name="Text 45"/>
+          <p:cNvSpPr/>
+          <p:nvPr/>
+        </p:nvSpPr>
+        <p:spPr>
+          <a:xfrm>
+            <a:off x="4129430" y="4169664"/>
+            <a:ext cx="676656" cy="384048"/>
           </a:xfrm>
           <a:prstGeom prst="rect">
             <a:avLst/>
@@ -11193,7 +11154,7 @@
                 <a:ea typeface="Trebuchet MS" pitchFamily="34" charset="-122"/>
                 <a:cs typeface="Trebuchet MS" pitchFamily="34" charset="-120"/>
               </a:rPr>
-              <a:t>l</a:t>
+              <a:t>r</a:t>
             </a:r>
             <a:endParaRPr lang="en-US" sz="900" dirty="0"/>
           </a:p>
@@ -11201,18 +11162,18 @@
       </p:sp>
       <p:sp>
         <p:nvSpPr>
-          <p:cNvPr id="46" name="Shape 44"/>
-          <p:cNvSpPr/>
-          <p:nvPr/>
-        </p:nvSpPr>
-        <p:spPr>
-          <a:xfrm>
-            <a:off x="3258589" y="4169664"/>
-            <a:ext cx="603504" cy="475488"/>
+          <p:cNvPr id="48" name="Shape 46"/>
+          <p:cNvSpPr/>
+          <p:nvPr/>
+        </p:nvSpPr>
+        <p:spPr>
+          <a:xfrm>
+            <a:off x="4855464" y="4169664"/>
+            <a:ext cx="676656" cy="384048"/>
           </a:xfrm>
           <a:prstGeom prst="rect">
             <a:avLst>
-              <a:gd name="adj" fmla="val 7692"/>
+              <a:gd name="adj" fmla="val 9524"/>
             </a:avLst>
           </a:prstGeom>
           <a:solidFill>
@@ -11228,14 +11189,14 @@
       </p:sp>
       <p:sp>
         <p:nvSpPr>
-          <p:cNvPr id="47" name="Text 45"/>
-          <p:cNvSpPr/>
-          <p:nvPr/>
-        </p:nvSpPr>
-        <p:spPr>
-          <a:xfrm>
-            <a:off x="3258589" y="4169664"/>
-            <a:ext cx="603504" cy="475488"/>
+          <p:cNvPr id="49" name="Text 47"/>
+          <p:cNvSpPr/>
+          <p:nvPr/>
+        </p:nvSpPr>
+        <p:spPr>
+          <a:xfrm>
+            <a:off x="4855464" y="4169664"/>
+            <a:ext cx="676656" cy="384048"/>
           </a:xfrm>
           <a:prstGeom prst="rect">
             <a:avLst/>
@@ -11267,18 +11228,18 @@
       </p:sp>
       <p:sp>
         <p:nvSpPr>
-          <p:cNvPr id="48" name="Shape 46"/>
-          <p:cNvSpPr/>
-          <p:nvPr/>
-        </p:nvSpPr>
-        <p:spPr>
-          <a:xfrm>
-            <a:off x="3911969" y="4169664"/>
-            <a:ext cx="603504" cy="475488"/>
+          <p:cNvPr id="50" name="Shape 48"/>
+          <p:cNvSpPr/>
+          <p:nvPr/>
+        </p:nvSpPr>
+        <p:spPr>
+          <a:xfrm>
+            <a:off x="5581498" y="4169664"/>
+            <a:ext cx="676656" cy="384048"/>
           </a:xfrm>
           <a:prstGeom prst="rect">
             <a:avLst>
-              <a:gd name="adj" fmla="val 7692"/>
+              <a:gd name="adj" fmla="val 9524"/>
             </a:avLst>
           </a:prstGeom>
           <a:solidFill>
@@ -11294,14 +11255,14 @@
       </p:sp>
       <p:sp>
         <p:nvSpPr>
-          <p:cNvPr id="49" name="Text 47"/>
-          <p:cNvSpPr/>
-          <p:nvPr/>
-        </p:nvSpPr>
-        <p:spPr>
-          <a:xfrm>
-            <a:off x="3911969" y="4169664"/>
-            <a:ext cx="603504" cy="475488"/>
+          <p:cNvPr id="51" name="Text 49"/>
+          <p:cNvSpPr/>
+          <p:nvPr/>
+        </p:nvSpPr>
+        <p:spPr>
+          <a:xfrm>
+            <a:off x="5581498" y="4169664"/>
+            <a:ext cx="676656" cy="384048"/>
           </a:xfrm>
           <a:prstGeom prst="rect">
             <a:avLst/>
@@ -11325,7 +11286,7 @@
                 <a:ea typeface="Trebuchet MS" pitchFamily="34" charset="-122"/>
                 <a:cs typeface="Trebuchet MS" pitchFamily="34" charset="-120"/>
               </a:rPr>
-              <a:t>m</a:t>
+              <a:t>t</a:t>
             </a:r>
             <a:endParaRPr lang="en-US" sz="900" dirty="0"/>
           </a:p>
@@ -11333,18 +11294,18 @@
       </p:sp>
       <p:sp>
         <p:nvSpPr>
-          <p:cNvPr id="50" name="Shape 48"/>
-          <p:cNvSpPr/>
-          <p:nvPr/>
-        </p:nvSpPr>
-        <p:spPr>
-          <a:xfrm>
-            <a:off x="4565350" y="4169664"/>
-            <a:ext cx="603504" cy="475488"/>
+          <p:cNvPr id="52" name="Shape 50"/>
+          <p:cNvSpPr/>
+          <p:nvPr/>
+        </p:nvSpPr>
+        <p:spPr>
+          <a:xfrm>
+            <a:off x="6307531" y="4169664"/>
+            <a:ext cx="676656" cy="384048"/>
           </a:xfrm>
           <a:prstGeom prst="rect">
             <a:avLst>
-              <a:gd name="adj" fmla="val 7692"/>
+              <a:gd name="adj" fmla="val 9524"/>
             </a:avLst>
           </a:prstGeom>
           <a:solidFill>
@@ -11360,14 +11321,14 @@
       </p:sp>
       <p:sp>
         <p:nvSpPr>
-          <p:cNvPr id="51" name="Text 49"/>
-          <p:cNvSpPr/>
-          <p:nvPr/>
-        </p:nvSpPr>
-        <p:spPr>
-          <a:xfrm>
-            <a:off x="4565350" y="4169664"/>
-            <a:ext cx="603504" cy="475488"/>
+          <p:cNvPr id="53" name="Text 51"/>
+          <p:cNvSpPr/>
+          <p:nvPr/>
+        </p:nvSpPr>
+        <p:spPr>
+          <a:xfrm>
+            <a:off x="6307531" y="4169664"/>
+            <a:ext cx="676656" cy="384048"/>
           </a:xfrm>
           <a:prstGeom prst="rect">
             <a:avLst/>
@@ -11391,7 +11352,7 @@
                 <a:ea typeface="Trebuchet MS" pitchFamily="34" charset="-122"/>
                 <a:cs typeface="Trebuchet MS" pitchFamily="34" charset="-120"/>
               </a:rPr>
-              <a:t>e</a:t>
+              <a:t>a</a:t>
             </a:r>
             <a:endParaRPr lang="en-US" sz="900" dirty="0"/>
           </a:p>
@@ -11399,18 +11360,18 @@
       </p:sp>
       <p:sp>
         <p:nvSpPr>
-          <p:cNvPr id="52" name="Shape 50"/>
-          <p:cNvSpPr/>
-          <p:nvPr/>
-        </p:nvSpPr>
-        <p:spPr>
-          <a:xfrm>
-            <a:off x="5218730" y="4169664"/>
-            <a:ext cx="603504" cy="475488"/>
+          <p:cNvPr id="54" name="Shape 52"/>
+          <p:cNvSpPr/>
+          <p:nvPr/>
+        </p:nvSpPr>
+        <p:spPr>
+          <a:xfrm>
+            <a:off x="7033565" y="4169664"/>
+            <a:ext cx="676656" cy="384048"/>
           </a:xfrm>
           <a:prstGeom prst="rect">
             <a:avLst>
-              <a:gd name="adj" fmla="val 7692"/>
+              <a:gd name="adj" fmla="val 9524"/>
             </a:avLst>
           </a:prstGeom>
           <a:solidFill>
@@ -11426,14 +11387,14 @@
       </p:sp>
       <p:sp>
         <p:nvSpPr>
-          <p:cNvPr id="53" name="Text 51"/>
-          <p:cNvSpPr/>
-          <p:nvPr/>
-        </p:nvSpPr>
-        <p:spPr>
-          <a:xfrm>
-            <a:off x="5218730" y="4169664"/>
-            <a:ext cx="603504" cy="475488"/>
+          <p:cNvPr id="55" name="Text 53"/>
+          <p:cNvSpPr/>
+          <p:nvPr/>
+        </p:nvSpPr>
+        <p:spPr>
+          <a:xfrm>
+            <a:off x="7033565" y="4169664"/>
+            <a:ext cx="676656" cy="384048"/>
           </a:xfrm>
           <a:prstGeom prst="rect">
             <a:avLst/>
@@ -11457,7 +11418,7 @@
                 <a:ea typeface="Trebuchet MS" pitchFamily="34" charset="-122"/>
                 <a:cs typeface="Trebuchet MS" pitchFamily="34" charset="-120"/>
               </a:rPr>
-              <a:t>n</a:t>
+              <a:t>r</a:t>
             </a:r>
             <a:endParaRPr lang="en-US" sz="900" dirty="0"/>
           </a:p>
@@ -11465,18 +11426,18 @@
       </p:sp>
       <p:sp>
         <p:nvSpPr>
-          <p:cNvPr id="54" name="Shape 52"/>
-          <p:cNvSpPr/>
-          <p:nvPr/>
-        </p:nvSpPr>
-        <p:spPr>
-          <a:xfrm>
-            <a:off x="5872111" y="4169664"/>
-            <a:ext cx="603504" cy="475488"/>
+          <p:cNvPr id="56" name="Shape 54"/>
+          <p:cNvSpPr/>
+          <p:nvPr/>
+        </p:nvSpPr>
+        <p:spPr>
+          <a:xfrm>
+            <a:off x="7759598" y="4169664"/>
+            <a:ext cx="676656" cy="384048"/>
           </a:xfrm>
           <a:prstGeom prst="rect">
             <a:avLst>
-              <a:gd name="adj" fmla="val 7692"/>
+              <a:gd name="adj" fmla="val 9524"/>
             </a:avLst>
           </a:prstGeom>
           <a:solidFill>
@@ -11492,14 +11453,14 @@
       </p:sp>
       <p:sp>
         <p:nvSpPr>
-          <p:cNvPr id="55" name="Text 53"/>
-          <p:cNvSpPr/>
-          <p:nvPr/>
-        </p:nvSpPr>
-        <p:spPr>
-          <a:xfrm>
-            <a:off x="5872111" y="4169664"/>
-            <a:ext cx="603504" cy="475488"/>
+          <p:cNvPr id="57" name="Text 55"/>
+          <p:cNvSpPr/>
+          <p:nvPr/>
+        </p:nvSpPr>
+        <p:spPr>
+          <a:xfrm>
+            <a:off x="7759598" y="4169664"/>
+            <a:ext cx="676656" cy="384048"/>
           </a:xfrm>
           <a:prstGeom prst="rect">
             <a:avLst/>
@@ -11523,7 +11484,7 @@
                 <a:ea typeface="Trebuchet MS" pitchFamily="34" charset="-122"/>
                 <a:cs typeface="Trebuchet MS" pitchFamily="34" charset="-120"/>
               </a:rPr>
-              <a:t>t</a:t>
+              <a:t>y</a:t>
             </a:r>
             <a:endParaRPr lang="en-US" sz="900" dirty="0"/>
           </a:p>
@@ -11531,199 +11492,40 @@
       </p:sp>
       <p:sp>
         <p:nvSpPr>
-          <p:cNvPr id="56" name="Shape 54"/>
-          <p:cNvSpPr/>
-          <p:nvPr/>
-        </p:nvSpPr>
-        <p:spPr>
-          <a:xfrm>
-            <a:off x="6525491" y="4169664"/>
-            <a:ext cx="603504" cy="475488"/>
-          </a:xfrm>
-          <a:prstGeom prst="rect">
-            <a:avLst>
-              <a:gd name="adj" fmla="val 7692"/>
-            </a:avLst>
-          </a:prstGeom>
-          <a:solidFill>
-            <a:srgbClr val="FFFFFF"/>
-          </a:solidFill>
-          <a:ln w="12700">
-            <a:solidFill>
-              <a:srgbClr val="DB2777"/>
-            </a:solidFill>
-            <a:prstDash val="solid"/>
-          </a:ln>
-        </p:spPr>
-      </p:sp>
-      <p:sp>
-        <p:nvSpPr>
-          <p:cNvPr id="57" name="Text 55"/>
-          <p:cNvSpPr/>
-          <p:nvPr/>
-        </p:nvSpPr>
-        <p:spPr>
-          <a:xfrm>
-            <a:off x="6525491" y="4169664"/>
-            <a:ext cx="603504" cy="475488"/>
-          </a:xfrm>
-          <a:prstGeom prst="rect">
-            <a:avLst/>
-          </a:prstGeom>
-          <a:noFill/>
-          <a:ln/>
-        </p:spPr>
-        <p:txBody>
-          <a:bodyPr wrap="square" lIns="0" tIns="0" rIns="0" bIns="0" rtlCol="0" anchor="ctr"/>
-          <a:lstStyle/>
-          <a:p>
-            <a:pPr algn="ctr" indent="0" marL="0">
-              <a:buNone/>
-            </a:pPr>
-            <a:r>
-              <a:rPr lang="en-US" sz="900" b="1" dirty="0">
-                <a:solidFill>
-                  <a:srgbClr val="9D174D"/>
-                </a:solidFill>
-                <a:latin typeface="Trebuchet MS" pitchFamily="34" charset="0"/>
-                <a:ea typeface="Trebuchet MS" pitchFamily="34" charset="-122"/>
-                <a:cs typeface="Trebuchet MS" pitchFamily="34" charset="-120"/>
-              </a:rPr>
-              <a:t>a</a:t>
-            </a:r>
-            <a:endParaRPr lang="en-US" sz="900" dirty="0"/>
-          </a:p>
-        </p:txBody>
-      </p:sp>
-      <p:sp>
-        <p:nvSpPr>
-          <p:cNvPr id="58" name="Shape 56"/>
-          <p:cNvSpPr/>
-          <p:nvPr/>
-        </p:nvSpPr>
-        <p:spPr>
-          <a:xfrm>
-            <a:off x="7178871" y="4169664"/>
-            <a:ext cx="603504" cy="475488"/>
-          </a:xfrm>
-          <a:prstGeom prst="rect">
-            <a:avLst>
-              <a:gd name="adj" fmla="val 7692"/>
-            </a:avLst>
-          </a:prstGeom>
-          <a:solidFill>
-            <a:srgbClr val="FFFFFF"/>
-          </a:solidFill>
-          <a:ln w="12700">
-            <a:solidFill>
-              <a:srgbClr val="DB2777"/>
-            </a:solidFill>
-            <a:prstDash val="solid"/>
-          </a:ln>
-        </p:spPr>
-      </p:sp>
-      <p:sp>
-        <p:nvSpPr>
-          <p:cNvPr id="59" name="Text 57"/>
-          <p:cNvSpPr/>
-          <p:nvPr/>
-        </p:nvSpPr>
-        <p:spPr>
-          <a:xfrm>
-            <a:off x="7178871" y="4169664"/>
-            <a:ext cx="603504" cy="475488"/>
-          </a:xfrm>
-          <a:prstGeom prst="rect">
-            <a:avLst/>
-          </a:prstGeom>
-          <a:noFill/>
-          <a:ln/>
-        </p:spPr>
-        <p:txBody>
-          <a:bodyPr wrap="square" lIns="0" tIns="0" rIns="0" bIns="0" rtlCol="0" anchor="ctr"/>
-          <a:lstStyle/>
-          <a:p>
-            <a:pPr algn="ctr" indent="0" marL="0">
-              <a:buNone/>
-            </a:pPr>
-            <a:r>
-              <a:rPr lang="en-US" sz="900" b="1" dirty="0">
-                <a:solidFill>
-                  <a:srgbClr val="9D174D"/>
-                </a:solidFill>
-                <a:latin typeface="Trebuchet MS" pitchFamily="34" charset="0"/>
-                <a:ea typeface="Trebuchet MS" pitchFamily="34" charset="-122"/>
-                <a:cs typeface="Trebuchet MS" pitchFamily="34" charset="-120"/>
-              </a:rPr>
-              <a:t>r</a:t>
-            </a:r>
-            <a:endParaRPr lang="en-US" sz="900" dirty="0"/>
-          </a:p>
-        </p:txBody>
-      </p:sp>
-      <p:sp>
-        <p:nvSpPr>
-          <p:cNvPr id="60" name="Shape 58"/>
-          <p:cNvSpPr/>
-          <p:nvPr/>
-        </p:nvSpPr>
-        <p:spPr>
-          <a:xfrm>
-            <a:off x="7832252" y="4169664"/>
-            <a:ext cx="603504" cy="475488"/>
-          </a:xfrm>
-          <a:prstGeom prst="rect">
-            <a:avLst>
-              <a:gd name="adj" fmla="val 7692"/>
-            </a:avLst>
-          </a:prstGeom>
-          <a:solidFill>
-            <a:srgbClr val="FFFFFF"/>
-          </a:solidFill>
-          <a:ln w="12700">
-            <a:solidFill>
-              <a:srgbClr val="DB2777"/>
-            </a:solidFill>
-            <a:prstDash val="solid"/>
-          </a:ln>
-        </p:spPr>
-      </p:sp>
-      <p:sp>
-        <p:nvSpPr>
-          <p:cNvPr id="61" name="Text 59"/>
-          <p:cNvSpPr/>
-          <p:nvPr/>
-        </p:nvSpPr>
-        <p:spPr>
-          <a:xfrm>
-            <a:off x="7832252" y="4169664"/>
-            <a:ext cx="603504" cy="475488"/>
-          </a:xfrm>
-          <a:prstGeom prst="rect">
-            <a:avLst/>
-          </a:prstGeom>
-          <a:noFill/>
-          <a:ln/>
-        </p:spPr>
-        <p:txBody>
-          <a:bodyPr wrap="square" lIns="0" tIns="0" rIns="0" bIns="0" rtlCol="0" anchor="ctr"/>
-          <a:lstStyle/>
-          <a:p>
-            <a:pPr algn="ctr" indent="0" marL="0">
-              <a:buNone/>
-            </a:pPr>
-            <a:r>
-              <a:rPr lang="en-US" sz="900" b="1" dirty="0">
-                <a:solidFill>
-                  <a:srgbClr val="9D174D"/>
-                </a:solidFill>
-                <a:latin typeface="Trebuchet MS" pitchFamily="34" charset="0"/>
-                <a:ea typeface="Trebuchet MS" pitchFamily="34" charset="-122"/>
-                <a:cs typeface="Trebuchet MS" pitchFamily="34" charset="-120"/>
-              </a:rPr>
-              <a:t>y</a:t>
-            </a:r>
-            <a:endParaRPr lang="en-US" sz="900" dirty="0"/>
+          <p:cNvPr id="58" name="Text 56"/>
+          <p:cNvSpPr/>
+          <p:nvPr/>
+        </p:nvSpPr>
+        <p:spPr>
+          <a:xfrm>
+            <a:off x="7759598" y="4572000"/>
+            <a:ext cx="676656" cy="219456"/>
+          </a:xfrm>
+          <a:prstGeom prst="rect">
+            <a:avLst/>
+          </a:prstGeom>
+          <a:noFill/>
+          <a:ln/>
+        </p:spPr>
+        <p:txBody>
+          <a:bodyPr wrap="square" lIns="0" tIns="0" rIns="0" bIns="0" rtlCol="0" anchor="t"/>
+          <a:lstStyle/>
+          <a:p>
+            <a:pPr algn="ctr" indent="0" marL="0">
+              <a:buNone/>
+            </a:pPr>
+            <a:r>
+              <a:rPr lang="en-US" sz="750" i="1" dirty="0">
+                <a:solidFill>
+                  <a:srgbClr val="94A3B8"/>
+                </a:solidFill>
+                <a:latin typeface="Calibri" pitchFamily="34" charset="0"/>
+                <a:ea typeface="Calibri" pitchFamily="34" charset="-122"/>
+                <a:cs typeface="Calibri" pitchFamily="34" charset="-120"/>
+              </a:rPr>
+              <a:t>/ee/</a:t>
+            </a:r>
+            <a:endParaRPr lang="en-US" sz="750" dirty="0"/>
           </a:p>
         </p:txBody>
       </p:sp>
@@ -12152,7 +11954,7 @@
                 <a:ea typeface="Trebuchet MS" pitchFamily="34" charset="-122"/>
                 <a:cs typeface="Trebuchet MS" pitchFamily="34" charset="-120"/>
               </a:rPr>
-              <a:t>library</a:t>
+              <a:t>elementary</a:t>
             </a:r>
             <a:endParaRPr lang="en-US" sz="2800" dirty="0"/>
           </a:p>
@@ -12979,7 +12781,7 @@
                 <a:ea typeface="Trebuchet MS" pitchFamily="34" charset="-122"/>
                 <a:cs typeface="Trebuchet MS" pitchFamily="34" charset="-120"/>
               </a:rPr>
-              <a:t>library</a:t>
+              <a:t>elementary</a:t>
             </a:r>
             <a:endParaRPr lang="en-US" sz="2800" dirty="0"/>
           </a:p>
@@ -13118,7 +12920,7 @@
                 <a:ea typeface="Trebuchet MS" pitchFamily="34" charset="-122"/>
                 <a:cs typeface="Trebuchet MS" pitchFamily="34" charset="-120"/>
               </a:rPr>
-              <a:t>libr</a:t>
+              <a:t>element</a:t>
             </a:r>
             <a:endParaRPr lang="en-US" sz="1300" dirty="0"/>
           </a:p>
@@ -13157,7 +12959,7 @@
                 <a:ea typeface="Calibri" pitchFamily="34" charset="-122"/>
                 <a:cs typeface="Calibri" pitchFamily="34" charset="-120"/>
               </a:rPr>
-              <a:t>book</a:t>
+              <a:t>basic part</a:t>
             </a:r>
             <a:endParaRPr lang="en-US" sz="850" dirty="0"/>
           </a:p>
@@ -13964,7 +13766,7 @@
                 <a:ea typeface="Trebuchet MS" pitchFamily="34" charset="-122"/>
                 <a:cs typeface="Trebuchet MS" pitchFamily="34" charset="-120"/>
               </a:rPr>
-              <a:t>library</a:t>
+              <a:t>elementary</a:t>
             </a:r>
             <a:endParaRPr lang="en-US" sz="2800" dirty="0"/>
           </a:p>
@@ -14103,7 +13905,7 @@
                 <a:ea typeface="Trebuchet MS" pitchFamily="34" charset="-122"/>
                 <a:cs typeface="Trebuchet MS" pitchFamily="34" charset="-120"/>
               </a:rPr>
-              <a:t>libr</a:t>
+              <a:t>element</a:t>
             </a:r>
             <a:endParaRPr lang="en-US" sz="1300" dirty="0"/>
           </a:p>
@@ -14142,7 +13944,7 @@
                 <a:ea typeface="Calibri" pitchFamily="34" charset="-122"/>
                 <a:cs typeface="Calibri" pitchFamily="34" charset="-120"/>
               </a:rPr>
-              <a:t>book</a:t>
+              <a:t>basic part</a:t>
             </a:r>
             <a:endParaRPr lang="en-US" sz="850" dirty="0"/>
           </a:p>
@@ -14361,8 +14163,8 @@
         </p:nvSpPr>
         <p:spPr>
           <a:xfrm>
-            <a:off x="2313432" y="3364992"/>
-            <a:ext cx="1645920" cy="475488"/>
+            <a:off x="1978152" y="3364992"/>
+            <a:ext cx="1225296" cy="475488"/>
           </a:xfrm>
           <a:prstGeom prst="rect">
             <a:avLst>
@@ -14388,8 +14190,8 @@
         </p:nvSpPr>
         <p:spPr>
           <a:xfrm>
-            <a:off x="2313432" y="3364992"/>
-            <a:ext cx="1645920" cy="475488"/>
+            <a:off x="1978152" y="3364992"/>
+            <a:ext cx="1225296" cy="475488"/>
           </a:xfrm>
           <a:prstGeom prst="rect">
             <a:avLst/>
@@ -14413,7 +14215,7 @@
                 <a:ea typeface="Trebuchet MS" pitchFamily="34" charset="-122"/>
                 <a:cs typeface="Trebuchet MS" pitchFamily="34" charset="-120"/>
               </a:rPr>
-              <a:t>li</a:t>
+              <a:t>el</a:t>
             </a:r>
             <a:endParaRPr lang="en-US" sz="1400" dirty="0"/>
           </a:p>
@@ -14427,8 +14229,8 @@
         </p:nvSpPr>
         <p:spPr>
           <a:xfrm>
-            <a:off x="3959352" y="3364992"/>
-            <a:ext cx="411480" cy="475488"/>
+            <a:off x="3203448" y="3364992"/>
+            <a:ext cx="76200" cy="475488"/>
           </a:xfrm>
           <a:prstGeom prst="rect">
             <a:avLst/>
@@ -14466,8 +14268,8 @@
         </p:nvSpPr>
         <p:spPr>
           <a:xfrm>
-            <a:off x="4370832" y="3364992"/>
-            <a:ext cx="1645920" cy="475488"/>
+            <a:off x="3279648" y="3364992"/>
+            <a:ext cx="1225296" cy="475488"/>
           </a:xfrm>
           <a:prstGeom prst="rect">
             <a:avLst>
@@ -14493,8 +14295,8 @@
         </p:nvSpPr>
         <p:spPr>
           <a:xfrm>
-            <a:off x="4370832" y="3364992"/>
-            <a:ext cx="1645920" cy="475488"/>
+            <a:off x="3279648" y="3364992"/>
+            <a:ext cx="1225296" cy="475488"/>
           </a:xfrm>
           <a:prstGeom prst="rect">
             <a:avLst/>
@@ -14518,7 +14320,7 @@
                 <a:ea typeface="Trebuchet MS" pitchFamily="34" charset="-122"/>
                 <a:cs typeface="Trebuchet MS" pitchFamily="34" charset="-120"/>
               </a:rPr>
-              <a:t>bra</a:t>
+              <a:t>e</a:t>
             </a:r>
             <a:endParaRPr lang="en-US" sz="1400" dirty="0"/>
           </a:p>
@@ -14532,8 +14334,8 @@
         </p:nvSpPr>
         <p:spPr>
           <a:xfrm>
-            <a:off x="6016752" y="3364992"/>
-            <a:ext cx="411480" cy="475488"/>
+            <a:off x="4504944" y="3364992"/>
+            <a:ext cx="76200" cy="475488"/>
           </a:xfrm>
           <a:prstGeom prst="rect">
             <a:avLst/>
@@ -14571,8 +14373,8 @@
         </p:nvSpPr>
         <p:spPr>
           <a:xfrm>
-            <a:off x="6428232" y="3364992"/>
-            <a:ext cx="1645920" cy="475488"/>
+            <a:off x="4581144" y="3364992"/>
+            <a:ext cx="1225296" cy="475488"/>
           </a:xfrm>
           <a:prstGeom prst="rect">
             <a:avLst>
@@ -14598,8 +14400,8 @@
         </p:nvSpPr>
         <p:spPr>
           <a:xfrm>
-            <a:off x="6428232" y="3364992"/>
-            <a:ext cx="1645920" cy="475488"/>
+            <a:off x="4581144" y="3364992"/>
+            <a:ext cx="1225296" cy="475488"/>
           </a:xfrm>
           <a:prstGeom prst="rect">
             <a:avLst/>
@@ -14623,6 +14425,216 @@
                 <a:ea typeface="Trebuchet MS" pitchFamily="34" charset="-122"/>
                 <a:cs typeface="Trebuchet MS" pitchFamily="34" charset="-120"/>
               </a:rPr>
+              <a:t>men</a:t>
+            </a:r>
+            <a:endParaRPr lang="en-US" sz="1400" dirty="0"/>
+          </a:p>
+        </p:txBody>
+      </p:sp>
+      <p:sp>
+        <p:nvSpPr>
+          <p:cNvPr id="33" name="Text 31"/>
+          <p:cNvSpPr/>
+          <p:nvPr/>
+        </p:nvSpPr>
+        <p:spPr>
+          <a:xfrm>
+            <a:off x="5806440" y="3364992"/>
+            <a:ext cx="76200" cy="475488"/>
+          </a:xfrm>
+          <a:prstGeom prst="rect">
+            <a:avLst/>
+          </a:prstGeom>
+          <a:noFill/>
+          <a:ln/>
+        </p:spPr>
+        <p:txBody>
+          <a:bodyPr wrap="square" lIns="0" tIns="0" rIns="0" bIns="0" rtlCol="0" anchor="ctr"/>
+          <a:lstStyle/>
+          <a:p>
+            <a:pPr algn="ctr" indent="0" marL="0">
+              <a:buNone/>
+            </a:pPr>
+            <a:r>
+              <a:rPr lang="en-US" sz="1600" b="1" dirty="0">
+                <a:solidFill>
+                  <a:srgbClr val="0D9488"/>
+                </a:solidFill>
+                <a:latin typeface="Trebuchet MS" pitchFamily="34" charset="0"/>
+                <a:ea typeface="Trebuchet MS" pitchFamily="34" charset="-122"/>
+                <a:cs typeface="Trebuchet MS" pitchFamily="34" charset="-120"/>
+              </a:rPr>
+              <a:t>·</a:t>
+            </a:r>
+            <a:endParaRPr lang="en-US" sz="1600" dirty="0"/>
+          </a:p>
+        </p:txBody>
+      </p:sp>
+      <p:sp>
+        <p:nvSpPr>
+          <p:cNvPr id="34" name="Shape 32"/>
+          <p:cNvSpPr/>
+          <p:nvPr/>
+        </p:nvSpPr>
+        <p:spPr>
+          <a:xfrm>
+            <a:off x="5882640" y="3364992"/>
+            <a:ext cx="1225296" cy="475488"/>
+          </a:xfrm>
+          <a:prstGeom prst="rect">
+            <a:avLst>
+              <a:gd name="adj" fmla="val 9615"/>
+            </a:avLst>
+          </a:prstGeom>
+          <a:solidFill>
+            <a:srgbClr val="FFFFFF"/>
+          </a:solidFill>
+          <a:ln w="12700">
+            <a:solidFill>
+              <a:srgbClr val="0D9488"/>
+            </a:solidFill>
+            <a:prstDash val="solid"/>
+          </a:ln>
+        </p:spPr>
+      </p:sp>
+      <p:sp>
+        <p:nvSpPr>
+          <p:cNvPr id="35" name="Text 33"/>
+          <p:cNvSpPr/>
+          <p:nvPr/>
+        </p:nvSpPr>
+        <p:spPr>
+          <a:xfrm>
+            <a:off x="5882640" y="3364992"/>
+            <a:ext cx="1225296" cy="475488"/>
+          </a:xfrm>
+          <a:prstGeom prst="rect">
+            <a:avLst/>
+          </a:prstGeom>
+          <a:noFill/>
+          <a:ln/>
+        </p:spPr>
+        <p:txBody>
+          <a:bodyPr wrap="square" lIns="0" tIns="0" rIns="0" bIns="0" rtlCol="0" anchor="ctr"/>
+          <a:lstStyle/>
+          <a:p>
+            <a:pPr algn="ctr" indent="0" marL="0">
+              <a:buNone/>
+            </a:pPr>
+            <a:r>
+              <a:rPr lang="en-US" sz="1400" b="1" dirty="0">
+                <a:solidFill>
+                  <a:srgbClr val="0D9488"/>
+                </a:solidFill>
+                <a:latin typeface="Trebuchet MS" pitchFamily="34" charset="0"/>
+                <a:ea typeface="Trebuchet MS" pitchFamily="34" charset="-122"/>
+                <a:cs typeface="Trebuchet MS" pitchFamily="34" charset="-120"/>
+              </a:rPr>
+              <a:t>ta</a:t>
+            </a:r>
+            <a:endParaRPr lang="en-US" sz="1400" dirty="0"/>
+          </a:p>
+        </p:txBody>
+      </p:sp>
+      <p:sp>
+        <p:nvSpPr>
+          <p:cNvPr id="36" name="Text 34"/>
+          <p:cNvSpPr/>
+          <p:nvPr/>
+        </p:nvSpPr>
+        <p:spPr>
+          <a:xfrm>
+            <a:off x="7107936" y="3364992"/>
+            <a:ext cx="76200" cy="475488"/>
+          </a:xfrm>
+          <a:prstGeom prst="rect">
+            <a:avLst/>
+          </a:prstGeom>
+          <a:noFill/>
+          <a:ln/>
+        </p:spPr>
+        <p:txBody>
+          <a:bodyPr wrap="square" lIns="0" tIns="0" rIns="0" bIns="0" rtlCol="0" anchor="ctr"/>
+          <a:lstStyle/>
+          <a:p>
+            <a:pPr algn="ctr" indent="0" marL="0">
+              <a:buNone/>
+            </a:pPr>
+            <a:r>
+              <a:rPr lang="en-US" sz="1600" b="1" dirty="0">
+                <a:solidFill>
+                  <a:srgbClr val="0D9488"/>
+                </a:solidFill>
+                <a:latin typeface="Trebuchet MS" pitchFamily="34" charset="0"/>
+                <a:ea typeface="Trebuchet MS" pitchFamily="34" charset="-122"/>
+                <a:cs typeface="Trebuchet MS" pitchFamily="34" charset="-120"/>
+              </a:rPr>
+              <a:t>·</a:t>
+            </a:r>
+            <a:endParaRPr lang="en-US" sz="1600" dirty="0"/>
+          </a:p>
+        </p:txBody>
+      </p:sp>
+      <p:sp>
+        <p:nvSpPr>
+          <p:cNvPr id="37" name="Shape 35"/>
+          <p:cNvSpPr/>
+          <p:nvPr/>
+        </p:nvSpPr>
+        <p:spPr>
+          <a:xfrm>
+            <a:off x="7184136" y="3364992"/>
+            <a:ext cx="1225296" cy="475488"/>
+          </a:xfrm>
+          <a:prstGeom prst="rect">
+            <a:avLst>
+              <a:gd name="adj" fmla="val 9615"/>
+            </a:avLst>
+          </a:prstGeom>
+          <a:solidFill>
+            <a:srgbClr val="FFFFFF"/>
+          </a:solidFill>
+          <a:ln w="12700">
+            <a:solidFill>
+              <a:srgbClr val="0D9488"/>
+            </a:solidFill>
+            <a:prstDash val="solid"/>
+          </a:ln>
+        </p:spPr>
+      </p:sp>
+      <p:sp>
+        <p:nvSpPr>
+          <p:cNvPr id="38" name="Text 36"/>
+          <p:cNvSpPr/>
+          <p:nvPr/>
+        </p:nvSpPr>
+        <p:spPr>
+          <a:xfrm>
+            <a:off x="7184136" y="3364992"/>
+            <a:ext cx="1225296" cy="475488"/>
+          </a:xfrm>
+          <a:prstGeom prst="rect">
+            <a:avLst/>
+          </a:prstGeom>
+          <a:noFill/>
+          <a:ln/>
+        </p:spPr>
+        <p:txBody>
+          <a:bodyPr wrap="square" lIns="0" tIns="0" rIns="0" bIns="0" rtlCol="0" anchor="ctr"/>
+          <a:lstStyle/>
+          <a:p>
+            <a:pPr algn="ctr" indent="0" marL="0">
+              <a:buNone/>
+            </a:pPr>
+            <a:r>
+              <a:rPr lang="en-US" sz="1400" b="1" dirty="0">
+                <a:solidFill>
+                  <a:srgbClr val="0D9488"/>
+                </a:solidFill>
+                <a:latin typeface="Trebuchet MS" pitchFamily="34" charset="0"/>
+                <a:ea typeface="Trebuchet MS" pitchFamily="34" charset="-122"/>
+                <a:cs typeface="Trebuchet MS" pitchFamily="34" charset="-120"/>
+              </a:rPr>
               <a:t>ry</a:t>
             </a:r>
             <a:endParaRPr lang="en-US" sz="1400" dirty="0"/>
@@ -14631,7 +14643,7 @@
       </p:sp>
       <p:sp>
         <p:nvSpPr>
-          <p:cNvPr id="33" name="Shape 31"/>
+          <p:cNvPr id="39" name="Shape 37"/>
           <p:cNvSpPr/>
           <p:nvPr/>
         </p:nvSpPr>
@@ -14658,7 +14670,7 @@
       </p:sp>
       <p:sp>
         <p:nvSpPr>
-          <p:cNvPr id="34" name="Text 32"/>
+          <p:cNvPr id="40" name="Text 38"/>
           <p:cNvSpPr/>
           <p:nvPr/>
         </p:nvSpPr>
@@ -14697,7 +14709,7 @@
       </p:sp>
       <p:sp>
         <p:nvSpPr>
-          <p:cNvPr id="35" name="Shape 33"/>
+          <p:cNvPr id="41" name="Shape 39"/>
           <p:cNvSpPr/>
           <p:nvPr/>
         </p:nvSpPr>
@@ -14724,7 +14736,7 @@
       </p:sp>
       <p:sp>
         <p:nvSpPr>
-          <p:cNvPr id="36" name="Text 34"/>
+          <p:cNvPr id="42" name="Text 40"/>
           <p:cNvSpPr/>
           <p:nvPr/>
         </p:nvSpPr>
@@ -15451,7 +15463,7 @@
                 <a:ea typeface="Trebuchet MS" pitchFamily="34" charset="-122"/>
                 <a:cs typeface="Trebuchet MS" pitchFamily="34" charset="-120"/>
               </a:rPr>
-              <a:t>library</a:t>
+              <a:t>elementary</a:t>
             </a:r>
             <a:endParaRPr lang="en-US" sz="2800" dirty="0"/>
           </a:p>
@@ -15590,7 +15602,7 @@
                 <a:ea typeface="Trebuchet MS" pitchFamily="34" charset="-122"/>
                 <a:cs typeface="Trebuchet MS" pitchFamily="34" charset="-120"/>
               </a:rPr>
-              <a:t>libr</a:t>
+              <a:t>element</a:t>
             </a:r>
             <a:endParaRPr lang="en-US" sz="1300" dirty="0"/>
           </a:p>
@@ -15629,7 +15641,7 @@
                 <a:ea typeface="Calibri" pitchFamily="34" charset="-122"/>
                 <a:cs typeface="Calibri" pitchFamily="34" charset="-120"/>
               </a:rPr>
-              <a:t>book</a:t>
+              <a:t>basic part</a:t>
             </a:r>
             <a:endParaRPr lang="en-US" sz="850" dirty="0"/>
           </a:p>
@@ -15848,8 +15860,8 @@
         </p:nvSpPr>
         <p:spPr>
           <a:xfrm>
-            <a:off x="2313432" y="3364992"/>
-            <a:ext cx="1645920" cy="475488"/>
+            <a:off x="1978152" y="3364992"/>
+            <a:ext cx="1225296" cy="475488"/>
           </a:xfrm>
           <a:prstGeom prst="rect">
             <a:avLst>
@@ -15875,8 +15887,8 @@
         </p:nvSpPr>
         <p:spPr>
           <a:xfrm>
-            <a:off x="2313432" y="3364992"/>
-            <a:ext cx="1645920" cy="475488"/>
+            <a:off x="1978152" y="3364992"/>
+            <a:ext cx="1225296" cy="475488"/>
           </a:xfrm>
           <a:prstGeom prst="rect">
             <a:avLst/>
@@ -15900,7 +15912,7 @@
                 <a:ea typeface="Trebuchet MS" pitchFamily="34" charset="-122"/>
                 <a:cs typeface="Trebuchet MS" pitchFamily="34" charset="-120"/>
               </a:rPr>
-              <a:t>li</a:t>
+              <a:t>el</a:t>
             </a:r>
             <a:endParaRPr lang="en-US" sz="1400" dirty="0"/>
           </a:p>
@@ -15914,8 +15926,8 @@
         </p:nvSpPr>
         <p:spPr>
           <a:xfrm>
-            <a:off x="3959352" y="3364992"/>
-            <a:ext cx="411480" cy="475488"/>
+            <a:off x="3203448" y="3364992"/>
+            <a:ext cx="76200" cy="475488"/>
           </a:xfrm>
           <a:prstGeom prst="rect">
             <a:avLst/>
@@ -15953,8 +15965,8 @@
         </p:nvSpPr>
         <p:spPr>
           <a:xfrm>
-            <a:off x="4370832" y="3364992"/>
-            <a:ext cx="1645920" cy="475488"/>
+            <a:off x="3279648" y="3364992"/>
+            <a:ext cx="1225296" cy="475488"/>
           </a:xfrm>
           <a:prstGeom prst="rect">
             <a:avLst>
@@ -15980,8 +15992,8 @@
         </p:nvSpPr>
         <p:spPr>
           <a:xfrm>
-            <a:off x="4370832" y="3364992"/>
-            <a:ext cx="1645920" cy="475488"/>
+            <a:off x="3279648" y="3364992"/>
+            <a:ext cx="1225296" cy="475488"/>
           </a:xfrm>
           <a:prstGeom prst="rect">
             <a:avLst/>
@@ -16005,7 +16017,7 @@
                 <a:ea typeface="Trebuchet MS" pitchFamily="34" charset="-122"/>
                 <a:cs typeface="Trebuchet MS" pitchFamily="34" charset="-120"/>
               </a:rPr>
-              <a:t>bra</a:t>
+              <a:t>e</a:t>
             </a:r>
             <a:endParaRPr lang="en-US" sz="1400" dirty="0"/>
           </a:p>
@@ -16019,8 +16031,8 @@
         </p:nvSpPr>
         <p:spPr>
           <a:xfrm>
-            <a:off x="6016752" y="3364992"/>
-            <a:ext cx="411480" cy="475488"/>
+            <a:off x="4504944" y="3364992"/>
+            <a:ext cx="76200" cy="475488"/>
           </a:xfrm>
           <a:prstGeom prst="rect">
             <a:avLst/>
@@ -16058,8 +16070,8 @@
         </p:nvSpPr>
         <p:spPr>
           <a:xfrm>
-            <a:off x="6428232" y="3364992"/>
-            <a:ext cx="1645920" cy="475488"/>
+            <a:off x="4581144" y="3364992"/>
+            <a:ext cx="1225296" cy="475488"/>
           </a:xfrm>
           <a:prstGeom prst="rect">
             <a:avLst>
@@ -16085,8 +16097,8 @@
         </p:nvSpPr>
         <p:spPr>
           <a:xfrm>
-            <a:off x="6428232" y="3364992"/>
-            <a:ext cx="1645920" cy="475488"/>
+            <a:off x="4581144" y="3364992"/>
+            <a:ext cx="1225296" cy="475488"/>
           </a:xfrm>
           <a:prstGeom prst="rect">
             <a:avLst/>
@@ -16110,6 +16122,216 @@
                 <a:ea typeface="Trebuchet MS" pitchFamily="34" charset="-122"/>
                 <a:cs typeface="Trebuchet MS" pitchFamily="34" charset="-120"/>
               </a:rPr>
+              <a:t>men</a:t>
+            </a:r>
+            <a:endParaRPr lang="en-US" sz="1400" dirty="0"/>
+          </a:p>
+        </p:txBody>
+      </p:sp>
+      <p:sp>
+        <p:nvSpPr>
+          <p:cNvPr id="33" name="Text 31"/>
+          <p:cNvSpPr/>
+          <p:nvPr/>
+        </p:nvSpPr>
+        <p:spPr>
+          <a:xfrm>
+            <a:off x="5806440" y="3364992"/>
+            <a:ext cx="76200" cy="475488"/>
+          </a:xfrm>
+          <a:prstGeom prst="rect">
+            <a:avLst/>
+          </a:prstGeom>
+          <a:noFill/>
+          <a:ln/>
+        </p:spPr>
+        <p:txBody>
+          <a:bodyPr wrap="square" lIns="0" tIns="0" rIns="0" bIns="0" rtlCol="0" anchor="ctr"/>
+          <a:lstStyle/>
+          <a:p>
+            <a:pPr algn="ctr" indent="0" marL="0">
+              <a:buNone/>
+            </a:pPr>
+            <a:r>
+              <a:rPr lang="en-US" sz="1600" b="1" dirty="0">
+                <a:solidFill>
+                  <a:srgbClr val="0D9488"/>
+                </a:solidFill>
+                <a:latin typeface="Trebuchet MS" pitchFamily="34" charset="0"/>
+                <a:ea typeface="Trebuchet MS" pitchFamily="34" charset="-122"/>
+                <a:cs typeface="Trebuchet MS" pitchFamily="34" charset="-120"/>
+              </a:rPr>
+              <a:t>·</a:t>
+            </a:r>
+            <a:endParaRPr lang="en-US" sz="1600" dirty="0"/>
+          </a:p>
+        </p:txBody>
+      </p:sp>
+      <p:sp>
+        <p:nvSpPr>
+          <p:cNvPr id="34" name="Shape 32"/>
+          <p:cNvSpPr/>
+          <p:nvPr/>
+        </p:nvSpPr>
+        <p:spPr>
+          <a:xfrm>
+            <a:off x="5882640" y="3364992"/>
+            <a:ext cx="1225296" cy="475488"/>
+          </a:xfrm>
+          <a:prstGeom prst="rect">
+            <a:avLst>
+              <a:gd name="adj" fmla="val 9615"/>
+            </a:avLst>
+          </a:prstGeom>
+          <a:solidFill>
+            <a:srgbClr val="FFFFFF"/>
+          </a:solidFill>
+          <a:ln w="12700">
+            <a:solidFill>
+              <a:srgbClr val="0D9488"/>
+            </a:solidFill>
+            <a:prstDash val="solid"/>
+          </a:ln>
+        </p:spPr>
+      </p:sp>
+      <p:sp>
+        <p:nvSpPr>
+          <p:cNvPr id="35" name="Text 33"/>
+          <p:cNvSpPr/>
+          <p:nvPr/>
+        </p:nvSpPr>
+        <p:spPr>
+          <a:xfrm>
+            <a:off x="5882640" y="3364992"/>
+            <a:ext cx="1225296" cy="475488"/>
+          </a:xfrm>
+          <a:prstGeom prst="rect">
+            <a:avLst/>
+          </a:prstGeom>
+          <a:noFill/>
+          <a:ln/>
+        </p:spPr>
+        <p:txBody>
+          <a:bodyPr wrap="square" lIns="0" tIns="0" rIns="0" bIns="0" rtlCol="0" anchor="ctr"/>
+          <a:lstStyle/>
+          <a:p>
+            <a:pPr algn="ctr" indent="0" marL="0">
+              <a:buNone/>
+            </a:pPr>
+            <a:r>
+              <a:rPr lang="en-US" sz="1400" b="1" dirty="0">
+                <a:solidFill>
+                  <a:srgbClr val="0D9488"/>
+                </a:solidFill>
+                <a:latin typeface="Trebuchet MS" pitchFamily="34" charset="0"/>
+                <a:ea typeface="Trebuchet MS" pitchFamily="34" charset="-122"/>
+                <a:cs typeface="Trebuchet MS" pitchFamily="34" charset="-120"/>
+              </a:rPr>
+              <a:t>ta</a:t>
+            </a:r>
+            <a:endParaRPr lang="en-US" sz="1400" dirty="0"/>
+          </a:p>
+        </p:txBody>
+      </p:sp>
+      <p:sp>
+        <p:nvSpPr>
+          <p:cNvPr id="36" name="Text 34"/>
+          <p:cNvSpPr/>
+          <p:nvPr/>
+        </p:nvSpPr>
+        <p:spPr>
+          <a:xfrm>
+            <a:off x="7107936" y="3364992"/>
+            <a:ext cx="76200" cy="475488"/>
+          </a:xfrm>
+          <a:prstGeom prst="rect">
+            <a:avLst/>
+          </a:prstGeom>
+          <a:noFill/>
+          <a:ln/>
+        </p:spPr>
+        <p:txBody>
+          <a:bodyPr wrap="square" lIns="0" tIns="0" rIns="0" bIns="0" rtlCol="0" anchor="ctr"/>
+          <a:lstStyle/>
+          <a:p>
+            <a:pPr algn="ctr" indent="0" marL="0">
+              <a:buNone/>
+            </a:pPr>
+            <a:r>
+              <a:rPr lang="en-US" sz="1600" b="1" dirty="0">
+                <a:solidFill>
+                  <a:srgbClr val="0D9488"/>
+                </a:solidFill>
+                <a:latin typeface="Trebuchet MS" pitchFamily="34" charset="0"/>
+                <a:ea typeface="Trebuchet MS" pitchFamily="34" charset="-122"/>
+                <a:cs typeface="Trebuchet MS" pitchFamily="34" charset="-120"/>
+              </a:rPr>
+              <a:t>·</a:t>
+            </a:r>
+            <a:endParaRPr lang="en-US" sz="1600" dirty="0"/>
+          </a:p>
+        </p:txBody>
+      </p:sp>
+      <p:sp>
+        <p:nvSpPr>
+          <p:cNvPr id="37" name="Shape 35"/>
+          <p:cNvSpPr/>
+          <p:nvPr/>
+        </p:nvSpPr>
+        <p:spPr>
+          <a:xfrm>
+            <a:off x="7184136" y="3364992"/>
+            <a:ext cx="1225296" cy="475488"/>
+          </a:xfrm>
+          <a:prstGeom prst="rect">
+            <a:avLst>
+              <a:gd name="adj" fmla="val 9615"/>
+            </a:avLst>
+          </a:prstGeom>
+          <a:solidFill>
+            <a:srgbClr val="FFFFFF"/>
+          </a:solidFill>
+          <a:ln w="12700">
+            <a:solidFill>
+              <a:srgbClr val="0D9488"/>
+            </a:solidFill>
+            <a:prstDash val="solid"/>
+          </a:ln>
+        </p:spPr>
+      </p:sp>
+      <p:sp>
+        <p:nvSpPr>
+          <p:cNvPr id="38" name="Text 36"/>
+          <p:cNvSpPr/>
+          <p:nvPr/>
+        </p:nvSpPr>
+        <p:spPr>
+          <a:xfrm>
+            <a:off x="7184136" y="3364992"/>
+            <a:ext cx="1225296" cy="475488"/>
+          </a:xfrm>
+          <a:prstGeom prst="rect">
+            <a:avLst/>
+          </a:prstGeom>
+          <a:noFill/>
+          <a:ln/>
+        </p:spPr>
+        <p:txBody>
+          <a:bodyPr wrap="square" lIns="0" tIns="0" rIns="0" bIns="0" rtlCol="0" anchor="ctr"/>
+          <a:lstStyle/>
+          <a:p>
+            <a:pPr algn="ctr" indent="0" marL="0">
+              <a:buNone/>
+            </a:pPr>
+            <a:r>
+              <a:rPr lang="en-US" sz="1400" b="1" dirty="0">
+                <a:solidFill>
+                  <a:srgbClr val="0D9488"/>
+                </a:solidFill>
+                <a:latin typeface="Trebuchet MS" pitchFamily="34" charset="0"/>
+                <a:ea typeface="Trebuchet MS" pitchFamily="34" charset="-122"/>
+                <a:cs typeface="Trebuchet MS" pitchFamily="34" charset="-120"/>
+              </a:rPr>
               <a:t>ry</a:t>
             </a:r>
             <a:endParaRPr lang="en-US" sz="1400" dirty="0"/>
@@ -16118,7 +16340,7 @@
       </p:sp>
       <p:sp>
         <p:nvSpPr>
-          <p:cNvPr id="33" name="Shape 31"/>
+          <p:cNvPr id="39" name="Shape 37"/>
           <p:cNvSpPr/>
           <p:nvPr/>
         </p:nvSpPr>
@@ -16145,7 +16367,7 @@
       </p:sp>
       <p:sp>
         <p:nvSpPr>
-          <p:cNvPr id="34" name="Text 32"/>
+          <p:cNvPr id="40" name="Text 38"/>
           <p:cNvSpPr/>
           <p:nvPr/>
         </p:nvSpPr>
@@ -16184,18 +16406,18 @@
       </p:sp>
       <p:sp>
         <p:nvSpPr>
-          <p:cNvPr id="35" name="Shape 33"/>
+          <p:cNvPr id="41" name="Shape 39"/>
           <p:cNvSpPr/>
           <p:nvPr/>
         </p:nvSpPr>
         <p:spPr>
           <a:xfrm>
             <a:off x="1874520" y="4096512"/>
-            <a:ext cx="6903720" cy="658368"/>
+            <a:ext cx="6903720" cy="804672"/>
           </a:xfrm>
           <a:prstGeom prst="rect">
             <a:avLst>
-              <a:gd name="adj" fmla="val 8333"/>
+              <a:gd name="adj" fmla="val 6818"/>
             </a:avLst>
           </a:prstGeom>
           <a:solidFill>
@@ -16211,18 +16433,18 @@
       </p:sp>
       <p:sp>
         <p:nvSpPr>
-          <p:cNvPr id="36" name="Shape 34"/>
-          <p:cNvSpPr/>
-          <p:nvPr/>
-        </p:nvSpPr>
-        <p:spPr>
-          <a:xfrm>
-            <a:off x="2254649" y="4169664"/>
-            <a:ext cx="685800" cy="475488"/>
+          <p:cNvPr id="42" name="Shape 40"/>
+          <p:cNvSpPr/>
+          <p:nvPr/>
+        </p:nvSpPr>
+        <p:spPr>
+          <a:xfrm>
+            <a:off x="1951828" y="4169664"/>
+            <a:ext cx="603504" cy="384048"/>
           </a:xfrm>
           <a:prstGeom prst="rect">
             <a:avLst>
-              <a:gd name="adj" fmla="val 7692"/>
+              <a:gd name="adj" fmla="val 9524"/>
             </a:avLst>
           </a:prstGeom>
           <a:solidFill>
@@ -16238,14 +16460,14 @@
       </p:sp>
       <p:sp>
         <p:nvSpPr>
-          <p:cNvPr id="37" name="Text 35"/>
-          <p:cNvSpPr/>
-          <p:nvPr/>
-        </p:nvSpPr>
-        <p:spPr>
-          <a:xfrm>
-            <a:off x="2254649" y="4169664"/>
-            <a:ext cx="685800" cy="475488"/>
+          <p:cNvPr id="43" name="Text 41"/>
+          <p:cNvSpPr/>
+          <p:nvPr/>
+        </p:nvSpPr>
+        <p:spPr>
+          <a:xfrm>
+            <a:off x="1951828" y="4169664"/>
+            <a:ext cx="603504" cy="384048"/>
           </a:xfrm>
           <a:prstGeom prst="rect">
             <a:avLst/>
@@ -16269,7 +16491,7 @@
                 <a:ea typeface="Trebuchet MS" pitchFamily="34" charset="-122"/>
                 <a:cs typeface="Trebuchet MS" pitchFamily="34" charset="-120"/>
               </a:rPr>
-              <a:t>l</a:t>
+              <a:t>e</a:t>
             </a:r>
             <a:endParaRPr lang="en-US" sz="900" dirty="0"/>
           </a:p>
@@ -16277,18 +16499,18 @@
       </p:sp>
       <p:sp>
         <p:nvSpPr>
-          <p:cNvPr id="38" name="Shape 36"/>
-          <p:cNvSpPr/>
-          <p:nvPr/>
-        </p:nvSpPr>
-        <p:spPr>
-          <a:xfrm>
-            <a:off x="3293146" y="4169664"/>
-            <a:ext cx="685800" cy="475488"/>
+          <p:cNvPr id="44" name="Shape 42"/>
+          <p:cNvSpPr/>
+          <p:nvPr/>
+        </p:nvSpPr>
+        <p:spPr>
+          <a:xfrm>
+            <a:off x="2605209" y="4169664"/>
+            <a:ext cx="603504" cy="384048"/>
           </a:xfrm>
           <a:prstGeom prst="rect">
             <a:avLst>
-              <a:gd name="adj" fmla="val 7692"/>
+              <a:gd name="adj" fmla="val 9524"/>
             </a:avLst>
           </a:prstGeom>
           <a:solidFill>
@@ -16304,14 +16526,14 @@
       </p:sp>
       <p:sp>
         <p:nvSpPr>
-          <p:cNvPr id="39" name="Text 37"/>
-          <p:cNvSpPr/>
-          <p:nvPr/>
-        </p:nvSpPr>
-        <p:spPr>
-          <a:xfrm>
-            <a:off x="3293146" y="4169664"/>
-            <a:ext cx="685800" cy="475488"/>
+          <p:cNvPr id="45" name="Text 43"/>
+          <p:cNvSpPr/>
+          <p:nvPr/>
+        </p:nvSpPr>
+        <p:spPr>
+          <a:xfrm>
+            <a:off x="2605209" y="4169664"/>
+            <a:ext cx="603504" cy="384048"/>
           </a:xfrm>
           <a:prstGeom prst="rect">
             <a:avLst/>
@@ -16335,7 +16557,7 @@
                 <a:ea typeface="Trebuchet MS" pitchFamily="34" charset="-122"/>
                 <a:cs typeface="Trebuchet MS" pitchFamily="34" charset="-120"/>
               </a:rPr>
-              <a:t>i</a:t>
+              <a:t>l</a:t>
             </a:r>
             <a:endParaRPr lang="en-US" sz="900" dirty="0"/>
           </a:p>
@@ -16343,18 +16565,18 @@
       </p:sp>
       <p:sp>
         <p:nvSpPr>
-          <p:cNvPr id="40" name="Shape 38"/>
-          <p:cNvSpPr/>
-          <p:nvPr/>
-        </p:nvSpPr>
-        <p:spPr>
-          <a:xfrm>
-            <a:off x="4331643" y="4169664"/>
-            <a:ext cx="685800" cy="475488"/>
+          <p:cNvPr id="46" name="Shape 44"/>
+          <p:cNvSpPr/>
+          <p:nvPr/>
+        </p:nvSpPr>
+        <p:spPr>
+          <a:xfrm>
+            <a:off x="3258589" y="4169664"/>
+            <a:ext cx="603504" cy="384048"/>
           </a:xfrm>
           <a:prstGeom prst="rect">
             <a:avLst>
-              <a:gd name="adj" fmla="val 7692"/>
+              <a:gd name="adj" fmla="val 9524"/>
             </a:avLst>
           </a:prstGeom>
           <a:solidFill>
@@ -16370,14 +16592,14 @@
       </p:sp>
       <p:sp>
         <p:nvSpPr>
-          <p:cNvPr id="41" name="Text 39"/>
-          <p:cNvSpPr/>
-          <p:nvPr/>
-        </p:nvSpPr>
-        <p:spPr>
-          <a:xfrm>
-            <a:off x="4331643" y="4169664"/>
-            <a:ext cx="685800" cy="475488"/>
+          <p:cNvPr id="47" name="Text 45"/>
+          <p:cNvSpPr/>
+          <p:nvPr/>
+        </p:nvSpPr>
+        <p:spPr>
+          <a:xfrm>
+            <a:off x="3258589" y="4169664"/>
+            <a:ext cx="603504" cy="384048"/>
           </a:xfrm>
           <a:prstGeom prst="rect">
             <a:avLst/>
@@ -16401,7 +16623,7 @@
                 <a:ea typeface="Trebuchet MS" pitchFamily="34" charset="-122"/>
                 <a:cs typeface="Trebuchet MS" pitchFamily="34" charset="-120"/>
               </a:rPr>
-              <a:t>br</a:t>
+              <a:t>e</a:t>
             </a:r>
             <a:endParaRPr lang="en-US" sz="900" dirty="0"/>
           </a:p>
@@ -16409,18 +16631,18 @@
       </p:sp>
       <p:sp>
         <p:nvSpPr>
-          <p:cNvPr id="42" name="Shape 40"/>
-          <p:cNvSpPr/>
-          <p:nvPr/>
-        </p:nvSpPr>
-        <p:spPr>
-          <a:xfrm>
-            <a:off x="5370141" y="4169664"/>
-            <a:ext cx="685800" cy="475488"/>
+          <p:cNvPr id="48" name="Shape 46"/>
+          <p:cNvSpPr/>
+          <p:nvPr/>
+        </p:nvSpPr>
+        <p:spPr>
+          <a:xfrm>
+            <a:off x="3911969" y="4169664"/>
+            <a:ext cx="603504" cy="384048"/>
           </a:xfrm>
           <a:prstGeom prst="rect">
             <a:avLst>
-              <a:gd name="adj" fmla="val 7692"/>
+              <a:gd name="adj" fmla="val 9524"/>
             </a:avLst>
           </a:prstGeom>
           <a:solidFill>
@@ -16436,14 +16658,14 @@
       </p:sp>
       <p:sp>
         <p:nvSpPr>
-          <p:cNvPr id="43" name="Text 41"/>
-          <p:cNvSpPr/>
-          <p:nvPr/>
-        </p:nvSpPr>
-        <p:spPr>
-          <a:xfrm>
-            <a:off x="5370141" y="4169664"/>
-            <a:ext cx="685800" cy="475488"/>
+          <p:cNvPr id="49" name="Text 47"/>
+          <p:cNvSpPr/>
+          <p:nvPr/>
+        </p:nvSpPr>
+        <p:spPr>
+          <a:xfrm>
+            <a:off x="3911969" y="4169664"/>
+            <a:ext cx="603504" cy="384048"/>
           </a:xfrm>
           <a:prstGeom prst="rect">
             <a:avLst/>
@@ -16467,7 +16689,7 @@
                 <a:ea typeface="Trebuchet MS" pitchFamily="34" charset="-122"/>
                 <a:cs typeface="Trebuchet MS" pitchFamily="34" charset="-120"/>
               </a:rPr>
-              <a:t>a</a:t>
+              <a:t>m</a:t>
             </a:r>
             <a:endParaRPr lang="en-US" sz="900" dirty="0"/>
           </a:p>
@@ -16475,18 +16697,18 @@
       </p:sp>
       <p:sp>
         <p:nvSpPr>
-          <p:cNvPr id="44" name="Shape 42"/>
-          <p:cNvSpPr/>
-          <p:nvPr/>
-        </p:nvSpPr>
-        <p:spPr>
-          <a:xfrm>
-            <a:off x="6408638" y="4169664"/>
-            <a:ext cx="685800" cy="475488"/>
+          <p:cNvPr id="50" name="Shape 48"/>
+          <p:cNvSpPr/>
+          <p:nvPr/>
+        </p:nvSpPr>
+        <p:spPr>
+          <a:xfrm>
+            <a:off x="4565350" y="4169664"/>
+            <a:ext cx="603504" cy="384048"/>
           </a:xfrm>
           <a:prstGeom prst="rect">
             <a:avLst>
-              <a:gd name="adj" fmla="val 7692"/>
+              <a:gd name="adj" fmla="val 9524"/>
             </a:avLst>
           </a:prstGeom>
           <a:solidFill>
@@ -16502,14 +16724,14 @@
       </p:sp>
       <p:sp>
         <p:nvSpPr>
-          <p:cNvPr id="45" name="Text 43"/>
-          <p:cNvSpPr/>
-          <p:nvPr/>
-        </p:nvSpPr>
-        <p:spPr>
-          <a:xfrm>
-            <a:off x="6408638" y="4169664"/>
-            <a:ext cx="685800" cy="475488"/>
+          <p:cNvPr id="51" name="Text 49"/>
+          <p:cNvSpPr/>
+          <p:nvPr/>
+        </p:nvSpPr>
+        <p:spPr>
+          <a:xfrm>
+            <a:off x="4565350" y="4169664"/>
+            <a:ext cx="603504" cy="384048"/>
           </a:xfrm>
           <a:prstGeom prst="rect">
             <a:avLst/>
@@ -16533,7 +16755,7 @@
                 <a:ea typeface="Trebuchet MS" pitchFamily="34" charset="-122"/>
                 <a:cs typeface="Trebuchet MS" pitchFamily="34" charset="-120"/>
               </a:rPr>
-              <a:t>r</a:t>
+              <a:t>e</a:t>
             </a:r>
             <a:endParaRPr lang="en-US" sz="900" dirty="0"/>
           </a:p>
@@ -16541,18 +16763,18 @@
       </p:sp>
       <p:sp>
         <p:nvSpPr>
-          <p:cNvPr id="46" name="Shape 44"/>
-          <p:cNvSpPr/>
-          <p:nvPr/>
-        </p:nvSpPr>
-        <p:spPr>
-          <a:xfrm>
-            <a:off x="7447135" y="4169664"/>
-            <a:ext cx="685800" cy="475488"/>
+          <p:cNvPr id="52" name="Shape 50"/>
+          <p:cNvSpPr/>
+          <p:nvPr/>
+        </p:nvSpPr>
+        <p:spPr>
+          <a:xfrm>
+            <a:off x="5218730" y="4169664"/>
+            <a:ext cx="603504" cy="384048"/>
           </a:xfrm>
           <a:prstGeom prst="rect">
             <a:avLst>
-              <a:gd name="adj" fmla="val 7692"/>
+              <a:gd name="adj" fmla="val 9524"/>
             </a:avLst>
           </a:prstGeom>
           <a:solidFill>
@@ -16568,14 +16790,14 @@
       </p:sp>
       <p:sp>
         <p:nvSpPr>
-          <p:cNvPr id="47" name="Text 45"/>
-          <p:cNvSpPr/>
-          <p:nvPr/>
-        </p:nvSpPr>
-        <p:spPr>
-          <a:xfrm>
-            <a:off x="7447135" y="4169664"/>
-            <a:ext cx="685800" cy="475488"/>
+          <p:cNvPr id="53" name="Text 51"/>
+          <p:cNvSpPr/>
+          <p:nvPr/>
+        </p:nvSpPr>
+        <p:spPr>
+          <a:xfrm>
+            <a:off x="5218730" y="4169664"/>
+            <a:ext cx="603504" cy="384048"/>
           </a:xfrm>
           <a:prstGeom prst="rect">
             <a:avLst/>
@@ -16599,9 +16821,312 @@
                 <a:ea typeface="Trebuchet MS" pitchFamily="34" charset="-122"/>
                 <a:cs typeface="Trebuchet MS" pitchFamily="34" charset="-120"/>
               </a:rPr>
+              <a:t>n</a:t>
+            </a:r>
+            <a:endParaRPr lang="en-US" sz="900" dirty="0"/>
+          </a:p>
+        </p:txBody>
+      </p:sp>
+      <p:sp>
+        <p:nvSpPr>
+          <p:cNvPr id="54" name="Shape 52"/>
+          <p:cNvSpPr/>
+          <p:nvPr/>
+        </p:nvSpPr>
+        <p:spPr>
+          <a:xfrm>
+            <a:off x="5872111" y="4169664"/>
+            <a:ext cx="603504" cy="384048"/>
+          </a:xfrm>
+          <a:prstGeom prst="rect">
+            <a:avLst>
+              <a:gd name="adj" fmla="val 9524"/>
+            </a:avLst>
+          </a:prstGeom>
+          <a:solidFill>
+            <a:srgbClr val="FFFFFF"/>
+          </a:solidFill>
+          <a:ln w="12700">
+            <a:solidFill>
+              <a:srgbClr val="DB2777"/>
+            </a:solidFill>
+            <a:prstDash val="solid"/>
+          </a:ln>
+        </p:spPr>
+      </p:sp>
+      <p:sp>
+        <p:nvSpPr>
+          <p:cNvPr id="55" name="Text 53"/>
+          <p:cNvSpPr/>
+          <p:nvPr/>
+        </p:nvSpPr>
+        <p:spPr>
+          <a:xfrm>
+            <a:off x="5872111" y="4169664"/>
+            <a:ext cx="603504" cy="384048"/>
+          </a:xfrm>
+          <a:prstGeom prst="rect">
+            <a:avLst/>
+          </a:prstGeom>
+          <a:noFill/>
+          <a:ln/>
+        </p:spPr>
+        <p:txBody>
+          <a:bodyPr wrap="square" lIns="0" tIns="0" rIns="0" bIns="0" rtlCol="0" anchor="ctr"/>
+          <a:lstStyle/>
+          <a:p>
+            <a:pPr algn="ctr" indent="0" marL="0">
+              <a:buNone/>
+            </a:pPr>
+            <a:r>
+              <a:rPr lang="en-US" sz="900" b="1" dirty="0">
+                <a:solidFill>
+                  <a:srgbClr val="9D174D"/>
+                </a:solidFill>
+                <a:latin typeface="Trebuchet MS" pitchFamily="34" charset="0"/>
+                <a:ea typeface="Trebuchet MS" pitchFamily="34" charset="-122"/>
+                <a:cs typeface="Trebuchet MS" pitchFamily="34" charset="-120"/>
+              </a:rPr>
+              <a:t>t</a:t>
+            </a:r>
+            <a:endParaRPr lang="en-US" sz="900" dirty="0"/>
+          </a:p>
+        </p:txBody>
+      </p:sp>
+      <p:sp>
+        <p:nvSpPr>
+          <p:cNvPr id="56" name="Shape 54"/>
+          <p:cNvSpPr/>
+          <p:nvPr/>
+        </p:nvSpPr>
+        <p:spPr>
+          <a:xfrm>
+            <a:off x="6525491" y="4169664"/>
+            <a:ext cx="603504" cy="384048"/>
+          </a:xfrm>
+          <a:prstGeom prst="rect">
+            <a:avLst>
+              <a:gd name="adj" fmla="val 9524"/>
+            </a:avLst>
+          </a:prstGeom>
+          <a:solidFill>
+            <a:srgbClr val="FFFFFF"/>
+          </a:solidFill>
+          <a:ln w="12700">
+            <a:solidFill>
+              <a:srgbClr val="DB2777"/>
+            </a:solidFill>
+            <a:prstDash val="solid"/>
+          </a:ln>
+        </p:spPr>
+      </p:sp>
+      <p:sp>
+        <p:nvSpPr>
+          <p:cNvPr id="57" name="Text 55"/>
+          <p:cNvSpPr/>
+          <p:nvPr/>
+        </p:nvSpPr>
+        <p:spPr>
+          <a:xfrm>
+            <a:off x="6525491" y="4169664"/>
+            <a:ext cx="603504" cy="384048"/>
+          </a:xfrm>
+          <a:prstGeom prst="rect">
+            <a:avLst/>
+          </a:prstGeom>
+          <a:noFill/>
+          <a:ln/>
+        </p:spPr>
+        <p:txBody>
+          <a:bodyPr wrap="square" lIns="0" tIns="0" rIns="0" bIns="0" rtlCol="0" anchor="ctr"/>
+          <a:lstStyle/>
+          <a:p>
+            <a:pPr algn="ctr" indent="0" marL="0">
+              <a:buNone/>
+            </a:pPr>
+            <a:r>
+              <a:rPr lang="en-US" sz="900" b="1" dirty="0">
+                <a:solidFill>
+                  <a:srgbClr val="9D174D"/>
+                </a:solidFill>
+                <a:latin typeface="Trebuchet MS" pitchFamily="34" charset="0"/>
+                <a:ea typeface="Trebuchet MS" pitchFamily="34" charset="-122"/>
+                <a:cs typeface="Trebuchet MS" pitchFamily="34" charset="-120"/>
+              </a:rPr>
+              <a:t>a</a:t>
+            </a:r>
+            <a:endParaRPr lang="en-US" sz="900" dirty="0"/>
+          </a:p>
+        </p:txBody>
+      </p:sp>
+      <p:sp>
+        <p:nvSpPr>
+          <p:cNvPr id="58" name="Shape 56"/>
+          <p:cNvSpPr/>
+          <p:nvPr/>
+        </p:nvSpPr>
+        <p:spPr>
+          <a:xfrm>
+            <a:off x="7178871" y="4169664"/>
+            <a:ext cx="603504" cy="384048"/>
+          </a:xfrm>
+          <a:prstGeom prst="rect">
+            <a:avLst>
+              <a:gd name="adj" fmla="val 9524"/>
+            </a:avLst>
+          </a:prstGeom>
+          <a:solidFill>
+            <a:srgbClr val="FFFFFF"/>
+          </a:solidFill>
+          <a:ln w="12700">
+            <a:solidFill>
+              <a:srgbClr val="DB2777"/>
+            </a:solidFill>
+            <a:prstDash val="solid"/>
+          </a:ln>
+        </p:spPr>
+      </p:sp>
+      <p:sp>
+        <p:nvSpPr>
+          <p:cNvPr id="59" name="Text 57"/>
+          <p:cNvSpPr/>
+          <p:nvPr/>
+        </p:nvSpPr>
+        <p:spPr>
+          <a:xfrm>
+            <a:off x="7178871" y="4169664"/>
+            <a:ext cx="603504" cy="384048"/>
+          </a:xfrm>
+          <a:prstGeom prst="rect">
+            <a:avLst/>
+          </a:prstGeom>
+          <a:noFill/>
+          <a:ln/>
+        </p:spPr>
+        <p:txBody>
+          <a:bodyPr wrap="square" lIns="0" tIns="0" rIns="0" bIns="0" rtlCol="0" anchor="ctr"/>
+          <a:lstStyle/>
+          <a:p>
+            <a:pPr algn="ctr" indent="0" marL="0">
+              <a:buNone/>
+            </a:pPr>
+            <a:r>
+              <a:rPr lang="en-US" sz="900" b="1" dirty="0">
+                <a:solidFill>
+                  <a:srgbClr val="9D174D"/>
+                </a:solidFill>
+                <a:latin typeface="Trebuchet MS" pitchFamily="34" charset="0"/>
+                <a:ea typeface="Trebuchet MS" pitchFamily="34" charset="-122"/>
+                <a:cs typeface="Trebuchet MS" pitchFamily="34" charset="-120"/>
+              </a:rPr>
+              <a:t>r</a:t>
+            </a:r>
+            <a:endParaRPr lang="en-US" sz="900" dirty="0"/>
+          </a:p>
+        </p:txBody>
+      </p:sp>
+      <p:sp>
+        <p:nvSpPr>
+          <p:cNvPr id="60" name="Shape 58"/>
+          <p:cNvSpPr/>
+          <p:nvPr/>
+        </p:nvSpPr>
+        <p:spPr>
+          <a:xfrm>
+            <a:off x="7832252" y="4169664"/>
+            <a:ext cx="603504" cy="384048"/>
+          </a:xfrm>
+          <a:prstGeom prst="rect">
+            <a:avLst>
+              <a:gd name="adj" fmla="val 9524"/>
+            </a:avLst>
+          </a:prstGeom>
+          <a:solidFill>
+            <a:srgbClr val="FFFFFF"/>
+          </a:solidFill>
+          <a:ln w="12700">
+            <a:solidFill>
+              <a:srgbClr val="DB2777"/>
+            </a:solidFill>
+            <a:prstDash val="solid"/>
+          </a:ln>
+        </p:spPr>
+      </p:sp>
+      <p:sp>
+        <p:nvSpPr>
+          <p:cNvPr id="61" name="Text 59"/>
+          <p:cNvSpPr/>
+          <p:nvPr/>
+        </p:nvSpPr>
+        <p:spPr>
+          <a:xfrm>
+            <a:off x="7832252" y="4169664"/>
+            <a:ext cx="603504" cy="384048"/>
+          </a:xfrm>
+          <a:prstGeom prst="rect">
+            <a:avLst/>
+          </a:prstGeom>
+          <a:noFill/>
+          <a:ln/>
+        </p:spPr>
+        <p:txBody>
+          <a:bodyPr wrap="square" lIns="0" tIns="0" rIns="0" bIns="0" rtlCol="0" anchor="ctr"/>
+          <a:lstStyle/>
+          <a:p>
+            <a:pPr algn="ctr" indent="0" marL="0">
+              <a:buNone/>
+            </a:pPr>
+            <a:r>
+              <a:rPr lang="en-US" sz="900" b="1" dirty="0">
+                <a:solidFill>
+                  <a:srgbClr val="9D174D"/>
+                </a:solidFill>
+                <a:latin typeface="Trebuchet MS" pitchFamily="34" charset="0"/>
+                <a:ea typeface="Trebuchet MS" pitchFamily="34" charset="-122"/>
+                <a:cs typeface="Trebuchet MS" pitchFamily="34" charset="-120"/>
+              </a:rPr>
               <a:t>y</a:t>
             </a:r>
             <a:endParaRPr lang="en-US" sz="900" dirty="0"/>
+          </a:p>
+        </p:txBody>
+      </p:sp>
+      <p:sp>
+        <p:nvSpPr>
+          <p:cNvPr id="62" name="Text 60"/>
+          <p:cNvSpPr/>
+          <p:nvPr/>
+        </p:nvSpPr>
+        <p:spPr>
+          <a:xfrm>
+            <a:off x="7832252" y="4572000"/>
+            <a:ext cx="603504" cy="219456"/>
+          </a:xfrm>
+          <a:prstGeom prst="rect">
+            <a:avLst/>
+          </a:prstGeom>
+          <a:noFill/>
+          <a:ln/>
+        </p:spPr>
+        <p:txBody>
+          <a:bodyPr wrap="square" lIns="0" tIns="0" rIns="0" bIns="0" rtlCol="0" anchor="t"/>
+          <a:lstStyle/>
+          <a:p>
+            <a:pPr algn="ctr" indent="0" marL="0">
+              <a:buNone/>
+            </a:pPr>
+            <a:r>
+              <a:rPr lang="en-US" sz="750" i="1" dirty="0">
+                <a:solidFill>
+                  <a:srgbClr val="94A3B8"/>
+                </a:solidFill>
+                <a:latin typeface="Calibri" pitchFamily="34" charset="0"/>
+                <a:ea typeface="Calibri" pitchFamily="34" charset="-122"/>
+                <a:cs typeface="Calibri" pitchFamily="34" charset="-120"/>
+              </a:rPr>
+              <a:t>/ee/</a:t>
+            </a:r>
+            <a:endParaRPr lang="en-US" sz="750" dirty="0"/>
           </a:p>
         </p:txBody>
       </p:sp>
@@ -17925,7 +18450,7 @@
                 <a:ea typeface="Calibri" pitchFamily="34" charset="-122"/>
                 <a:cs typeface="Calibri" pitchFamily="34" charset="-120"/>
               </a:rPr>
-              <a:t>In the </a:t>
+              <a:t>It is </a:t>
             </a:r>
             <a:pPr algn="l" indent="0" marL="0">
               <a:buNone/>
@@ -17942,7 +18467,7 @@
                 <a:ea typeface="Calibri" pitchFamily="34" charset="-122"/>
                 <a:cs typeface="Calibri" pitchFamily="34" charset="-120"/>
               </a:rPr>
-              <a:t>legendary</a:t>
+              <a:t>customary</a:t>
             </a:r>
             <a:pPr algn="l" indent="0" marL="0">
               <a:buNone/>
@@ -17956,7 +18481,7 @@
                 <a:ea typeface="Calibri" pitchFamily="34" charset="-122"/>
                 <a:cs typeface="Calibri" pitchFamily="34" charset="-120"/>
               </a:rPr>
-              <a:t> story, an </a:t>
+              <a:t> to visit the </a:t>
             </a:r>
             <a:pPr algn="l" indent="0" marL="0">
               <a:buNone/>
@@ -17973,7 +18498,7 @@
                 <a:ea typeface="Calibri" pitchFamily="34" charset="-122"/>
                 <a:cs typeface="Calibri" pitchFamily="34" charset="-120"/>
               </a:rPr>
-              <a:t>imaginary</a:t>
+              <a:t>legendary</a:t>
             </a:r>
             <a:pPr algn="l" indent="0" marL="0">
               <a:buNone/>
@@ -17987,7 +18512,7 @@
                 <a:ea typeface="Calibri" pitchFamily="34" charset="-122"/>
                 <a:cs typeface="Calibri" pitchFamily="34" charset="-120"/>
               </a:rPr>
-              <a:t> creature helped the </a:t>
+              <a:t> library, which has a </a:t>
             </a:r>
             <a:pPr algn="l" indent="0" marL="0">
               <a:buNone/>
@@ -18004,7 +18529,7 @@
                 <a:ea typeface="Calibri" pitchFamily="34" charset="-122"/>
                 <a:cs typeface="Calibri" pitchFamily="34" charset="-120"/>
               </a:rPr>
-              <a:t>ordinary</a:t>
+              <a:t>visionary</a:t>
             </a:r>
             <a:pPr algn="l" indent="0" marL="0">
               <a:buNone/>
@@ -18018,7 +18543,7 @@
                 <a:ea typeface="Calibri" pitchFamily="34" charset="-122"/>
                 <a:cs typeface="Calibri" pitchFamily="34" charset="-120"/>
               </a:rPr>
-              <a:t> villagers find their way home.</a:t>
+              <a:t> collection of books.</a:t>
             </a:r>
             <a:endParaRPr lang="en-US" sz="1800" dirty="0"/>
           </a:p>
@@ -18173,7 +18698,7 @@
                 <a:ea typeface="Trebuchet MS" pitchFamily="34" charset="-122"/>
                 <a:cs typeface="Trebuchet MS" pitchFamily="34" charset="-120"/>
               </a:rPr>
-              <a:t>legendary</a:t>
+              <a:t>customary</a:t>
             </a:r>
             <a:endParaRPr lang="en-US" sz="1400" dirty="0"/>
           </a:p>
@@ -18301,7 +18826,7 @@
                 <a:ea typeface="Trebuchet MS" pitchFamily="34" charset="-122"/>
                 <a:cs typeface="Trebuchet MS" pitchFamily="34" charset="-120"/>
               </a:rPr>
-              <a:t>imaginary</a:t>
+              <a:t>legendary</a:t>
             </a:r>
             <a:endParaRPr lang="en-US" sz="1400" dirty="0"/>
           </a:p>
@@ -18429,7 +18954,7 @@
                 <a:ea typeface="Trebuchet MS" pitchFamily="34" charset="-122"/>
                 <a:cs typeface="Trebuchet MS" pitchFamily="34" charset="-120"/>
               </a:rPr>
-              <a:t>ordinary</a:t>
+              <a:t>visionary</a:t>
             </a:r>
             <a:endParaRPr lang="en-US" sz="1400" dirty="0"/>
           </a:p>
@@ -18899,7 +19424,7 @@
                 <a:ea typeface="Trebuchet MS" pitchFamily="34" charset="-122"/>
                 <a:cs typeface="Trebuchet MS" pitchFamily="34" charset="-120"/>
               </a:rPr>
-              <a:t>legendary</a:t>
+              <a:t>customary</a:t>
             </a:r>
             <a:endParaRPr lang="en-US" sz="2800" dirty="0"/>
           </a:p>
@@ -19726,7 +20251,7 @@
                 <a:ea typeface="Trebuchet MS" pitchFamily="34" charset="-122"/>
                 <a:cs typeface="Trebuchet MS" pitchFamily="34" charset="-120"/>
               </a:rPr>
-              <a:t>legendary</a:t>
+              <a:t>customary</a:t>
             </a:r>
             <a:endParaRPr lang="en-US" sz="2800" dirty="0"/>
           </a:p>
@@ -19865,7 +20390,7 @@
                 <a:ea typeface="Trebuchet MS" pitchFamily="34" charset="-122"/>
                 <a:cs typeface="Trebuchet MS" pitchFamily="34" charset="-120"/>
               </a:rPr>
-              <a:t>legend</a:t>
+              <a:t>custom</a:t>
             </a:r>
             <a:endParaRPr lang="en-US" sz="1300" dirty="0"/>
           </a:p>
@@ -19904,7 +20429,7 @@
                 <a:ea typeface="Calibri" pitchFamily="34" charset="-122"/>
                 <a:cs typeface="Calibri" pitchFamily="34" charset="-120"/>
               </a:rPr>
-              <a:t>a famous story</a:t>
+              <a:t>usual practice</a:t>
             </a:r>
             <a:endParaRPr lang="en-US" sz="850" dirty="0"/>
           </a:p>
@@ -20711,7 +21236,7 @@
                 <a:ea typeface="Trebuchet MS" pitchFamily="34" charset="-122"/>
                 <a:cs typeface="Trebuchet MS" pitchFamily="34" charset="-120"/>
               </a:rPr>
-              <a:t>legendary</a:t>
+              <a:t>customary</a:t>
             </a:r>
             <a:endParaRPr lang="en-US" sz="2800" dirty="0"/>
           </a:p>
@@ -20850,7 +21375,7 @@
                 <a:ea typeface="Trebuchet MS" pitchFamily="34" charset="-122"/>
                 <a:cs typeface="Trebuchet MS" pitchFamily="34" charset="-120"/>
               </a:rPr>
-              <a:t>legend</a:t>
+              <a:t>custom</a:t>
             </a:r>
             <a:endParaRPr lang="en-US" sz="1300" dirty="0"/>
           </a:p>
@@ -20889,7 +21414,7 @@
                 <a:ea typeface="Calibri" pitchFamily="34" charset="-122"/>
                 <a:cs typeface="Calibri" pitchFamily="34" charset="-120"/>
               </a:rPr>
-              <a:t>a famous story</a:t>
+              <a:t>usual practice</a:t>
             </a:r>
             <a:endParaRPr lang="en-US" sz="850" dirty="0"/>
           </a:p>
@@ -21160,7 +21685,7 @@
                 <a:ea typeface="Trebuchet MS" pitchFamily="34" charset="-122"/>
                 <a:cs typeface="Trebuchet MS" pitchFamily="34" charset="-120"/>
               </a:rPr>
-              <a:t>leg</a:t>
+              <a:t>cus</a:t>
             </a:r>
             <a:endParaRPr lang="en-US" sz="1400" dirty="0"/>
           </a:p>
@@ -21265,7 +21790,7 @@
                 <a:ea typeface="Trebuchet MS" pitchFamily="34" charset="-122"/>
                 <a:cs typeface="Trebuchet MS" pitchFamily="34" charset="-120"/>
               </a:rPr>
-              <a:t>end</a:t>
+              <a:t>tom</a:t>
             </a:r>
             <a:endParaRPr lang="en-US" sz="1400" dirty="0"/>
           </a:p>
@@ -22038,7 +22563,7 @@
                 <a:ea typeface="Trebuchet MS" pitchFamily="34" charset="-122"/>
                 <a:cs typeface="Trebuchet MS" pitchFamily="34" charset="-120"/>
               </a:rPr>
-              <a:t>legendary</a:t>
+              <a:t>customary</a:t>
             </a:r>
             <a:endParaRPr lang="en-US" sz="2800" dirty="0"/>
           </a:p>
@@ -22177,7 +22702,7 @@
                 <a:ea typeface="Trebuchet MS" pitchFamily="34" charset="-122"/>
                 <a:cs typeface="Trebuchet MS" pitchFamily="34" charset="-120"/>
               </a:rPr>
-              <a:t>legend</a:t>
+              <a:t>custom</a:t>
             </a:r>
             <a:endParaRPr lang="en-US" sz="1300" dirty="0"/>
           </a:p>
@@ -22216,7 +22741,7 @@
                 <a:ea typeface="Calibri" pitchFamily="34" charset="-122"/>
                 <a:cs typeface="Calibri" pitchFamily="34" charset="-120"/>
               </a:rPr>
-              <a:t>a famous story</a:t>
+              <a:t>usual practice</a:t>
             </a:r>
             <a:endParaRPr lang="en-US" sz="850" dirty="0"/>
           </a:p>
@@ -22487,7 +23012,7 @@
                 <a:ea typeface="Trebuchet MS" pitchFamily="34" charset="-122"/>
                 <a:cs typeface="Trebuchet MS" pitchFamily="34" charset="-120"/>
               </a:rPr>
-              <a:t>leg</a:t>
+              <a:t>cus</a:t>
             </a:r>
             <a:endParaRPr lang="en-US" sz="1400" dirty="0"/>
           </a:p>
@@ -22592,7 +23117,7 @@
                 <a:ea typeface="Trebuchet MS" pitchFamily="34" charset="-122"/>
                 <a:cs typeface="Trebuchet MS" pitchFamily="34" charset="-120"/>
               </a:rPr>
-              <a:t>end</a:t>
+              <a:t>tom</a:t>
             </a:r>
             <a:endParaRPr lang="en-US" sz="1400" dirty="0"/>
           </a:p>
@@ -22883,11 +23408,11 @@
         <p:spPr>
           <a:xfrm>
             <a:off x="1874520" y="4096512"/>
-            <a:ext cx="6903720" cy="658368"/>
+            <a:ext cx="6903720" cy="804672"/>
           </a:xfrm>
           <a:prstGeom prst="rect">
             <a:avLst>
-              <a:gd name="adj" fmla="val 8333"/>
+              <a:gd name="adj" fmla="val 6818"/>
             </a:avLst>
           </a:prstGeom>
           <a:solidFill>
@@ -22910,11 +23435,11 @@
         <p:spPr>
           <a:xfrm>
             <a:off x="1951330" y="4169664"/>
-            <a:ext cx="676656" cy="475488"/>
+            <a:ext cx="676656" cy="384048"/>
           </a:xfrm>
           <a:prstGeom prst="rect">
             <a:avLst>
-              <a:gd name="adj" fmla="val 7692"/>
+              <a:gd name="adj" fmla="val 9524"/>
             </a:avLst>
           </a:prstGeom>
           <a:solidFill>
@@ -22937,7 +23462,7 @@
         <p:spPr>
           <a:xfrm>
             <a:off x="1951330" y="4169664"/>
-            <a:ext cx="676656" cy="475488"/>
+            <a:ext cx="676656" cy="384048"/>
           </a:xfrm>
           <a:prstGeom prst="rect">
             <a:avLst/>
@@ -22961,7 +23486,7 @@
                 <a:ea typeface="Trebuchet MS" pitchFamily="34" charset="-122"/>
                 <a:cs typeface="Trebuchet MS" pitchFamily="34" charset="-120"/>
               </a:rPr>
-              <a:t>l</a:t>
+              <a:t>c</a:t>
             </a:r>
             <a:endParaRPr lang="en-US" sz="900" dirty="0"/>
           </a:p>
@@ -22969,18 +23494,57 @@
       </p:sp>
       <p:sp>
         <p:nvSpPr>
-          <p:cNvPr id="41" name="Shape 39"/>
+          <p:cNvPr id="41" name="Text 39"/>
+          <p:cNvSpPr/>
+          <p:nvPr/>
+        </p:nvSpPr>
+        <p:spPr>
+          <a:xfrm>
+            <a:off x="1951330" y="4572000"/>
+            <a:ext cx="676656" cy="219456"/>
+          </a:xfrm>
+          <a:prstGeom prst="rect">
+            <a:avLst/>
+          </a:prstGeom>
+          <a:noFill/>
+          <a:ln/>
+        </p:spPr>
+        <p:txBody>
+          <a:bodyPr wrap="square" lIns="0" tIns="0" rIns="0" bIns="0" rtlCol="0" anchor="t"/>
+          <a:lstStyle/>
+          <a:p>
+            <a:pPr algn="ctr" indent="0" marL="0">
+              <a:buNone/>
+            </a:pPr>
+            <a:r>
+              <a:rPr lang="en-US" sz="750" i="1" dirty="0">
+                <a:solidFill>
+                  <a:srgbClr val="94A3B8"/>
+                </a:solidFill>
+                <a:latin typeface="Calibri" pitchFamily="34" charset="0"/>
+                <a:ea typeface="Calibri" pitchFamily="34" charset="-122"/>
+                <a:cs typeface="Calibri" pitchFamily="34" charset="-120"/>
+              </a:rPr>
+              <a:t>/k/</a:t>
+            </a:r>
+            <a:endParaRPr lang="en-US" sz="750" dirty="0"/>
+          </a:p>
+        </p:txBody>
+      </p:sp>
+      <p:sp>
+        <p:nvSpPr>
+          <p:cNvPr id="42" name="Shape 40"/>
           <p:cNvSpPr/>
           <p:nvPr/>
         </p:nvSpPr>
         <p:spPr>
           <a:xfrm>
             <a:off x="2677363" y="4169664"/>
-            <a:ext cx="676656" cy="475488"/>
+            <a:ext cx="676656" cy="384048"/>
           </a:xfrm>
           <a:prstGeom prst="rect">
             <a:avLst>
-              <a:gd name="adj" fmla="val 7692"/>
+              <a:gd name="adj" fmla="val 9524"/>
             </a:avLst>
           </a:prstGeom>
           <a:solidFill>
@@ -22996,14 +23560,14 @@
       </p:sp>
       <p:sp>
         <p:nvSpPr>
-          <p:cNvPr id="42" name="Text 40"/>
+          <p:cNvPr id="43" name="Text 41"/>
           <p:cNvSpPr/>
           <p:nvPr/>
         </p:nvSpPr>
         <p:spPr>
           <a:xfrm>
             <a:off x="2677363" y="4169664"/>
-            <a:ext cx="676656" cy="475488"/>
+            <a:ext cx="676656" cy="384048"/>
           </a:xfrm>
           <a:prstGeom prst="rect">
             <a:avLst/>
@@ -23027,7 +23591,7 @@
                 <a:ea typeface="Trebuchet MS" pitchFamily="34" charset="-122"/>
                 <a:cs typeface="Trebuchet MS" pitchFamily="34" charset="-120"/>
               </a:rPr>
-              <a:t>e</a:t>
+              <a:t>u</a:t>
             </a:r>
             <a:endParaRPr lang="en-US" sz="900" dirty="0"/>
           </a:p>
@@ -23035,18 +23599,18 @@
       </p:sp>
       <p:sp>
         <p:nvSpPr>
-          <p:cNvPr id="43" name="Shape 41"/>
+          <p:cNvPr id="44" name="Shape 42"/>
           <p:cNvSpPr/>
           <p:nvPr/>
         </p:nvSpPr>
         <p:spPr>
           <a:xfrm>
             <a:off x="3403397" y="4169664"/>
-            <a:ext cx="676656" cy="475488"/>
+            <a:ext cx="676656" cy="384048"/>
           </a:xfrm>
           <a:prstGeom prst="rect">
             <a:avLst>
-              <a:gd name="adj" fmla="val 7692"/>
+              <a:gd name="adj" fmla="val 9524"/>
             </a:avLst>
           </a:prstGeom>
           <a:solidFill>
@@ -23062,14 +23626,14 @@
       </p:sp>
       <p:sp>
         <p:nvSpPr>
-          <p:cNvPr id="44" name="Text 42"/>
+          <p:cNvPr id="45" name="Text 43"/>
           <p:cNvSpPr/>
           <p:nvPr/>
         </p:nvSpPr>
         <p:spPr>
           <a:xfrm>
             <a:off x="3403397" y="4169664"/>
-            <a:ext cx="676656" cy="475488"/>
+            <a:ext cx="676656" cy="384048"/>
           </a:xfrm>
           <a:prstGeom prst="rect">
             <a:avLst/>
@@ -23093,7 +23657,7 @@
                 <a:ea typeface="Trebuchet MS" pitchFamily="34" charset="-122"/>
                 <a:cs typeface="Trebuchet MS" pitchFamily="34" charset="-120"/>
               </a:rPr>
-              <a:t>g</a:t>
+              <a:t>s</a:t>
             </a:r>
             <a:endParaRPr lang="en-US" sz="900" dirty="0"/>
           </a:p>
@@ -23101,18 +23665,18 @@
       </p:sp>
       <p:sp>
         <p:nvSpPr>
-          <p:cNvPr id="45" name="Shape 43"/>
+          <p:cNvPr id="46" name="Shape 44"/>
           <p:cNvSpPr/>
           <p:nvPr/>
         </p:nvSpPr>
         <p:spPr>
           <a:xfrm>
             <a:off x="4129430" y="4169664"/>
-            <a:ext cx="676656" cy="475488"/>
+            <a:ext cx="676656" cy="384048"/>
           </a:xfrm>
           <a:prstGeom prst="rect">
             <a:avLst>
-              <a:gd name="adj" fmla="val 7692"/>
+              <a:gd name="adj" fmla="val 9524"/>
             </a:avLst>
           </a:prstGeom>
           <a:solidFill>
@@ -23128,14 +23692,14 @@
       </p:sp>
       <p:sp>
         <p:nvSpPr>
-          <p:cNvPr id="46" name="Text 44"/>
+          <p:cNvPr id="47" name="Text 45"/>
           <p:cNvSpPr/>
           <p:nvPr/>
         </p:nvSpPr>
         <p:spPr>
           <a:xfrm>
             <a:off x="4129430" y="4169664"/>
-            <a:ext cx="676656" cy="475488"/>
+            <a:ext cx="676656" cy="384048"/>
           </a:xfrm>
           <a:prstGeom prst="rect">
             <a:avLst/>
@@ -23159,7 +23723,7 @@
                 <a:ea typeface="Trebuchet MS" pitchFamily="34" charset="-122"/>
                 <a:cs typeface="Trebuchet MS" pitchFamily="34" charset="-120"/>
               </a:rPr>
-              <a:t>e</a:t>
+              <a:t>t</a:t>
             </a:r>
             <a:endParaRPr lang="en-US" sz="900" dirty="0"/>
           </a:p>
@@ -23167,18 +23731,18 @@
       </p:sp>
       <p:sp>
         <p:nvSpPr>
-          <p:cNvPr id="47" name="Shape 45"/>
+          <p:cNvPr id="48" name="Shape 46"/>
           <p:cNvSpPr/>
           <p:nvPr/>
         </p:nvSpPr>
         <p:spPr>
           <a:xfrm>
             <a:off x="4855464" y="4169664"/>
-            <a:ext cx="676656" cy="475488"/>
+            <a:ext cx="676656" cy="384048"/>
           </a:xfrm>
           <a:prstGeom prst="rect">
             <a:avLst>
-              <a:gd name="adj" fmla="val 7692"/>
+              <a:gd name="adj" fmla="val 9524"/>
             </a:avLst>
           </a:prstGeom>
           <a:solidFill>
@@ -23194,14 +23758,14 @@
       </p:sp>
       <p:sp>
         <p:nvSpPr>
-          <p:cNvPr id="48" name="Text 46"/>
+          <p:cNvPr id="49" name="Text 47"/>
           <p:cNvSpPr/>
           <p:nvPr/>
         </p:nvSpPr>
         <p:spPr>
           <a:xfrm>
             <a:off x="4855464" y="4169664"/>
-            <a:ext cx="676656" cy="475488"/>
+            <a:ext cx="676656" cy="384048"/>
           </a:xfrm>
           <a:prstGeom prst="rect">
             <a:avLst/>
@@ -23225,7 +23789,7 @@
                 <a:ea typeface="Trebuchet MS" pitchFamily="34" charset="-122"/>
                 <a:cs typeface="Trebuchet MS" pitchFamily="34" charset="-120"/>
               </a:rPr>
-              <a:t>n</a:t>
+              <a:t>o</a:t>
             </a:r>
             <a:endParaRPr lang="en-US" sz="900" dirty="0"/>
           </a:p>
@@ -23233,18 +23797,18 @@
       </p:sp>
       <p:sp>
         <p:nvSpPr>
-          <p:cNvPr id="49" name="Shape 47"/>
+          <p:cNvPr id="50" name="Shape 48"/>
           <p:cNvSpPr/>
           <p:nvPr/>
         </p:nvSpPr>
         <p:spPr>
           <a:xfrm>
             <a:off x="5581498" y="4169664"/>
-            <a:ext cx="676656" cy="475488"/>
+            <a:ext cx="676656" cy="384048"/>
           </a:xfrm>
           <a:prstGeom prst="rect">
             <a:avLst>
-              <a:gd name="adj" fmla="val 7692"/>
+              <a:gd name="adj" fmla="val 9524"/>
             </a:avLst>
           </a:prstGeom>
           <a:solidFill>
@@ -23260,14 +23824,14 @@
       </p:sp>
       <p:sp>
         <p:nvSpPr>
-          <p:cNvPr id="50" name="Text 48"/>
+          <p:cNvPr id="51" name="Text 49"/>
           <p:cNvSpPr/>
           <p:nvPr/>
         </p:nvSpPr>
         <p:spPr>
           <a:xfrm>
             <a:off x="5581498" y="4169664"/>
-            <a:ext cx="676656" cy="475488"/>
+            <a:ext cx="676656" cy="384048"/>
           </a:xfrm>
           <a:prstGeom prst="rect">
             <a:avLst/>
@@ -23291,7 +23855,7 @@
                 <a:ea typeface="Trebuchet MS" pitchFamily="34" charset="-122"/>
                 <a:cs typeface="Trebuchet MS" pitchFamily="34" charset="-120"/>
               </a:rPr>
-              <a:t>d</a:t>
+              <a:t>m</a:t>
             </a:r>
             <a:endParaRPr lang="en-US" sz="900" dirty="0"/>
           </a:p>
@@ -23299,18 +23863,18 @@
       </p:sp>
       <p:sp>
         <p:nvSpPr>
-          <p:cNvPr id="51" name="Shape 49"/>
+          <p:cNvPr id="52" name="Shape 50"/>
           <p:cNvSpPr/>
           <p:nvPr/>
         </p:nvSpPr>
         <p:spPr>
           <a:xfrm>
             <a:off x="6307531" y="4169664"/>
-            <a:ext cx="676656" cy="475488"/>
+            <a:ext cx="676656" cy="384048"/>
           </a:xfrm>
           <a:prstGeom prst="rect">
             <a:avLst>
-              <a:gd name="adj" fmla="val 7692"/>
+              <a:gd name="adj" fmla="val 9524"/>
             </a:avLst>
           </a:prstGeom>
           <a:solidFill>
@@ -23326,14 +23890,14 @@
       </p:sp>
       <p:sp>
         <p:nvSpPr>
-          <p:cNvPr id="52" name="Text 50"/>
+          <p:cNvPr id="53" name="Text 51"/>
           <p:cNvSpPr/>
           <p:nvPr/>
         </p:nvSpPr>
         <p:spPr>
           <a:xfrm>
             <a:off x="6307531" y="4169664"/>
-            <a:ext cx="676656" cy="475488"/>
+            <a:ext cx="676656" cy="384048"/>
           </a:xfrm>
           <a:prstGeom prst="rect">
             <a:avLst/>
@@ -23365,18 +23929,18 @@
       </p:sp>
       <p:sp>
         <p:nvSpPr>
-          <p:cNvPr id="53" name="Shape 51"/>
+          <p:cNvPr id="54" name="Shape 52"/>
           <p:cNvSpPr/>
           <p:nvPr/>
         </p:nvSpPr>
         <p:spPr>
           <a:xfrm>
             <a:off x="7033565" y="4169664"/>
-            <a:ext cx="676656" cy="475488"/>
+            <a:ext cx="676656" cy="384048"/>
           </a:xfrm>
           <a:prstGeom prst="rect">
             <a:avLst>
-              <a:gd name="adj" fmla="val 7692"/>
+              <a:gd name="adj" fmla="val 9524"/>
             </a:avLst>
           </a:prstGeom>
           <a:solidFill>
@@ -23392,14 +23956,14 @@
       </p:sp>
       <p:sp>
         <p:nvSpPr>
-          <p:cNvPr id="54" name="Text 52"/>
+          <p:cNvPr id="55" name="Text 53"/>
           <p:cNvSpPr/>
           <p:nvPr/>
         </p:nvSpPr>
         <p:spPr>
           <a:xfrm>
             <a:off x="7033565" y="4169664"/>
-            <a:ext cx="676656" cy="475488"/>
+            <a:ext cx="676656" cy="384048"/>
           </a:xfrm>
           <a:prstGeom prst="rect">
             <a:avLst/>
@@ -23431,18 +23995,18 @@
       </p:sp>
       <p:sp>
         <p:nvSpPr>
-          <p:cNvPr id="55" name="Shape 53"/>
+          <p:cNvPr id="56" name="Shape 54"/>
           <p:cNvSpPr/>
           <p:nvPr/>
         </p:nvSpPr>
         <p:spPr>
           <a:xfrm>
             <a:off x="7759598" y="4169664"/>
-            <a:ext cx="676656" cy="475488"/>
+            <a:ext cx="676656" cy="384048"/>
           </a:xfrm>
           <a:prstGeom prst="rect">
             <a:avLst>
-              <a:gd name="adj" fmla="val 7692"/>
+              <a:gd name="adj" fmla="val 9524"/>
             </a:avLst>
           </a:prstGeom>
           <a:solidFill>
@@ -23458,14 +24022,14 @@
       </p:sp>
       <p:sp>
         <p:nvSpPr>
-          <p:cNvPr id="56" name="Text 54"/>
+          <p:cNvPr id="57" name="Text 55"/>
           <p:cNvSpPr/>
           <p:nvPr/>
         </p:nvSpPr>
         <p:spPr>
           <a:xfrm>
             <a:off x="7759598" y="4169664"/>
-            <a:ext cx="676656" cy="475488"/>
+            <a:ext cx="676656" cy="384048"/>
           </a:xfrm>
           <a:prstGeom prst="rect">
             <a:avLst/>
@@ -23492,6 +24056,45 @@
               <a:t>y</a:t>
             </a:r>
             <a:endParaRPr lang="en-US" sz="900" dirty="0"/>
+          </a:p>
+        </p:txBody>
+      </p:sp>
+      <p:sp>
+        <p:nvSpPr>
+          <p:cNvPr id="58" name="Text 56"/>
+          <p:cNvSpPr/>
+          <p:nvPr/>
+        </p:nvSpPr>
+        <p:spPr>
+          <a:xfrm>
+            <a:off x="7759598" y="4572000"/>
+            <a:ext cx="676656" cy="219456"/>
+          </a:xfrm>
+          <a:prstGeom prst="rect">
+            <a:avLst/>
+          </a:prstGeom>
+          <a:noFill/>
+          <a:ln/>
+        </p:spPr>
+        <p:txBody>
+          <a:bodyPr wrap="square" lIns="0" tIns="0" rIns="0" bIns="0" rtlCol="0" anchor="t"/>
+          <a:lstStyle/>
+          <a:p>
+            <a:pPr algn="ctr" indent="0" marL="0">
+              <a:buNone/>
+            </a:pPr>
+            <a:r>
+              <a:rPr lang="en-US" sz="750" i="1" dirty="0">
+                <a:solidFill>
+                  <a:srgbClr val="94A3B8"/>
+                </a:solidFill>
+                <a:latin typeface="Calibri" pitchFamily="34" charset="0"/>
+                <a:ea typeface="Calibri" pitchFamily="34" charset="-122"/>
+                <a:cs typeface="Calibri" pitchFamily="34" charset="-120"/>
+              </a:rPr>
+              <a:t>/ee/</a:t>
+            </a:r>
+            <a:endParaRPr lang="en-US" sz="750" dirty="0"/>
           </a:p>
         </p:txBody>
       </p:sp>
@@ -23920,7 +24523,7 @@
                 <a:ea typeface="Trebuchet MS" pitchFamily="34" charset="-122"/>
                 <a:cs typeface="Trebuchet MS" pitchFamily="34" charset="-120"/>
               </a:rPr>
-              <a:t>imaginary</a:t>
+              <a:t>legendary</a:t>
             </a:r>
             <a:endParaRPr lang="en-US" sz="2800" dirty="0"/>
           </a:p>
@@ -24747,7 +25350,7 @@
                 <a:ea typeface="Trebuchet MS" pitchFamily="34" charset="-122"/>
                 <a:cs typeface="Trebuchet MS" pitchFamily="34" charset="-120"/>
               </a:rPr>
-              <a:t>imaginary</a:t>
+              <a:t>legendary</a:t>
             </a:r>
             <a:endParaRPr lang="en-US" sz="2800" dirty="0"/>
           </a:p>
@@ -24886,7 +25489,7 @@
                 <a:ea typeface="Trebuchet MS" pitchFamily="34" charset="-122"/>
                 <a:cs typeface="Trebuchet MS" pitchFamily="34" charset="-120"/>
               </a:rPr>
-              <a:t>imagin</a:t>
+              <a:t>legend</a:t>
             </a:r>
             <a:endParaRPr lang="en-US" sz="1300" dirty="0"/>
           </a:p>
@@ -24925,7 +25528,7 @@
                 <a:ea typeface="Calibri" pitchFamily="34" charset="-122"/>
                 <a:cs typeface="Calibri" pitchFamily="34" charset="-120"/>
               </a:rPr>
-              <a:t>to picture in the mind</a:t>
+              <a:t>famous story or person</a:t>
             </a:r>
             <a:endParaRPr lang="en-US" sz="850" dirty="0"/>
           </a:p>
@@ -26451,7 +27054,7 @@
                 <a:ea typeface="Trebuchet MS" pitchFamily="34" charset="-122"/>
                 <a:cs typeface="Trebuchet MS" pitchFamily="34" charset="-120"/>
               </a:rPr>
-              <a:t>imaginary</a:t>
+              <a:t>legendary</a:t>
             </a:r>
             <a:endParaRPr lang="en-US" sz="2800" dirty="0"/>
           </a:p>
@@ -26590,7 +27193,7 @@
                 <a:ea typeface="Trebuchet MS" pitchFamily="34" charset="-122"/>
                 <a:cs typeface="Trebuchet MS" pitchFamily="34" charset="-120"/>
               </a:rPr>
-              <a:t>imagin</a:t>
+              <a:t>legend</a:t>
             </a:r>
             <a:endParaRPr lang="en-US" sz="1300" dirty="0"/>
           </a:p>
@@ -26629,7 +27232,7 @@
                 <a:ea typeface="Calibri" pitchFamily="34" charset="-122"/>
                 <a:cs typeface="Calibri" pitchFamily="34" charset="-120"/>
               </a:rPr>
-              <a:t>to picture in the mind</a:t>
+              <a:t>famous story or person</a:t>
             </a:r>
             <a:endParaRPr lang="en-US" sz="850" dirty="0"/>
           </a:p>
@@ -26848,8 +27451,8 @@
         </p:nvSpPr>
         <p:spPr>
           <a:xfrm>
-            <a:off x="1978152" y="3364992"/>
-            <a:ext cx="1225296" cy="475488"/>
+            <a:off x="1975104" y="3364992"/>
+            <a:ext cx="1554480" cy="475488"/>
           </a:xfrm>
           <a:prstGeom prst="rect">
             <a:avLst>
@@ -26875,8 +27478,8 @@
         </p:nvSpPr>
         <p:spPr>
           <a:xfrm>
-            <a:off x="1978152" y="3364992"/>
-            <a:ext cx="1225296" cy="475488"/>
+            <a:off x="1975104" y="3364992"/>
+            <a:ext cx="1554480" cy="475488"/>
           </a:xfrm>
           <a:prstGeom prst="rect">
             <a:avLst/>
@@ -26900,7 +27503,7 @@
                 <a:ea typeface="Trebuchet MS" pitchFamily="34" charset="-122"/>
                 <a:cs typeface="Trebuchet MS" pitchFamily="34" charset="-120"/>
               </a:rPr>
-              <a:t>i</a:t>
+              <a:t>leg</a:t>
             </a:r>
             <a:endParaRPr lang="en-US" sz="1400" dirty="0"/>
           </a:p>
@@ -26914,8 +27517,8 @@
         </p:nvSpPr>
         <p:spPr>
           <a:xfrm>
-            <a:off x="3203448" y="3364992"/>
-            <a:ext cx="76200" cy="475488"/>
+            <a:off x="3529584" y="3364992"/>
+            <a:ext cx="73152" cy="475488"/>
           </a:xfrm>
           <a:prstGeom prst="rect">
             <a:avLst/>
@@ -26953,8 +27556,8 @@
         </p:nvSpPr>
         <p:spPr>
           <a:xfrm>
-            <a:off x="3279648" y="3364992"/>
-            <a:ext cx="1225296" cy="475488"/>
+            <a:off x="3602736" y="3364992"/>
+            <a:ext cx="1554480" cy="475488"/>
           </a:xfrm>
           <a:prstGeom prst="rect">
             <a:avLst>
@@ -26980,8 +27583,8 @@
         </p:nvSpPr>
         <p:spPr>
           <a:xfrm>
-            <a:off x="3279648" y="3364992"/>
-            <a:ext cx="1225296" cy="475488"/>
+            <a:off x="3602736" y="3364992"/>
+            <a:ext cx="1554480" cy="475488"/>
           </a:xfrm>
           <a:prstGeom prst="rect">
             <a:avLst/>
@@ -27005,7 +27608,7 @@
                 <a:ea typeface="Trebuchet MS" pitchFamily="34" charset="-122"/>
                 <a:cs typeface="Trebuchet MS" pitchFamily="34" charset="-120"/>
               </a:rPr>
-              <a:t>mag</a:t>
+              <a:t>end</a:t>
             </a:r>
             <a:endParaRPr lang="en-US" sz="1400" dirty="0"/>
           </a:p>
@@ -27019,8 +27622,8 @@
         </p:nvSpPr>
         <p:spPr>
           <a:xfrm>
-            <a:off x="4504944" y="3364992"/>
-            <a:ext cx="76200" cy="475488"/>
+            <a:off x="5157216" y="3364992"/>
+            <a:ext cx="73152" cy="475488"/>
           </a:xfrm>
           <a:prstGeom prst="rect">
             <a:avLst/>
@@ -27058,8 +27661,8 @@
         </p:nvSpPr>
         <p:spPr>
           <a:xfrm>
-            <a:off x="4581144" y="3364992"/>
-            <a:ext cx="1225296" cy="475488"/>
+            <a:off x="5230368" y="3364992"/>
+            <a:ext cx="1554480" cy="475488"/>
           </a:xfrm>
           <a:prstGeom prst="rect">
             <a:avLst>
@@ -27085,8 +27688,8 @@
         </p:nvSpPr>
         <p:spPr>
           <a:xfrm>
-            <a:off x="4581144" y="3364992"/>
-            <a:ext cx="1225296" cy="475488"/>
+            <a:off x="5230368" y="3364992"/>
+            <a:ext cx="1554480" cy="475488"/>
           </a:xfrm>
           <a:prstGeom prst="rect">
             <a:avLst/>
@@ -27110,7 +27713,7 @@
                 <a:ea typeface="Trebuchet MS" pitchFamily="34" charset="-122"/>
                 <a:cs typeface="Trebuchet MS" pitchFamily="34" charset="-120"/>
               </a:rPr>
-              <a:t>i</a:t>
+              <a:t>a</a:t>
             </a:r>
             <a:endParaRPr lang="en-US" sz="1400" dirty="0"/>
           </a:p>
@@ -27124,8 +27727,8 @@
         </p:nvSpPr>
         <p:spPr>
           <a:xfrm>
-            <a:off x="5806440" y="3364992"/>
-            <a:ext cx="76200" cy="475488"/>
+            <a:off x="6784848" y="3364992"/>
+            <a:ext cx="73152" cy="475488"/>
           </a:xfrm>
           <a:prstGeom prst="rect">
             <a:avLst/>
@@ -27163,8 +27766,8 @@
         </p:nvSpPr>
         <p:spPr>
           <a:xfrm>
-            <a:off x="5882640" y="3364992"/>
-            <a:ext cx="1225296" cy="475488"/>
+            <a:off x="6858000" y="3364992"/>
+            <a:ext cx="1554480" cy="475488"/>
           </a:xfrm>
           <a:prstGeom prst="rect">
             <a:avLst>
@@ -27190,8 +27793,8 @@
         </p:nvSpPr>
         <p:spPr>
           <a:xfrm>
-            <a:off x="5882640" y="3364992"/>
-            <a:ext cx="1225296" cy="475488"/>
+            <a:off x="6858000" y="3364992"/>
+            <a:ext cx="1554480" cy="475488"/>
           </a:xfrm>
           <a:prstGeom prst="rect">
             <a:avLst/>
@@ -27215,7 +27818,7 @@
                 <a:ea typeface="Trebuchet MS" pitchFamily="34" charset="-122"/>
                 <a:cs typeface="Trebuchet MS" pitchFamily="34" charset="-120"/>
               </a:rPr>
-              <a:t>na</a:t>
+              <a:t>ry</a:t>
             </a:r>
             <a:endParaRPr lang="en-US" sz="1400" dirty="0"/>
           </a:p>
@@ -27223,119 +27826,80 @@
       </p:sp>
       <p:sp>
         <p:nvSpPr>
-          <p:cNvPr id="36" name="Text 34"/>
-          <p:cNvSpPr/>
-          <p:nvPr/>
-        </p:nvSpPr>
-        <p:spPr>
-          <a:xfrm>
-            <a:off x="7107936" y="3364992"/>
-            <a:ext cx="76200" cy="475488"/>
-          </a:xfrm>
-          <a:prstGeom prst="rect">
-            <a:avLst/>
-          </a:prstGeom>
-          <a:noFill/>
-          <a:ln/>
-        </p:spPr>
-        <p:txBody>
-          <a:bodyPr wrap="square" lIns="0" tIns="0" rIns="0" bIns="0" rtlCol="0" anchor="ctr"/>
-          <a:lstStyle/>
-          <a:p>
-            <a:pPr algn="ctr" indent="0" marL="0">
-              <a:buNone/>
-            </a:pPr>
-            <a:r>
-              <a:rPr lang="en-US" sz="1600" b="1" dirty="0">
-                <a:solidFill>
-                  <a:srgbClr val="0D9488"/>
+          <p:cNvPr id="36" name="Shape 34"/>
+          <p:cNvSpPr/>
+          <p:nvPr/>
+        </p:nvSpPr>
+        <p:spPr>
+          <a:xfrm>
+            <a:off x="365760" y="4096512"/>
+            <a:ext cx="1371600" cy="804672"/>
+          </a:xfrm>
+          <a:prstGeom prst="rect">
+            <a:avLst>
+              <a:gd name="adj" fmla="val 6818"/>
+            </a:avLst>
+          </a:prstGeom>
+          <a:solidFill>
+            <a:srgbClr val="E2E8F0"/>
+          </a:solidFill>
+          <a:ln w="12700">
+            <a:solidFill>
+              <a:srgbClr val="E2E8F0"/>
+            </a:solidFill>
+            <a:prstDash val="solid"/>
+          </a:ln>
+        </p:spPr>
+      </p:sp>
+      <p:sp>
+        <p:nvSpPr>
+          <p:cNvPr id="37" name="Text 35"/>
+          <p:cNvSpPr/>
+          <p:nvPr/>
+        </p:nvSpPr>
+        <p:spPr>
+          <a:xfrm>
+            <a:off x="365760" y="4096512"/>
+            <a:ext cx="1371600" cy="804672"/>
+          </a:xfrm>
+          <a:prstGeom prst="rect">
+            <a:avLst/>
+          </a:prstGeom>
+          <a:noFill/>
+          <a:ln/>
+        </p:spPr>
+        <p:txBody>
+          <a:bodyPr wrap="square" lIns="0" tIns="0" rIns="0" bIns="0" rtlCol="0" anchor="ctr"/>
+          <a:lstStyle/>
+          <a:p>
+            <a:pPr algn="ctr" indent="0" marL="0">
+              <a:buNone/>
+            </a:pPr>
+            <a:r>
+              <a:rPr lang="en-US" sz="1100" b="1" dirty="0">
+                <a:solidFill>
+                  <a:srgbClr val="475569"/>
                 </a:solidFill>
                 <a:latin typeface="Trebuchet MS" pitchFamily="34" charset="0"/>
                 <a:ea typeface="Trebuchet MS" pitchFamily="34" charset="-122"/>
                 <a:cs typeface="Trebuchet MS" pitchFamily="34" charset="-120"/>
               </a:rPr>
-              <a:t>·</a:t>
-            </a:r>
-            <a:endParaRPr lang="en-US" sz="1600" dirty="0"/>
-          </a:p>
-        </p:txBody>
-      </p:sp>
-      <p:sp>
-        <p:nvSpPr>
-          <p:cNvPr id="37" name="Shape 35"/>
-          <p:cNvSpPr/>
-          <p:nvPr/>
-        </p:nvSpPr>
-        <p:spPr>
-          <a:xfrm>
-            <a:off x="7184136" y="3364992"/>
-            <a:ext cx="1225296" cy="475488"/>
-          </a:xfrm>
-          <a:prstGeom prst="rect">
-            <a:avLst>
-              <a:gd name="adj" fmla="val 9615"/>
-            </a:avLst>
-          </a:prstGeom>
-          <a:solidFill>
-            <a:srgbClr val="FFFFFF"/>
-          </a:solidFill>
-          <a:ln w="12700">
-            <a:solidFill>
-              <a:srgbClr val="0D9488"/>
-            </a:solidFill>
-            <a:prstDash val="solid"/>
-          </a:ln>
-        </p:spPr>
-      </p:sp>
-      <p:sp>
-        <p:nvSpPr>
-          <p:cNvPr id="38" name="Text 36"/>
-          <p:cNvSpPr/>
-          <p:nvPr/>
-        </p:nvSpPr>
-        <p:spPr>
-          <a:xfrm>
-            <a:off x="7184136" y="3364992"/>
-            <a:ext cx="1225296" cy="475488"/>
-          </a:xfrm>
-          <a:prstGeom prst="rect">
-            <a:avLst/>
-          </a:prstGeom>
-          <a:noFill/>
-          <a:ln/>
-        </p:spPr>
-        <p:txBody>
-          <a:bodyPr wrap="square" lIns="0" tIns="0" rIns="0" bIns="0" rtlCol="0" anchor="ctr"/>
-          <a:lstStyle/>
-          <a:p>
-            <a:pPr algn="ctr" indent="0" marL="0">
-              <a:buNone/>
-            </a:pPr>
-            <a:r>
-              <a:rPr lang="en-US" sz="1400" b="1" dirty="0">
-                <a:solidFill>
-                  <a:srgbClr val="0D9488"/>
-                </a:solidFill>
-                <a:latin typeface="Trebuchet MS" pitchFamily="34" charset="0"/>
-                <a:ea typeface="Trebuchet MS" pitchFamily="34" charset="-122"/>
-                <a:cs typeface="Trebuchet MS" pitchFamily="34" charset="-120"/>
-              </a:rPr>
-              <a:t>ry</a:t>
-            </a:r>
-            <a:endParaRPr lang="en-US" sz="1400" dirty="0"/>
-          </a:p>
-        </p:txBody>
-      </p:sp>
-      <p:sp>
-        <p:nvSpPr>
-          <p:cNvPr id="39" name="Shape 37"/>
-          <p:cNvSpPr/>
-          <p:nvPr/>
-        </p:nvSpPr>
-        <p:spPr>
-          <a:xfrm>
-            <a:off x="365760" y="4096512"/>
-            <a:ext cx="1371600" cy="804672"/>
+              <a:t>Phonemes</a:t>
+            </a:r>
+            <a:endParaRPr lang="en-US" sz="1100" dirty="0"/>
+          </a:p>
+        </p:txBody>
+      </p:sp>
+      <p:sp>
+        <p:nvSpPr>
+          <p:cNvPr id="38" name="Shape 36"/>
+          <p:cNvSpPr/>
+          <p:nvPr/>
+        </p:nvSpPr>
+        <p:spPr>
+          <a:xfrm>
+            <a:off x="1874520" y="4096512"/>
+            <a:ext cx="6903720" cy="804672"/>
           </a:xfrm>
           <a:prstGeom prst="rect">
             <a:avLst>
@@ -27343,85 +27907,19 @@
             </a:avLst>
           </a:prstGeom>
           <a:solidFill>
-            <a:srgbClr val="E2E8F0"/>
+            <a:srgbClr val="F8FAFC"/>
           </a:solidFill>
           <a:ln w="12700">
             <a:solidFill>
               <a:srgbClr val="E2E8F0"/>
             </a:solidFill>
-            <a:prstDash val="solid"/>
-          </a:ln>
-        </p:spPr>
-      </p:sp>
-      <p:sp>
-        <p:nvSpPr>
-          <p:cNvPr id="40" name="Text 38"/>
-          <p:cNvSpPr/>
-          <p:nvPr/>
-        </p:nvSpPr>
-        <p:spPr>
-          <a:xfrm>
-            <a:off x="365760" y="4096512"/>
-            <a:ext cx="1371600" cy="804672"/>
-          </a:xfrm>
-          <a:prstGeom prst="rect">
-            <a:avLst/>
-          </a:prstGeom>
-          <a:noFill/>
-          <a:ln/>
-        </p:spPr>
-        <p:txBody>
-          <a:bodyPr wrap="square" lIns="0" tIns="0" rIns="0" bIns="0" rtlCol="0" anchor="ctr"/>
-          <a:lstStyle/>
-          <a:p>
-            <a:pPr algn="ctr" indent="0" marL="0">
-              <a:buNone/>
-            </a:pPr>
-            <a:r>
-              <a:rPr lang="en-US" sz="1100" b="1" dirty="0">
-                <a:solidFill>
-                  <a:srgbClr val="475569"/>
-                </a:solidFill>
-                <a:latin typeface="Trebuchet MS" pitchFamily="34" charset="0"/>
-                <a:ea typeface="Trebuchet MS" pitchFamily="34" charset="-122"/>
-                <a:cs typeface="Trebuchet MS" pitchFamily="34" charset="-120"/>
-              </a:rPr>
-              <a:t>Phonemes</a:t>
-            </a:r>
-            <a:endParaRPr lang="en-US" sz="1100" dirty="0"/>
-          </a:p>
-        </p:txBody>
-      </p:sp>
-      <p:sp>
-        <p:nvSpPr>
-          <p:cNvPr id="41" name="Shape 39"/>
-          <p:cNvSpPr/>
-          <p:nvPr/>
-        </p:nvSpPr>
-        <p:spPr>
-          <a:xfrm>
-            <a:off x="1874520" y="4096512"/>
-            <a:ext cx="6903720" cy="804672"/>
-          </a:xfrm>
-          <a:prstGeom prst="rect">
-            <a:avLst>
-              <a:gd name="adj" fmla="val 6818"/>
-            </a:avLst>
-          </a:prstGeom>
-          <a:solidFill>
-            <a:srgbClr val="F8FAFC"/>
-          </a:solidFill>
-          <a:ln w="12700">
-            <a:solidFill>
-              <a:srgbClr val="E2E8F0"/>
-            </a:solidFill>
             <a:prstDash val="dash"/>
           </a:ln>
         </p:spPr>
       </p:sp>
       <p:sp>
         <p:nvSpPr>
-          <p:cNvPr id="42" name="Text 40"/>
+          <p:cNvPr id="39" name="Text 37"/>
           <p:cNvSpPr/>
           <p:nvPr/>
         </p:nvSpPr>
@@ -27883,7 +28381,7 @@
                 <a:ea typeface="Trebuchet MS" pitchFamily="34" charset="-122"/>
                 <a:cs typeface="Trebuchet MS" pitchFamily="34" charset="-120"/>
               </a:rPr>
-              <a:t>imaginary</a:t>
+              <a:t>legendary</a:t>
             </a:r>
             <a:endParaRPr lang="en-US" sz="2800" dirty="0"/>
           </a:p>
@@ -28022,7 +28520,7 @@
                 <a:ea typeface="Trebuchet MS" pitchFamily="34" charset="-122"/>
                 <a:cs typeface="Trebuchet MS" pitchFamily="34" charset="-120"/>
               </a:rPr>
-              <a:t>imagin</a:t>
+              <a:t>legend</a:t>
             </a:r>
             <a:endParaRPr lang="en-US" sz="1300" dirty="0"/>
           </a:p>
@@ -28061,7 +28559,7 @@
                 <a:ea typeface="Calibri" pitchFamily="34" charset="-122"/>
                 <a:cs typeface="Calibri" pitchFamily="34" charset="-120"/>
               </a:rPr>
-              <a:t>to picture in the mind</a:t>
+              <a:t>famous story or person</a:t>
             </a:r>
             <a:endParaRPr lang="en-US" sz="850" dirty="0"/>
           </a:p>
@@ -28280,8 +28778,8 @@
         </p:nvSpPr>
         <p:spPr>
           <a:xfrm>
-            <a:off x="1978152" y="3364992"/>
-            <a:ext cx="1225296" cy="475488"/>
+            <a:off x="1975104" y="3364992"/>
+            <a:ext cx="1554480" cy="475488"/>
           </a:xfrm>
           <a:prstGeom prst="rect">
             <a:avLst>
@@ -28307,8 +28805,8 @@
         </p:nvSpPr>
         <p:spPr>
           <a:xfrm>
-            <a:off x="1978152" y="3364992"/>
-            <a:ext cx="1225296" cy="475488"/>
+            <a:off x="1975104" y="3364992"/>
+            <a:ext cx="1554480" cy="475488"/>
           </a:xfrm>
           <a:prstGeom prst="rect">
             <a:avLst/>
@@ -28332,7 +28830,7 @@
                 <a:ea typeface="Trebuchet MS" pitchFamily="34" charset="-122"/>
                 <a:cs typeface="Trebuchet MS" pitchFamily="34" charset="-120"/>
               </a:rPr>
-              <a:t>i</a:t>
+              <a:t>leg</a:t>
             </a:r>
             <a:endParaRPr lang="en-US" sz="1400" dirty="0"/>
           </a:p>
@@ -28346,8 +28844,8 @@
         </p:nvSpPr>
         <p:spPr>
           <a:xfrm>
-            <a:off x="3203448" y="3364992"/>
-            <a:ext cx="76200" cy="475488"/>
+            <a:off x="3529584" y="3364992"/>
+            <a:ext cx="73152" cy="475488"/>
           </a:xfrm>
           <a:prstGeom prst="rect">
             <a:avLst/>
@@ -28385,8 +28883,8 @@
         </p:nvSpPr>
         <p:spPr>
           <a:xfrm>
-            <a:off x="3279648" y="3364992"/>
-            <a:ext cx="1225296" cy="475488"/>
+            <a:off x="3602736" y="3364992"/>
+            <a:ext cx="1554480" cy="475488"/>
           </a:xfrm>
           <a:prstGeom prst="rect">
             <a:avLst>
@@ -28412,8 +28910,8 @@
         </p:nvSpPr>
         <p:spPr>
           <a:xfrm>
-            <a:off x="3279648" y="3364992"/>
-            <a:ext cx="1225296" cy="475488"/>
+            <a:off x="3602736" y="3364992"/>
+            <a:ext cx="1554480" cy="475488"/>
           </a:xfrm>
           <a:prstGeom prst="rect">
             <a:avLst/>
@@ -28437,7 +28935,7 @@
                 <a:ea typeface="Trebuchet MS" pitchFamily="34" charset="-122"/>
                 <a:cs typeface="Trebuchet MS" pitchFamily="34" charset="-120"/>
               </a:rPr>
-              <a:t>mag</a:t>
+              <a:t>end</a:t>
             </a:r>
             <a:endParaRPr lang="en-US" sz="1400" dirty="0"/>
           </a:p>
@@ -28451,8 +28949,8 @@
         </p:nvSpPr>
         <p:spPr>
           <a:xfrm>
-            <a:off x="4504944" y="3364992"/>
-            <a:ext cx="76200" cy="475488"/>
+            <a:off x="5157216" y="3364992"/>
+            <a:ext cx="73152" cy="475488"/>
           </a:xfrm>
           <a:prstGeom prst="rect">
             <a:avLst/>
@@ -28490,8 +28988,8 @@
         </p:nvSpPr>
         <p:spPr>
           <a:xfrm>
-            <a:off x="4581144" y="3364992"/>
-            <a:ext cx="1225296" cy="475488"/>
+            <a:off x="5230368" y="3364992"/>
+            <a:ext cx="1554480" cy="475488"/>
           </a:xfrm>
           <a:prstGeom prst="rect">
             <a:avLst>
@@ -28517,8 +29015,8 @@
         </p:nvSpPr>
         <p:spPr>
           <a:xfrm>
-            <a:off x="4581144" y="3364992"/>
-            <a:ext cx="1225296" cy="475488"/>
+            <a:off x="5230368" y="3364992"/>
+            <a:ext cx="1554480" cy="475488"/>
           </a:xfrm>
           <a:prstGeom prst="rect">
             <a:avLst/>
@@ -28542,7 +29040,7 @@
                 <a:ea typeface="Trebuchet MS" pitchFamily="34" charset="-122"/>
                 <a:cs typeface="Trebuchet MS" pitchFamily="34" charset="-120"/>
               </a:rPr>
-              <a:t>i</a:t>
+              <a:t>a</a:t>
             </a:r>
             <a:endParaRPr lang="en-US" sz="1400" dirty="0"/>
           </a:p>
@@ -28556,8 +29054,8 @@
         </p:nvSpPr>
         <p:spPr>
           <a:xfrm>
-            <a:off x="5806440" y="3364992"/>
-            <a:ext cx="76200" cy="475488"/>
+            <a:off x="6784848" y="3364992"/>
+            <a:ext cx="73152" cy="475488"/>
           </a:xfrm>
           <a:prstGeom prst="rect">
             <a:avLst/>
@@ -28595,8 +29093,8 @@
         </p:nvSpPr>
         <p:spPr>
           <a:xfrm>
-            <a:off x="5882640" y="3364992"/>
-            <a:ext cx="1225296" cy="475488"/>
+            <a:off x="6858000" y="3364992"/>
+            <a:ext cx="1554480" cy="475488"/>
           </a:xfrm>
           <a:prstGeom prst="rect">
             <a:avLst>
@@ -28622,8 +29120,8 @@
         </p:nvSpPr>
         <p:spPr>
           <a:xfrm>
-            <a:off x="5882640" y="3364992"/>
-            <a:ext cx="1225296" cy="475488"/>
+            <a:off x="6858000" y="3364992"/>
+            <a:ext cx="1554480" cy="475488"/>
           </a:xfrm>
           <a:prstGeom prst="rect">
             <a:avLst/>
@@ -28647,7 +29145,7 @@
                 <a:ea typeface="Trebuchet MS" pitchFamily="34" charset="-122"/>
                 <a:cs typeface="Trebuchet MS" pitchFamily="34" charset="-120"/>
               </a:rPr>
-              <a:t>na</a:t>
+              <a:t>ry</a:t>
             </a:r>
             <a:endParaRPr lang="en-US" sz="1400" dirty="0"/>
           </a:p>
@@ -28655,193 +29153,247 @@
       </p:sp>
       <p:sp>
         <p:nvSpPr>
-          <p:cNvPr id="36" name="Text 34"/>
-          <p:cNvSpPr/>
-          <p:nvPr/>
-        </p:nvSpPr>
-        <p:spPr>
-          <a:xfrm>
-            <a:off x="7107936" y="3364992"/>
-            <a:ext cx="76200" cy="475488"/>
-          </a:xfrm>
-          <a:prstGeom prst="rect">
-            <a:avLst/>
-          </a:prstGeom>
-          <a:noFill/>
-          <a:ln/>
-        </p:spPr>
-        <p:txBody>
-          <a:bodyPr wrap="square" lIns="0" tIns="0" rIns="0" bIns="0" rtlCol="0" anchor="ctr"/>
-          <a:lstStyle/>
-          <a:p>
-            <a:pPr algn="ctr" indent="0" marL="0">
-              <a:buNone/>
-            </a:pPr>
-            <a:r>
-              <a:rPr lang="en-US" sz="1600" b="1" dirty="0">
-                <a:solidFill>
-                  <a:srgbClr val="0D9488"/>
+          <p:cNvPr id="36" name="Shape 34"/>
+          <p:cNvSpPr/>
+          <p:nvPr/>
+        </p:nvSpPr>
+        <p:spPr>
+          <a:xfrm>
+            <a:off x="365760" y="4096512"/>
+            <a:ext cx="1371600" cy="804672"/>
+          </a:xfrm>
+          <a:prstGeom prst="rect">
+            <a:avLst>
+              <a:gd name="adj" fmla="val 6818"/>
+            </a:avLst>
+          </a:prstGeom>
+          <a:solidFill>
+            <a:srgbClr val="E2E8F0"/>
+          </a:solidFill>
+          <a:ln w="12700">
+            <a:solidFill>
+              <a:srgbClr val="E2E8F0"/>
+            </a:solidFill>
+            <a:prstDash val="solid"/>
+          </a:ln>
+        </p:spPr>
+      </p:sp>
+      <p:sp>
+        <p:nvSpPr>
+          <p:cNvPr id="37" name="Text 35"/>
+          <p:cNvSpPr/>
+          <p:nvPr/>
+        </p:nvSpPr>
+        <p:spPr>
+          <a:xfrm>
+            <a:off x="365760" y="4096512"/>
+            <a:ext cx="1371600" cy="804672"/>
+          </a:xfrm>
+          <a:prstGeom prst="rect">
+            <a:avLst/>
+          </a:prstGeom>
+          <a:noFill/>
+          <a:ln/>
+        </p:spPr>
+        <p:txBody>
+          <a:bodyPr wrap="square" lIns="0" tIns="0" rIns="0" bIns="0" rtlCol="0" anchor="ctr"/>
+          <a:lstStyle/>
+          <a:p>
+            <a:pPr algn="ctr" indent="0" marL="0">
+              <a:buNone/>
+            </a:pPr>
+            <a:r>
+              <a:rPr lang="en-US" sz="1100" b="1" dirty="0">
+                <a:solidFill>
+                  <a:srgbClr val="475569"/>
                 </a:solidFill>
                 <a:latin typeface="Trebuchet MS" pitchFamily="34" charset="0"/>
                 <a:ea typeface="Trebuchet MS" pitchFamily="34" charset="-122"/>
                 <a:cs typeface="Trebuchet MS" pitchFamily="34" charset="-120"/>
               </a:rPr>
-              <a:t>·</a:t>
-            </a:r>
-            <a:endParaRPr lang="en-US" sz="1600" dirty="0"/>
-          </a:p>
-        </p:txBody>
-      </p:sp>
-      <p:sp>
-        <p:nvSpPr>
-          <p:cNvPr id="37" name="Shape 35"/>
-          <p:cNvSpPr/>
-          <p:nvPr/>
-        </p:nvSpPr>
-        <p:spPr>
-          <a:xfrm>
-            <a:off x="7184136" y="3364992"/>
-            <a:ext cx="1225296" cy="475488"/>
+              <a:t>Phonemes</a:t>
+            </a:r>
+            <a:endParaRPr lang="en-US" sz="1100" dirty="0"/>
+          </a:p>
+        </p:txBody>
+      </p:sp>
+      <p:sp>
+        <p:nvSpPr>
+          <p:cNvPr id="38" name="Shape 36"/>
+          <p:cNvSpPr/>
+          <p:nvPr/>
+        </p:nvSpPr>
+        <p:spPr>
+          <a:xfrm>
+            <a:off x="1874520" y="4096512"/>
+            <a:ext cx="6903720" cy="804672"/>
           </a:xfrm>
           <a:prstGeom prst="rect">
             <a:avLst>
-              <a:gd name="adj" fmla="val 9615"/>
+              <a:gd name="adj" fmla="val 6818"/>
             </a:avLst>
           </a:prstGeom>
           <a:solidFill>
+            <a:srgbClr val="FCE7F3"/>
+          </a:solidFill>
+          <a:ln w="12700">
+            <a:solidFill>
+              <a:srgbClr val="DB2777"/>
+            </a:solidFill>
+            <a:prstDash val="solid"/>
+          </a:ln>
+        </p:spPr>
+      </p:sp>
+      <p:sp>
+        <p:nvSpPr>
+          <p:cNvPr id="39" name="Shape 37"/>
+          <p:cNvSpPr/>
+          <p:nvPr/>
+        </p:nvSpPr>
+        <p:spPr>
+          <a:xfrm>
+            <a:off x="1951330" y="4169664"/>
+            <a:ext cx="676656" cy="384048"/>
+          </a:xfrm>
+          <a:prstGeom prst="rect">
+            <a:avLst>
+              <a:gd name="adj" fmla="val 9524"/>
+            </a:avLst>
+          </a:prstGeom>
+          <a:solidFill>
             <a:srgbClr val="FFFFFF"/>
           </a:solidFill>
           <a:ln w="12700">
             <a:solidFill>
-              <a:srgbClr val="0D9488"/>
-            </a:solidFill>
-            <a:prstDash val="solid"/>
-          </a:ln>
-        </p:spPr>
-      </p:sp>
-      <p:sp>
-        <p:nvSpPr>
-          <p:cNvPr id="38" name="Text 36"/>
-          <p:cNvSpPr/>
-          <p:nvPr/>
-        </p:nvSpPr>
-        <p:spPr>
-          <a:xfrm>
-            <a:off x="7184136" y="3364992"/>
-            <a:ext cx="1225296" cy="475488"/>
-          </a:xfrm>
-          <a:prstGeom prst="rect">
-            <a:avLst/>
-          </a:prstGeom>
-          <a:noFill/>
-          <a:ln/>
-        </p:spPr>
-        <p:txBody>
-          <a:bodyPr wrap="square" lIns="0" tIns="0" rIns="0" bIns="0" rtlCol="0" anchor="ctr"/>
-          <a:lstStyle/>
-          <a:p>
-            <a:pPr algn="ctr" indent="0" marL="0">
-              <a:buNone/>
-            </a:pPr>
-            <a:r>
-              <a:rPr lang="en-US" sz="1400" b="1" dirty="0">
-                <a:solidFill>
-                  <a:srgbClr val="0D9488"/>
+              <a:srgbClr val="DB2777"/>
+            </a:solidFill>
+            <a:prstDash val="solid"/>
+          </a:ln>
+        </p:spPr>
+      </p:sp>
+      <p:sp>
+        <p:nvSpPr>
+          <p:cNvPr id="40" name="Text 38"/>
+          <p:cNvSpPr/>
+          <p:nvPr/>
+        </p:nvSpPr>
+        <p:spPr>
+          <a:xfrm>
+            <a:off x="1951330" y="4169664"/>
+            <a:ext cx="676656" cy="384048"/>
+          </a:xfrm>
+          <a:prstGeom prst="rect">
+            <a:avLst/>
+          </a:prstGeom>
+          <a:noFill/>
+          <a:ln/>
+        </p:spPr>
+        <p:txBody>
+          <a:bodyPr wrap="square" lIns="0" tIns="0" rIns="0" bIns="0" rtlCol="0" anchor="ctr"/>
+          <a:lstStyle/>
+          <a:p>
+            <a:pPr algn="ctr" indent="0" marL="0">
+              <a:buNone/>
+            </a:pPr>
+            <a:r>
+              <a:rPr lang="en-US" sz="900" b="1" dirty="0">
+                <a:solidFill>
+                  <a:srgbClr val="9D174D"/>
                 </a:solidFill>
                 <a:latin typeface="Trebuchet MS" pitchFamily="34" charset="0"/>
                 <a:ea typeface="Trebuchet MS" pitchFamily="34" charset="-122"/>
                 <a:cs typeface="Trebuchet MS" pitchFamily="34" charset="-120"/>
               </a:rPr>
-              <a:t>ry</a:t>
-            </a:r>
-            <a:endParaRPr lang="en-US" sz="1400" dirty="0"/>
-          </a:p>
-        </p:txBody>
-      </p:sp>
-      <p:sp>
-        <p:nvSpPr>
-          <p:cNvPr id="39" name="Shape 37"/>
-          <p:cNvSpPr/>
-          <p:nvPr/>
-        </p:nvSpPr>
-        <p:spPr>
-          <a:xfrm>
-            <a:off x="365760" y="4096512"/>
-            <a:ext cx="1371600" cy="804672"/>
+              <a:t>l</a:t>
+            </a:r>
+            <a:endParaRPr lang="en-US" sz="900" dirty="0"/>
+          </a:p>
+        </p:txBody>
+      </p:sp>
+      <p:sp>
+        <p:nvSpPr>
+          <p:cNvPr id="41" name="Shape 39"/>
+          <p:cNvSpPr/>
+          <p:nvPr/>
+        </p:nvSpPr>
+        <p:spPr>
+          <a:xfrm>
+            <a:off x="2677363" y="4169664"/>
+            <a:ext cx="676656" cy="384048"/>
           </a:xfrm>
           <a:prstGeom prst="rect">
             <a:avLst>
-              <a:gd name="adj" fmla="val 6818"/>
+              <a:gd name="adj" fmla="val 9524"/>
             </a:avLst>
           </a:prstGeom>
           <a:solidFill>
-            <a:srgbClr val="E2E8F0"/>
-          </a:solidFill>
-          <a:ln w="12700">
-            <a:solidFill>
-              <a:srgbClr val="E2E8F0"/>
-            </a:solidFill>
-            <a:prstDash val="solid"/>
-          </a:ln>
-        </p:spPr>
-      </p:sp>
-      <p:sp>
-        <p:nvSpPr>
-          <p:cNvPr id="40" name="Text 38"/>
-          <p:cNvSpPr/>
-          <p:nvPr/>
-        </p:nvSpPr>
-        <p:spPr>
-          <a:xfrm>
-            <a:off x="365760" y="4096512"/>
-            <a:ext cx="1371600" cy="804672"/>
-          </a:xfrm>
-          <a:prstGeom prst="rect">
-            <a:avLst/>
-          </a:prstGeom>
-          <a:noFill/>
-          <a:ln/>
-        </p:spPr>
-        <p:txBody>
-          <a:bodyPr wrap="square" lIns="0" tIns="0" rIns="0" bIns="0" rtlCol="0" anchor="ctr"/>
-          <a:lstStyle/>
-          <a:p>
-            <a:pPr algn="ctr" indent="0" marL="0">
-              <a:buNone/>
-            </a:pPr>
-            <a:r>
-              <a:rPr lang="en-US" sz="1100" b="1" dirty="0">
-                <a:solidFill>
-                  <a:srgbClr val="475569"/>
+            <a:srgbClr val="FFFFFF"/>
+          </a:solidFill>
+          <a:ln w="12700">
+            <a:solidFill>
+              <a:srgbClr val="DB2777"/>
+            </a:solidFill>
+            <a:prstDash val="solid"/>
+          </a:ln>
+        </p:spPr>
+      </p:sp>
+      <p:sp>
+        <p:nvSpPr>
+          <p:cNvPr id="42" name="Text 40"/>
+          <p:cNvSpPr/>
+          <p:nvPr/>
+        </p:nvSpPr>
+        <p:spPr>
+          <a:xfrm>
+            <a:off x="2677363" y="4169664"/>
+            <a:ext cx="676656" cy="384048"/>
+          </a:xfrm>
+          <a:prstGeom prst="rect">
+            <a:avLst/>
+          </a:prstGeom>
+          <a:noFill/>
+          <a:ln/>
+        </p:spPr>
+        <p:txBody>
+          <a:bodyPr wrap="square" lIns="0" tIns="0" rIns="0" bIns="0" rtlCol="0" anchor="ctr"/>
+          <a:lstStyle/>
+          <a:p>
+            <a:pPr algn="ctr" indent="0" marL="0">
+              <a:buNone/>
+            </a:pPr>
+            <a:r>
+              <a:rPr lang="en-US" sz="900" b="1" dirty="0">
+                <a:solidFill>
+                  <a:srgbClr val="9D174D"/>
                 </a:solidFill>
                 <a:latin typeface="Trebuchet MS" pitchFamily="34" charset="0"/>
                 <a:ea typeface="Trebuchet MS" pitchFamily="34" charset="-122"/>
                 <a:cs typeface="Trebuchet MS" pitchFamily="34" charset="-120"/>
               </a:rPr>
-              <a:t>Phonemes</a:t>
-            </a:r>
-            <a:endParaRPr lang="en-US" sz="1100" dirty="0"/>
-          </a:p>
-        </p:txBody>
-      </p:sp>
-      <p:sp>
-        <p:nvSpPr>
-          <p:cNvPr id="41" name="Shape 39"/>
-          <p:cNvSpPr/>
-          <p:nvPr/>
-        </p:nvSpPr>
-        <p:spPr>
-          <a:xfrm>
-            <a:off x="1874520" y="4096512"/>
-            <a:ext cx="6903720" cy="658368"/>
+              <a:t>e</a:t>
+            </a:r>
+            <a:endParaRPr lang="en-US" sz="900" dirty="0"/>
+          </a:p>
+        </p:txBody>
+      </p:sp>
+      <p:sp>
+        <p:nvSpPr>
+          <p:cNvPr id="43" name="Shape 41"/>
+          <p:cNvSpPr/>
+          <p:nvPr/>
+        </p:nvSpPr>
+        <p:spPr>
+          <a:xfrm>
+            <a:off x="3403397" y="4169664"/>
+            <a:ext cx="676656" cy="384048"/>
           </a:xfrm>
           <a:prstGeom prst="rect">
             <a:avLst>
-              <a:gd name="adj" fmla="val 8333"/>
+              <a:gd name="adj" fmla="val 9524"/>
             </a:avLst>
           </a:prstGeom>
           <a:solidFill>
-            <a:srgbClr val="FCE7F3"/>
+            <a:srgbClr val="FFFFFF"/>
           </a:solidFill>
           <a:ln w="12700">
             <a:solidFill>
@@ -28853,41 +29405,14 @@
       </p:sp>
       <p:sp>
         <p:nvSpPr>
-          <p:cNvPr id="42" name="Shape 40"/>
-          <p:cNvSpPr/>
-          <p:nvPr/>
-        </p:nvSpPr>
-        <p:spPr>
-          <a:xfrm>
-            <a:off x="1951330" y="4169664"/>
-            <a:ext cx="676656" cy="475488"/>
-          </a:xfrm>
-          <a:prstGeom prst="rect">
-            <a:avLst>
-              <a:gd name="adj" fmla="val 7692"/>
-            </a:avLst>
-          </a:prstGeom>
-          <a:solidFill>
-            <a:srgbClr val="FFFFFF"/>
-          </a:solidFill>
-          <a:ln w="12700">
-            <a:solidFill>
-              <a:srgbClr val="DB2777"/>
-            </a:solidFill>
-            <a:prstDash val="solid"/>
-          </a:ln>
-        </p:spPr>
-      </p:sp>
-      <p:sp>
-        <p:nvSpPr>
-          <p:cNvPr id="43" name="Text 41"/>
-          <p:cNvSpPr/>
-          <p:nvPr/>
-        </p:nvSpPr>
-        <p:spPr>
-          <a:xfrm>
-            <a:off x="1951330" y="4169664"/>
-            <a:ext cx="676656" cy="475488"/>
+          <p:cNvPr id="44" name="Text 42"/>
+          <p:cNvSpPr/>
+          <p:nvPr/>
+        </p:nvSpPr>
+        <p:spPr>
+          <a:xfrm>
+            <a:off x="3403397" y="4169664"/>
+            <a:ext cx="676656" cy="384048"/>
           </a:xfrm>
           <a:prstGeom prst="rect">
             <a:avLst/>
@@ -28911,7 +29436,7 @@
                 <a:ea typeface="Trebuchet MS" pitchFamily="34" charset="-122"/>
                 <a:cs typeface="Trebuchet MS" pitchFamily="34" charset="-120"/>
               </a:rPr>
-              <a:t>i</a:t>
+              <a:t>g</a:t>
             </a:r>
             <a:endParaRPr lang="en-US" sz="900" dirty="0"/>
           </a:p>
@@ -28919,18 +29444,18 @@
       </p:sp>
       <p:sp>
         <p:nvSpPr>
-          <p:cNvPr id="44" name="Shape 42"/>
-          <p:cNvSpPr/>
-          <p:nvPr/>
-        </p:nvSpPr>
-        <p:spPr>
-          <a:xfrm>
-            <a:off x="2677363" y="4169664"/>
-            <a:ext cx="676656" cy="475488"/>
+          <p:cNvPr id="45" name="Shape 43"/>
+          <p:cNvSpPr/>
+          <p:nvPr/>
+        </p:nvSpPr>
+        <p:spPr>
+          <a:xfrm>
+            <a:off x="4129430" y="4169664"/>
+            <a:ext cx="676656" cy="384048"/>
           </a:xfrm>
           <a:prstGeom prst="rect">
             <a:avLst>
-              <a:gd name="adj" fmla="val 7692"/>
+              <a:gd name="adj" fmla="val 9524"/>
             </a:avLst>
           </a:prstGeom>
           <a:solidFill>
@@ -28946,14 +29471,14 @@
       </p:sp>
       <p:sp>
         <p:nvSpPr>
-          <p:cNvPr id="45" name="Text 43"/>
-          <p:cNvSpPr/>
-          <p:nvPr/>
-        </p:nvSpPr>
-        <p:spPr>
-          <a:xfrm>
-            <a:off x="2677363" y="4169664"/>
-            <a:ext cx="676656" cy="475488"/>
+          <p:cNvPr id="46" name="Text 44"/>
+          <p:cNvSpPr/>
+          <p:nvPr/>
+        </p:nvSpPr>
+        <p:spPr>
+          <a:xfrm>
+            <a:off x="4129430" y="4169664"/>
+            <a:ext cx="676656" cy="384048"/>
           </a:xfrm>
           <a:prstGeom prst="rect">
             <a:avLst/>
@@ -28977,7 +29502,7 @@
                 <a:ea typeface="Trebuchet MS" pitchFamily="34" charset="-122"/>
                 <a:cs typeface="Trebuchet MS" pitchFamily="34" charset="-120"/>
               </a:rPr>
-              <a:t>m</a:t>
+              <a:t>e</a:t>
             </a:r>
             <a:endParaRPr lang="en-US" sz="900" dirty="0"/>
           </a:p>
@@ -28985,18 +29510,18 @@
       </p:sp>
       <p:sp>
         <p:nvSpPr>
-          <p:cNvPr id="46" name="Shape 44"/>
-          <p:cNvSpPr/>
-          <p:nvPr/>
-        </p:nvSpPr>
-        <p:spPr>
-          <a:xfrm>
-            <a:off x="3403397" y="4169664"/>
-            <a:ext cx="676656" cy="475488"/>
+          <p:cNvPr id="47" name="Shape 45"/>
+          <p:cNvSpPr/>
+          <p:nvPr/>
+        </p:nvSpPr>
+        <p:spPr>
+          <a:xfrm>
+            <a:off x="4855464" y="4169664"/>
+            <a:ext cx="676656" cy="384048"/>
           </a:xfrm>
           <a:prstGeom prst="rect">
             <a:avLst>
-              <a:gd name="adj" fmla="val 7692"/>
+              <a:gd name="adj" fmla="val 9524"/>
             </a:avLst>
           </a:prstGeom>
           <a:solidFill>
@@ -29012,14 +29537,14 @@
       </p:sp>
       <p:sp>
         <p:nvSpPr>
-          <p:cNvPr id="47" name="Text 45"/>
-          <p:cNvSpPr/>
-          <p:nvPr/>
-        </p:nvSpPr>
-        <p:spPr>
-          <a:xfrm>
-            <a:off x="3403397" y="4169664"/>
-            <a:ext cx="676656" cy="475488"/>
+          <p:cNvPr id="48" name="Text 46"/>
+          <p:cNvSpPr/>
+          <p:nvPr/>
+        </p:nvSpPr>
+        <p:spPr>
+          <a:xfrm>
+            <a:off x="4855464" y="4169664"/>
+            <a:ext cx="676656" cy="384048"/>
           </a:xfrm>
           <a:prstGeom prst="rect">
             <a:avLst/>
@@ -29043,7 +29568,7 @@
                 <a:ea typeface="Trebuchet MS" pitchFamily="34" charset="-122"/>
                 <a:cs typeface="Trebuchet MS" pitchFamily="34" charset="-120"/>
               </a:rPr>
-              <a:t>a</a:t>
+              <a:t>n</a:t>
             </a:r>
             <a:endParaRPr lang="en-US" sz="900" dirty="0"/>
           </a:p>
@@ -29051,18 +29576,18 @@
       </p:sp>
       <p:sp>
         <p:nvSpPr>
-          <p:cNvPr id="48" name="Shape 46"/>
-          <p:cNvSpPr/>
-          <p:nvPr/>
-        </p:nvSpPr>
-        <p:spPr>
-          <a:xfrm>
-            <a:off x="4129430" y="4169664"/>
-            <a:ext cx="676656" cy="475488"/>
+          <p:cNvPr id="49" name="Shape 47"/>
+          <p:cNvSpPr/>
+          <p:nvPr/>
+        </p:nvSpPr>
+        <p:spPr>
+          <a:xfrm>
+            <a:off x="5581498" y="4169664"/>
+            <a:ext cx="676656" cy="384048"/>
           </a:xfrm>
           <a:prstGeom prst="rect">
             <a:avLst>
-              <a:gd name="adj" fmla="val 7692"/>
+              <a:gd name="adj" fmla="val 9524"/>
             </a:avLst>
           </a:prstGeom>
           <a:solidFill>
@@ -29078,14 +29603,14 @@
       </p:sp>
       <p:sp>
         <p:nvSpPr>
-          <p:cNvPr id="49" name="Text 47"/>
-          <p:cNvSpPr/>
-          <p:nvPr/>
-        </p:nvSpPr>
-        <p:spPr>
-          <a:xfrm>
-            <a:off x="4129430" y="4169664"/>
-            <a:ext cx="676656" cy="475488"/>
+          <p:cNvPr id="50" name="Text 48"/>
+          <p:cNvSpPr/>
+          <p:nvPr/>
+        </p:nvSpPr>
+        <p:spPr>
+          <a:xfrm>
+            <a:off x="5581498" y="4169664"/>
+            <a:ext cx="676656" cy="384048"/>
           </a:xfrm>
           <a:prstGeom prst="rect">
             <a:avLst/>
@@ -29109,7 +29634,7 @@
                 <a:ea typeface="Trebuchet MS" pitchFamily="34" charset="-122"/>
                 <a:cs typeface="Trebuchet MS" pitchFamily="34" charset="-120"/>
               </a:rPr>
-              <a:t>g</a:t>
+              <a:t>d</a:t>
             </a:r>
             <a:endParaRPr lang="en-US" sz="900" dirty="0"/>
           </a:p>
@@ -29117,18 +29642,18 @@
       </p:sp>
       <p:sp>
         <p:nvSpPr>
-          <p:cNvPr id="50" name="Shape 48"/>
-          <p:cNvSpPr/>
-          <p:nvPr/>
-        </p:nvSpPr>
-        <p:spPr>
-          <a:xfrm>
-            <a:off x="4855464" y="4169664"/>
-            <a:ext cx="676656" cy="475488"/>
+          <p:cNvPr id="51" name="Shape 49"/>
+          <p:cNvSpPr/>
+          <p:nvPr/>
+        </p:nvSpPr>
+        <p:spPr>
+          <a:xfrm>
+            <a:off x="6307531" y="4169664"/>
+            <a:ext cx="676656" cy="384048"/>
           </a:xfrm>
           <a:prstGeom prst="rect">
             <a:avLst>
-              <a:gd name="adj" fmla="val 7692"/>
+              <a:gd name="adj" fmla="val 9524"/>
             </a:avLst>
           </a:prstGeom>
           <a:solidFill>
@@ -29144,14 +29669,14 @@
       </p:sp>
       <p:sp>
         <p:nvSpPr>
-          <p:cNvPr id="51" name="Text 49"/>
-          <p:cNvSpPr/>
-          <p:nvPr/>
-        </p:nvSpPr>
-        <p:spPr>
-          <a:xfrm>
-            <a:off x="4855464" y="4169664"/>
-            <a:ext cx="676656" cy="475488"/>
+          <p:cNvPr id="52" name="Text 50"/>
+          <p:cNvSpPr/>
+          <p:nvPr/>
+        </p:nvSpPr>
+        <p:spPr>
+          <a:xfrm>
+            <a:off x="6307531" y="4169664"/>
+            <a:ext cx="676656" cy="384048"/>
           </a:xfrm>
           <a:prstGeom prst="rect">
             <a:avLst/>
@@ -29175,7 +29700,7 @@
                 <a:ea typeface="Trebuchet MS" pitchFamily="34" charset="-122"/>
                 <a:cs typeface="Trebuchet MS" pitchFamily="34" charset="-120"/>
               </a:rPr>
-              <a:t>i</a:t>
+              <a:t>a</a:t>
             </a:r>
             <a:endParaRPr lang="en-US" sz="900" dirty="0"/>
           </a:p>
@@ -29183,18 +29708,18 @@
       </p:sp>
       <p:sp>
         <p:nvSpPr>
-          <p:cNvPr id="52" name="Shape 50"/>
-          <p:cNvSpPr/>
-          <p:nvPr/>
-        </p:nvSpPr>
-        <p:spPr>
-          <a:xfrm>
-            <a:off x="5581498" y="4169664"/>
-            <a:ext cx="676656" cy="475488"/>
+          <p:cNvPr id="53" name="Shape 51"/>
+          <p:cNvSpPr/>
+          <p:nvPr/>
+        </p:nvSpPr>
+        <p:spPr>
+          <a:xfrm>
+            <a:off x="7033565" y="4169664"/>
+            <a:ext cx="676656" cy="384048"/>
           </a:xfrm>
           <a:prstGeom prst="rect">
             <a:avLst>
-              <a:gd name="adj" fmla="val 7692"/>
+              <a:gd name="adj" fmla="val 9524"/>
             </a:avLst>
           </a:prstGeom>
           <a:solidFill>
@@ -29210,14 +29735,14 @@
       </p:sp>
       <p:sp>
         <p:nvSpPr>
-          <p:cNvPr id="53" name="Text 51"/>
-          <p:cNvSpPr/>
-          <p:nvPr/>
-        </p:nvSpPr>
-        <p:spPr>
-          <a:xfrm>
-            <a:off x="5581498" y="4169664"/>
-            <a:ext cx="676656" cy="475488"/>
+          <p:cNvPr id="54" name="Text 52"/>
+          <p:cNvSpPr/>
+          <p:nvPr/>
+        </p:nvSpPr>
+        <p:spPr>
+          <a:xfrm>
+            <a:off x="7033565" y="4169664"/>
+            <a:ext cx="676656" cy="384048"/>
           </a:xfrm>
           <a:prstGeom prst="rect">
             <a:avLst/>
@@ -29241,7 +29766,7 @@
                 <a:ea typeface="Trebuchet MS" pitchFamily="34" charset="-122"/>
                 <a:cs typeface="Trebuchet MS" pitchFamily="34" charset="-120"/>
               </a:rPr>
-              <a:t>n</a:t>
+              <a:t>r</a:t>
             </a:r>
             <a:endParaRPr lang="en-US" sz="900" dirty="0"/>
           </a:p>
@@ -29249,18 +29774,18 @@
       </p:sp>
       <p:sp>
         <p:nvSpPr>
-          <p:cNvPr id="54" name="Shape 52"/>
-          <p:cNvSpPr/>
-          <p:nvPr/>
-        </p:nvSpPr>
-        <p:spPr>
-          <a:xfrm>
-            <a:off x="6307531" y="4169664"/>
-            <a:ext cx="676656" cy="475488"/>
+          <p:cNvPr id="55" name="Shape 53"/>
+          <p:cNvSpPr/>
+          <p:nvPr/>
+        </p:nvSpPr>
+        <p:spPr>
+          <a:xfrm>
+            <a:off x="7759598" y="4169664"/>
+            <a:ext cx="676656" cy="384048"/>
           </a:xfrm>
           <a:prstGeom prst="rect">
             <a:avLst>
-              <a:gd name="adj" fmla="val 7692"/>
+              <a:gd name="adj" fmla="val 9524"/>
             </a:avLst>
           </a:prstGeom>
           <a:solidFill>
@@ -29276,14 +29801,14 @@
       </p:sp>
       <p:sp>
         <p:nvSpPr>
-          <p:cNvPr id="55" name="Text 53"/>
-          <p:cNvSpPr/>
-          <p:nvPr/>
-        </p:nvSpPr>
-        <p:spPr>
-          <a:xfrm>
-            <a:off x="6307531" y="4169664"/>
-            <a:ext cx="676656" cy="475488"/>
+          <p:cNvPr id="56" name="Text 54"/>
+          <p:cNvSpPr/>
+          <p:nvPr/>
+        </p:nvSpPr>
+        <p:spPr>
+          <a:xfrm>
+            <a:off x="7759598" y="4169664"/>
+            <a:ext cx="676656" cy="384048"/>
           </a:xfrm>
           <a:prstGeom prst="rect">
             <a:avLst/>
@@ -29307,7 +29832,7 @@
                 <a:ea typeface="Trebuchet MS" pitchFamily="34" charset="-122"/>
                 <a:cs typeface="Trebuchet MS" pitchFamily="34" charset="-120"/>
               </a:rPr>
-              <a:t>a</a:t>
+              <a:t>y</a:t>
             </a:r>
             <a:endParaRPr lang="en-US" sz="900" dirty="0"/>
           </a:p>
@@ -29315,133 +29840,40 @@
       </p:sp>
       <p:sp>
         <p:nvSpPr>
-          <p:cNvPr id="56" name="Shape 54"/>
-          <p:cNvSpPr/>
-          <p:nvPr/>
-        </p:nvSpPr>
-        <p:spPr>
-          <a:xfrm>
-            <a:off x="7033565" y="4169664"/>
-            <a:ext cx="676656" cy="475488"/>
-          </a:xfrm>
-          <a:prstGeom prst="rect">
-            <a:avLst>
-              <a:gd name="adj" fmla="val 7692"/>
-            </a:avLst>
-          </a:prstGeom>
-          <a:solidFill>
-            <a:srgbClr val="FFFFFF"/>
-          </a:solidFill>
-          <a:ln w="12700">
-            <a:solidFill>
-              <a:srgbClr val="DB2777"/>
-            </a:solidFill>
-            <a:prstDash val="solid"/>
-          </a:ln>
-        </p:spPr>
-      </p:sp>
-      <p:sp>
-        <p:nvSpPr>
           <p:cNvPr id="57" name="Text 55"/>
           <p:cNvSpPr/>
           <p:nvPr/>
         </p:nvSpPr>
         <p:spPr>
           <a:xfrm>
-            <a:off x="7033565" y="4169664"/>
-            <a:ext cx="676656" cy="475488"/>
-          </a:xfrm>
-          <a:prstGeom prst="rect">
-            <a:avLst/>
-          </a:prstGeom>
-          <a:noFill/>
-          <a:ln/>
-        </p:spPr>
-        <p:txBody>
-          <a:bodyPr wrap="square" lIns="0" tIns="0" rIns="0" bIns="0" rtlCol="0" anchor="ctr"/>
-          <a:lstStyle/>
-          <a:p>
-            <a:pPr algn="ctr" indent="0" marL="0">
-              <a:buNone/>
-            </a:pPr>
-            <a:r>
-              <a:rPr lang="en-US" sz="900" b="1" dirty="0">
-                <a:solidFill>
-                  <a:srgbClr val="9D174D"/>
-                </a:solidFill>
-                <a:latin typeface="Trebuchet MS" pitchFamily="34" charset="0"/>
-                <a:ea typeface="Trebuchet MS" pitchFamily="34" charset="-122"/>
-                <a:cs typeface="Trebuchet MS" pitchFamily="34" charset="-120"/>
-              </a:rPr>
-              <a:t>r</a:t>
-            </a:r>
-            <a:endParaRPr lang="en-US" sz="900" dirty="0"/>
-          </a:p>
-        </p:txBody>
-      </p:sp>
-      <p:sp>
-        <p:nvSpPr>
-          <p:cNvPr id="58" name="Shape 56"/>
-          <p:cNvSpPr/>
-          <p:nvPr/>
-        </p:nvSpPr>
-        <p:spPr>
-          <a:xfrm>
-            <a:off x="7759598" y="4169664"/>
-            <a:ext cx="676656" cy="475488"/>
-          </a:xfrm>
-          <a:prstGeom prst="rect">
-            <a:avLst>
-              <a:gd name="adj" fmla="val 7692"/>
-            </a:avLst>
-          </a:prstGeom>
-          <a:solidFill>
-            <a:srgbClr val="FFFFFF"/>
-          </a:solidFill>
-          <a:ln w="12700">
-            <a:solidFill>
-              <a:srgbClr val="DB2777"/>
-            </a:solidFill>
-            <a:prstDash val="solid"/>
-          </a:ln>
-        </p:spPr>
-      </p:sp>
-      <p:sp>
-        <p:nvSpPr>
-          <p:cNvPr id="59" name="Text 57"/>
-          <p:cNvSpPr/>
-          <p:nvPr/>
-        </p:nvSpPr>
-        <p:spPr>
-          <a:xfrm>
-            <a:off x="7759598" y="4169664"/>
-            <a:ext cx="676656" cy="475488"/>
-          </a:xfrm>
-          <a:prstGeom prst="rect">
-            <a:avLst/>
-          </a:prstGeom>
-          <a:noFill/>
-          <a:ln/>
-        </p:spPr>
-        <p:txBody>
-          <a:bodyPr wrap="square" lIns="0" tIns="0" rIns="0" bIns="0" rtlCol="0" anchor="ctr"/>
-          <a:lstStyle/>
-          <a:p>
-            <a:pPr algn="ctr" indent="0" marL="0">
-              <a:buNone/>
-            </a:pPr>
-            <a:r>
-              <a:rPr lang="en-US" sz="900" b="1" dirty="0">
-                <a:solidFill>
-                  <a:srgbClr val="9D174D"/>
-                </a:solidFill>
-                <a:latin typeface="Trebuchet MS" pitchFamily="34" charset="0"/>
-                <a:ea typeface="Trebuchet MS" pitchFamily="34" charset="-122"/>
-                <a:cs typeface="Trebuchet MS" pitchFamily="34" charset="-120"/>
-              </a:rPr>
-              <a:t>y</a:t>
-            </a:r>
-            <a:endParaRPr lang="en-US" sz="900" dirty="0"/>
+            <a:off x="7759598" y="4572000"/>
+            <a:ext cx="676656" cy="219456"/>
+          </a:xfrm>
+          <a:prstGeom prst="rect">
+            <a:avLst/>
+          </a:prstGeom>
+          <a:noFill/>
+          <a:ln/>
+        </p:spPr>
+        <p:txBody>
+          <a:bodyPr wrap="square" lIns="0" tIns="0" rIns="0" bIns="0" rtlCol="0" anchor="t"/>
+          <a:lstStyle/>
+          <a:p>
+            <a:pPr algn="ctr" indent="0" marL="0">
+              <a:buNone/>
+            </a:pPr>
+            <a:r>
+              <a:rPr lang="en-US" sz="750" i="1" dirty="0">
+                <a:solidFill>
+                  <a:srgbClr val="94A3B8"/>
+                </a:solidFill>
+                <a:latin typeface="Calibri" pitchFamily="34" charset="0"/>
+                <a:ea typeface="Calibri" pitchFamily="34" charset="-122"/>
+                <a:cs typeface="Calibri" pitchFamily="34" charset="-120"/>
+              </a:rPr>
+              <a:t>/ee/</a:t>
+            </a:r>
+            <a:endParaRPr lang="en-US" sz="750" dirty="0"/>
           </a:p>
         </p:txBody>
       </p:sp>
@@ -29870,7 +30302,7 @@
                 <a:ea typeface="Trebuchet MS" pitchFamily="34" charset="-122"/>
                 <a:cs typeface="Trebuchet MS" pitchFamily="34" charset="-120"/>
               </a:rPr>
-              <a:t>ordinary</a:t>
+              <a:t>visionary</a:t>
             </a:r>
             <a:endParaRPr lang="en-US" sz="2800" dirty="0"/>
           </a:p>
@@ -30697,7 +31129,7 @@
                 <a:ea typeface="Trebuchet MS" pitchFamily="34" charset="-122"/>
                 <a:cs typeface="Trebuchet MS" pitchFamily="34" charset="-120"/>
               </a:rPr>
-              <a:t>ordinary</a:t>
+              <a:t>visionary</a:t>
             </a:r>
             <a:endParaRPr lang="en-US" sz="2800" dirty="0"/>
           </a:p>
@@ -30836,7 +31268,7 @@
                 <a:ea typeface="Trebuchet MS" pitchFamily="34" charset="-122"/>
                 <a:cs typeface="Trebuchet MS" pitchFamily="34" charset="-120"/>
               </a:rPr>
-              <a:t>ordin</a:t>
+              <a:t>vision</a:t>
             </a:r>
             <a:endParaRPr lang="en-US" sz="1300" dirty="0"/>
           </a:p>
@@ -30875,7 +31307,7 @@
                 <a:ea typeface="Calibri" pitchFamily="34" charset="-122"/>
                 <a:cs typeface="Calibri" pitchFamily="34" charset="-120"/>
               </a:rPr>
-              <a:t>order, rank</a:t>
+              <a:t>sight, idea about the future</a:t>
             </a:r>
             <a:endParaRPr lang="en-US" sz="850" dirty="0"/>
           </a:p>
@@ -31682,7 +32114,7 @@
                 <a:ea typeface="Trebuchet MS" pitchFamily="34" charset="-122"/>
                 <a:cs typeface="Trebuchet MS" pitchFamily="34" charset="-120"/>
               </a:rPr>
-              <a:t>ordinary</a:t>
+              <a:t>visionary</a:t>
             </a:r>
             <a:endParaRPr lang="en-US" sz="2800" dirty="0"/>
           </a:p>
@@ -31821,7 +32253,7 @@
                 <a:ea typeface="Trebuchet MS" pitchFamily="34" charset="-122"/>
                 <a:cs typeface="Trebuchet MS" pitchFamily="34" charset="-120"/>
               </a:rPr>
-              <a:t>ordin</a:t>
+              <a:t>vision</a:t>
             </a:r>
             <a:endParaRPr lang="en-US" sz="1300" dirty="0"/>
           </a:p>
@@ -31860,7 +32292,7 @@
                 <a:ea typeface="Calibri" pitchFamily="34" charset="-122"/>
                 <a:cs typeface="Calibri" pitchFamily="34" charset="-120"/>
               </a:rPr>
-              <a:t>order, rank</a:t>
+              <a:t>sight, idea about the future</a:t>
             </a:r>
             <a:endParaRPr lang="en-US" sz="850" dirty="0"/>
           </a:p>
@@ -32131,7 +32563,7 @@
                 <a:ea typeface="Trebuchet MS" pitchFamily="34" charset="-122"/>
                 <a:cs typeface="Trebuchet MS" pitchFamily="34" charset="-120"/>
               </a:rPr>
-              <a:t>or</a:t>
+              <a:t>vi</a:t>
             </a:r>
             <a:endParaRPr lang="en-US" sz="1400" dirty="0"/>
           </a:p>
@@ -32236,7 +32668,7 @@
                 <a:ea typeface="Trebuchet MS" pitchFamily="34" charset="-122"/>
                 <a:cs typeface="Trebuchet MS" pitchFamily="34" charset="-120"/>
               </a:rPr>
-              <a:t>di</a:t>
+              <a:t>sion</a:t>
             </a:r>
             <a:endParaRPr lang="en-US" sz="1400" dirty="0"/>
           </a:p>
@@ -32341,7 +32773,7 @@
                 <a:ea typeface="Trebuchet MS" pitchFamily="34" charset="-122"/>
                 <a:cs typeface="Trebuchet MS" pitchFamily="34" charset="-120"/>
               </a:rPr>
-              <a:t>na</a:t>
+              <a:t>a</a:t>
             </a:r>
             <a:endParaRPr lang="en-US" sz="1400" dirty="0"/>
           </a:p>
@@ -33009,7 +33441,7 @@
                 <a:ea typeface="Trebuchet MS" pitchFamily="34" charset="-122"/>
                 <a:cs typeface="Trebuchet MS" pitchFamily="34" charset="-120"/>
               </a:rPr>
-              <a:t>ordinary</a:t>
+              <a:t>visionary</a:t>
             </a:r>
             <a:endParaRPr lang="en-US" sz="2800" dirty="0"/>
           </a:p>
@@ -33148,7 +33580,7 @@
                 <a:ea typeface="Trebuchet MS" pitchFamily="34" charset="-122"/>
                 <a:cs typeface="Trebuchet MS" pitchFamily="34" charset="-120"/>
               </a:rPr>
-              <a:t>ordin</a:t>
+              <a:t>vision</a:t>
             </a:r>
             <a:endParaRPr lang="en-US" sz="1300" dirty="0"/>
           </a:p>
@@ -33187,7 +33619,7 @@
                 <a:ea typeface="Calibri" pitchFamily="34" charset="-122"/>
                 <a:cs typeface="Calibri" pitchFamily="34" charset="-120"/>
               </a:rPr>
-              <a:t>order, rank</a:t>
+              <a:t>sight, idea about the future</a:t>
             </a:r>
             <a:endParaRPr lang="en-US" sz="850" dirty="0"/>
           </a:p>
@@ -33458,7 +33890,7 @@
                 <a:ea typeface="Trebuchet MS" pitchFamily="34" charset="-122"/>
                 <a:cs typeface="Trebuchet MS" pitchFamily="34" charset="-120"/>
               </a:rPr>
-              <a:t>or</a:t>
+              <a:t>vi</a:t>
             </a:r>
             <a:endParaRPr lang="en-US" sz="1400" dirty="0"/>
           </a:p>
@@ -33563,7 +33995,7 @@
                 <a:ea typeface="Trebuchet MS" pitchFamily="34" charset="-122"/>
                 <a:cs typeface="Trebuchet MS" pitchFamily="34" charset="-120"/>
               </a:rPr>
-              <a:t>di</a:t>
+              <a:t>sion</a:t>
             </a:r>
             <a:endParaRPr lang="en-US" sz="1400" dirty="0"/>
           </a:p>
@@ -33668,7 +34100,7 @@
                 <a:ea typeface="Trebuchet MS" pitchFamily="34" charset="-122"/>
                 <a:cs typeface="Trebuchet MS" pitchFamily="34" charset="-120"/>
               </a:rPr>
-              <a:t>na</a:t>
+              <a:t>a</a:t>
             </a:r>
             <a:endParaRPr lang="en-US" sz="1400" dirty="0"/>
           </a:p>
@@ -33854,11 +34286,11 @@
         <p:spPr>
           <a:xfrm>
             <a:off x="1874520" y="4096512"/>
-            <a:ext cx="6903720" cy="658368"/>
+            <a:ext cx="6903720" cy="804672"/>
           </a:xfrm>
           <a:prstGeom prst="rect">
             <a:avLst>
-              <a:gd name="adj" fmla="val 8333"/>
+              <a:gd name="adj" fmla="val 6818"/>
             </a:avLst>
           </a:prstGeom>
           <a:solidFill>
@@ -33880,12 +34312,12 @@
         </p:nvSpPr>
         <p:spPr>
           <a:xfrm>
-            <a:off x="2124837" y="4169664"/>
-            <a:ext cx="685800" cy="475488"/>
+            <a:off x="2023872" y="4169664"/>
+            <a:ext cx="685800" cy="384048"/>
           </a:xfrm>
           <a:prstGeom prst="rect">
             <a:avLst>
-              <a:gd name="adj" fmla="val 7692"/>
+              <a:gd name="adj" fmla="val 9524"/>
             </a:avLst>
           </a:prstGeom>
           <a:solidFill>
@@ -33907,8 +34339,8 @@
         </p:nvSpPr>
         <p:spPr>
           <a:xfrm>
-            <a:off x="2124837" y="4169664"/>
-            <a:ext cx="685800" cy="475488"/>
+            <a:off x="2023872" y="4169664"/>
+            <a:ext cx="685800" cy="384048"/>
           </a:xfrm>
           <a:prstGeom prst="rect">
             <a:avLst/>
@@ -33932,7 +34364,7 @@
                 <a:ea typeface="Trebuchet MS" pitchFamily="34" charset="-122"/>
                 <a:cs typeface="Trebuchet MS" pitchFamily="34" charset="-120"/>
               </a:rPr>
-              <a:t>or</a:t>
+              <a:t>v</a:t>
             </a:r>
             <a:endParaRPr lang="en-US" sz="900" dirty="0"/>
           </a:p>
@@ -33946,12 +34378,12 @@
         </p:nvSpPr>
         <p:spPr>
           <a:xfrm>
-            <a:off x="3033522" y="4169664"/>
-            <a:ext cx="685800" cy="475488"/>
+            <a:off x="2831592" y="4169664"/>
+            <a:ext cx="685800" cy="384048"/>
           </a:xfrm>
           <a:prstGeom prst="rect">
             <a:avLst>
-              <a:gd name="adj" fmla="val 7692"/>
+              <a:gd name="adj" fmla="val 9524"/>
             </a:avLst>
           </a:prstGeom>
           <a:solidFill>
@@ -33973,8 +34405,8 @@
         </p:nvSpPr>
         <p:spPr>
           <a:xfrm>
-            <a:off x="3033522" y="4169664"/>
-            <a:ext cx="685800" cy="475488"/>
+            <a:off x="2831592" y="4169664"/>
+            <a:ext cx="685800" cy="384048"/>
           </a:xfrm>
           <a:prstGeom prst="rect">
             <a:avLst/>
@@ -33998,7 +34430,7 @@
                 <a:ea typeface="Trebuchet MS" pitchFamily="34" charset="-122"/>
                 <a:cs typeface="Trebuchet MS" pitchFamily="34" charset="-120"/>
               </a:rPr>
-              <a:t>d</a:t>
+              <a:t>i</a:t>
             </a:r>
             <a:endParaRPr lang="en-US" sz="900" dirty="0"/>
           </a:p>
@@ -34012,12 +34444,12 @@
         </p:nvSpPr>
         <p:spPr>
           <a:xfrm>
-            <a:off x="3942207" y="4169664"/>
-            <a:ext cx="685800" cy="475488"/>
+            <a:off x="3639312" y="4169664"/>
+            <a:ext cx="685800" cy="384048"/>
           </a:xfrm>
           <a:prstGeom prst="rect">
             <a:avLst>
-              <a:gd name="adj" fmla="val 7692"/>
+              <a:gd name="adj" fmla="val 9524"/>
             </a:avLst>
           </a:prstGeom>
           <a:solidFill>
@@ -34039,8 +34471,8 @@
         </p:nvSpPr>
         <p:spPr>
           <a:xfrm>
-            <a:off x="3942207" y="4169664"/>
-            <a:ext cx="685800" cy="475488"/>
+            <a:off x="3639312" y="4169664"/>
+            <a:ext cx="685800" cy="384048"/>
           </a:xfrm>
           <a:prstGeom prst="rect">
             <a:avLst/>
@@ -34064,7 +34496,7 @@
                 <a:ea typeface="Trebuchet MS" pitchFamily="34" charset="-122"/>
                 <a:cs typeface="Trebuchet MS" pitchFamily="34" charset="-120"/>
               </a:rPr>
-              <a:t>i</a:t>
+              <a:t>s</a:t>
             </a:r>
             <a:endParaRPr lang="en-US" sz="900" dirty="0"/>
           </a:p>
@@ -34072,18 +34504,57 @@
       </p:sp>
       <p:sp>
         <p:nvSpPr>
-          <p:cNvPr id="45" name="Shape 43"/>
-          <p:cNvSpPr/>
-          <p:nvPr/>
-        </p:nvSpPr>
-        <p:spPr>
-          <a:xfrm>
-            <a:off x="4850892" y="4169664"/>
-            <a:ext cx="685800" cy="475488"/>
+          <p:cNvPr id="45" name="Text 43"/>
+          <p:cNvSpPr/>
+          <p:nvPr/>
+        </p:nvSpPr>
+        <p:spPr>
+          <a:xfrm>
+            <a:off x="3639312" y="4572000"/>
+            <a:ext cx="685800" cy="219456"/>
+          </a:xfrm>
+          <a:prstGeom prst="rect">
+            <a:avLst/>
+          </a:prstGeom>
+          <a:noFill/>
+          <a:ln/>
+        </p:spPr>
+        <p:txBody>
+          <a:bodyPr wrap="square" lIns="0" tIns="0" rIns="0" bIns="0" rtlCol="0" anchor="t"/>
+          <a:lstStyle/>
+          <a:p>
+            <a:pPr algn="ctr" indent="0" marL="0">
+              <a:buNone/>
+            </a:pPr>
+            <a:r>
+              <a:rPr lang="en-US" sz="750" i="1" dirty="0">
+                <a:solidFill>
+                  <a:srgbClr val="94A3B8"/>
+                </a:solidFill>
+                <a:latin typeface="Calibri" pitchFamily="34" charset="0"/>
+                <a:ea typeface="Calibri" pitchFamily="34" charset="-122"/>
+                <a:cs typeface="Calibri" pitchFamily="34" charset="-120"/>
+              </a:rPr>
+              <a:t>/zh/</a:t>
+            </a:r>
+            <a:endParaRPr lang="en-US" sz="750" dirty="0"/>
+          </a:p>
+        </p:txBody>
+      </p:sp>
+      <p:sp>
+        <p:nvSpPr>
+          <p:cNvPr id="46" name="Shape 44"/>
+          <p:cNvSpPr/>
+          <p:nvPr/>
+        </p:nvSpPr>
+        <p:spPr>
+          <a:xfrm>
+            <a:off x="4447032" y="4169664"/>
+            <a:ext cx="685800" cy="384048"/>
           </a:xfrm>
           <a:prstGeom prst="rect">
             <a:avLst>
-              <a:gd name="adj" fmla="val 7692"/>
+              <a:gd name="adj" fmla="val 9524"/>
             </a:avLst>
           </a:prstGeom>
           <a:solidFill>
@@ -34099,14 +34570,14 @@
       </p:sp>
       <p:sp>
         <p:nvSpPr>
-          <p:cNvPr id="46" name="Text 44"/>
-          <p:cNvSpPr/>
-          <p:nvPr/>
-        </p:nvSpPr>
-        <p:spPr>
-          <a:xfrm>
-            <a:off x="4850892" y="4169664"/>
-            <a:ext cx="685800" cy="475488"/>
+          <p:cNvPr id="47" name="Text 45"/>
+          <p:cNvSpPr/>
+          <p:nvPr/>
+        </p:nvSpPr>
+        <p:spPr>
+          <a:xfrm>
+            <a:off x="4447032" y="4169664"/>
+            <a:ext cx="685800" cy="384048"/>
           </a:xfrm>
           <a:prstGeom prst="rect">
             <a:avLst/>
@@ -34130,7 +34601,7 @@
                 <a:ea typeface="Trebuchet MS" pitchFamily="34" charset="-122"/>
                 <a:cs typeface="Trebuchet MS" pitchFamily="34" charset="-120"/>
               </a:rPr>
-              <a:t>n</a:t>
+              <a:t>io</a:t>
             </a:r>
             <a:endParaRPr lang="en-US" sz="900" dirty="0"/>
           </a:p>
@@ -34138,18 +34609,57 @@
       </p:sp>
       <p:sp>
         <p:nvSpPr>
-          <p:cNvPr id="47" name="Shape 45"/>
-          <p:cNvSpPr/>
-          <p:nvPr/>
-        </p:nvSpPr>
-        <p:spPr>
-          <a:xfrm>
-            <a:off x="5759577" y="4169664"/>
-            <a:ext cx="685800" cy="475488"/>
+          <p:cNvPr id="48" name="Text 46"/>
+          <p:cNvSpPr/>
+          <p:nvPr/>
+        </p:nvSpPr>
+        <p:spPr>
+          <a:xfrm>
+            <a:off x="4447032" y="4572000"/>
+            <a:ext cx="685800" cy="219456"/>
+          </a:xfrm>
+          <a:prstGeom prst="rect">
+            <a:avLst/>
+          </a:prstGeom>
+          <a:noFill/>
+          <a:ln/>
+        </p:spPr>
+        <p:txBody>
+          <a:bodyPr wrap="square" lIns="0" tIns="0" rIns="0" bIns="0" rtlCol="0" anchor="t"/>
+          <a:lstStyle/>
+          <a:p>
+            <a:pPr algn="ctr" indent="0" marL="0">
+              <a:buNone/>
+            </a:pPr>
+            <a:r>
+              <a:rPr lang="en-US" sz="750" i="1" dirty="0">
+                <a:solidFill>
+                  <a:srgbClr val="94A3B8"/>
+                </a:solidFill>
+                <a:latin typeface="Calibri" pitchFamily="34" charset="0"/>
+                <a:ea typeface="Calibri" pitchFamily="34" charset="-122"/>
+                <a:cs typeface="Calibri" pitchFamily="34" charset="-120"/>
+              </a:rPr>
+              <a:t>/uh/</a:t>
+            </a:r>
+            <a:endParaRPr lang="en-US" sz="750" dirty="0"/>
+          </a:p>
+        </p:txBody>
+      </p:sp>
+      <p:sp>
+        <p:nvSpPr>
+          <p:cNvPr id="49" name="Shape 47"/>
+          <p:cNvSpPr/>
+          <p:nvPr/>
+        </p:nvSpPr>
+        <p:spPr>
+          <a:xfrm>
+            <a:off x="5254752" y="4169664"/>
+            <a:ext cx="685800" cy="384048"/>
           </a:xfrm>
           <a:prstGeom prst="rect">
             <a:avLst>
-              <a:gd name="adj" fmla="val 7692"/>
+              <a:gd name="adj" fmla="val 9524"/>
             </a:avLst>
           </a:prstGeom>
           <a:solidFill>
@@ -34165,14 +34675,14 @@
       </p:sp>
       <p:sp>
         <p:nvSpPr>
-          <p:cNvPr id="48" name="Text 46"/>
-          <p:cNvSpPr/>
-          <p:nvPr/>
-        </p:nvSpPr>
-        <p:spPr>
-          <a:xfrm>
-            <a:off x="5759577" y="4169664"/>
-            <a:ext cx="685800" cy="475488"/>
+          <p:cNvPr id="50" name="Text 48"/>
+          <p:cNvSpPr/>
+          <p:nvPr/>
+        </p:nvSpPr>
+        <p:spPr>
+          <a:xfrm>
+            <a:off x="5254752" y="4169664"/>
+            <a:ext cx="685800" cy="384048"/>
           </a:xfrm>
           <a:prstGeom prst="rect">
             <a:avLst/>
@@ -34196,7 +34706,7 @@
                 <a:ea typeface="Trebuchet MS" pitchFamily="34" charset="-122"/>
                 <a:cs typeface="Trebuchet MS" pitchFamily="34" charset="-120"/>
               </a:rPr>
-              <a:t>a</a:t>
+              <a:t>n</a:t>
             </a:r>
             <a:endParaRPr lang="en-US" sz="900" dirty="0"/>
           </a:p>
@@ -34204,18 +34714,18 @@
       </p:sp>
       <p:sp>
         <p:nvSpPr>
-          <p:cNvPr id="49" name="Shape 47"/>
-          <p:cNvSpPr/>
-          <p:nvPr/>
-        </p:nvSpPr>
-        <p:spPr>
-          <a:xfrm>
-            <a:off x="6668262" y="4169664"/>
-            <a:ext cx="685800" cy="475488"/>
+          <p:cNvPr id="51" name="Shape 49"/>
+          <p:cNvSpPr/>
+          <p:nvPr/>
+        </p:nvSpPr>
+        <p:spPr>
+          <a:xfrm>
+            <a:off x="6062472" y="4169664"/>
+            <a:ext cx="685800" cy="384048"/>
           </a:xfrm>
           <a:prstGeom prst="rect">
             <a:avLst>
-              <a:gd name="adj" fmla="val 7692"/>
+              <a:gd name="adj" fmla="val 9524"/>
             </a:avLst>
           </a:prstGeom>
           <a:solidFill>
@@ -34231,14 +34741,14 @@
       </p:sp>
       <p:sp>
         <p:nvSpPr>
-          <p:cNvPr id="50" name="Text 48"/>
-          <p:cNvSpPr/>
-          <p:nvPr/>
-        </p:nvSpPr>
-        <p:spPr>
-          <a:xfrm>
-            <a:off x="6668262" y="4169664"/>
-            <a:ext cx="685800" cy="475488"/>
+          <p:cNvPr id="52" name="Text 50"/>
+          <p:cNvSpPr/>
+          <p:nvPr/>
+        </p:nvSpPr>
+        <p:spPr>
+          <a:xfrm>
+            <a:off x="6062472" y="4169664"/>
+            <a:ext cx="685800" cy="384048"/>
           </a:xfrm>
           <a:prstGeom prst="rect">
             <a:avLst/>
@@ -34262,7 +34772,7 @@
                 <a:ea typeface="Trebuchet MS" pitchFamily="34" charset="-122"/>
                 <a:cs typeface="Trebuchet MS" pitchFamily="34" charset="-120"/>
               </a:rPr>
-              <a:t>r</a:t>
+              <a:t>a</a:t>
             </a:r>
             <a:endParaRPr lang="en-US" sz="900" dirty="0"/>
           </a:p>
@@ -34270,18 +34780,18 @@
       </p:sp>
       <p:sp>
         <p:nvSpPr>
-          <p:cNvPr id="51" name="Shape 49"/>
-          <p:cNvSpPr/>
-          <p:nvPr/>
-        </p:nvSpPr>
-        <p:spPr>
-          <a:xfrm>
-            <a:off x="7576947" y="4169664"/>
-            <a:ext cx="685800" cy="475488"/>
+          <p:cNvPr id="53" name="Shape 51"/>
+          <p:cNvSpPr/>
+          <p:nvPr/>
+        </p:nvSpPr>
+        <p:spPr>
+          <a:xfrm>
+            <a:off x="6870192" y="4169664"/>
+            <a:ext cx="685800" cy="384048"/>
           </a:xfrm>
           <a:prstGeom prst="rect">
             <a:avLst>
-              <a:gd name="adj" fmla="val 7692"/>
+              <a:gd name="adj" fmla="val 9524"/>
             </a:avLst>
           </a:prstGeom>
           <a:solidFill>
@@ -34297,14 +34807,14 @@
       </p:sp>
       <p:sp>
         <p:nvSpPr>
-          <p:cNvPr id="52" name="Text 50"/>
-          <p:cNvSpPr/>
-          <p:nvPr/>
-        </p:nvSpPr>
-        <p:spPr>
-          <a:xfrm>
-            <a:off x="7576947" y="4169664"/>
-            <a:ext cx="685800" cy="475488"/>
+          <p:cNvPr id="54" name="Text 52"/>
+          <p:cNvSpPr/>
+          <p:nvPr/>
+        </p:nvSpPr>
+        <p:spPr>
+          <a:xfrm>
+            <a:off x="6870192" y="4169664"/>
+            <a:ext cx="685800" cy="384048"/>
           </a:xfrm>
           <a:prstGeom prst="rect">
             <a:avLst/>
@@ -34328,9 +34838,114 @@
                 <a:ea typeface="Trebuchet MS" pitchFamily="34" charset="-122"/>
                 <a:cs typeface="Trebuchet MS" pitchFamily="34" charset="-120"/>
               </a:rPr>
+              <a:t>r</a:t>
+            </a:r>
+            <a:endParaRPr lang="en-US" sz="900" dirty="0"/>
+          </a:p>
+        </p:txBody>
+      </p:sp>
+      <p:sp>
+        <p:nvSpPr>
+          <p:cNvPr id="55" name="Shape 53"/>
+          <p:cNvSpPr/>
+          <p:nvPr/>
+        </p:nvSpPr>
+        <p:spPr>
+          <a:xfrm>
+            <a:off x="7677912" y="4169664"/>
+            <a:ext cx="685800" cy="384048"/>
+          </a:xfrm>
+          <a:prstGeom prst="rect">
+            <a:avLst>
+              <a:gd name="adj" fmla="val 9524"/>
+            </a:avLst>
+          </a:prstGeom>
+          <a:solidFill>
+            <a:srgbClr val="FFFFFF"/>
+          </a:solidFill>
+          <a:ln w="12700">
+            <a:solidFill>
+              <a:srgbClr val="DB2777"/>
+            </a:solidFill>
+            <a:prstDash val="solid"/>
+          </a:ln>
+        </p:spPr>
+      </p:sp>
+      <p:sp>
+        <p:nvSpPr>
+          <p:cNvPr id="56" name="Text 54"/>
+          <p:cNvSpPr/>
+          <p:nvPr/>
+        </p:nvSpPr>
+        <p:spPr>
+          <a:xfrm>
+            <a:off x="7677912" y="4169664"/>
+            <a:ext cx="685800" cy="384048"/>
+          </a:xfrm>
+          <a:prstGeom prst="rect">
+            <a:avLst/>
+          </a:prstGeom>
+          <a:noFill/>
+          <a:ln/>
+        </p:spPr>
+        <p:txBody>
+          <a:bodyPr wrap="square" lIns="0" tIns="0" rIns="0" bIns="0" rtlCol="0" anchor="ctr"/>
+          <a:lstStyle/>
+          <a:p>
+            <a:pPr algn="ctr" indent="0" marL="0">
+              <a:buNone/>
+            </a:pPr>
+            <a:r>
+              <a:rPr lang="en-US" sz="900" b="1" dirty="0">
+                <a:solidFill>
+                  <a:srgbClr val="9D174D"/>
+                </a:solidFill>
+                <a:latin typeface="Trebuchet MS" pitchFamily="34" charset="0"/>
+                <a:ea typeface="Trebuchet MS" pitchFamily="34" charset="-122"/>
+                <a:cs typeface="Trebuchet MS" pitchFamily="34" charset="-120"/>
+              </a:rPr>
               <a:t>y</a:t>
             </a:r>
             <a:endParaRPr lang="en-US" sz="900" dirty="0"/>
+          </a:p>
+        </p:txBody>
+      </p:sp>
+      <p:sp>
+        <p:nvSpPr>
+          <p:cNvPr id="57" name="Text 55"/>
+          <p:cNvSpPr/>
+          <p:nvPr/>
+        </p:nvSpPr>
+        <p:spPr>
+          <a:xfrm>
+            <a:off x="7677912" y="4572000"/>
+            <a:ext cx="685800" cy="219456"/>
+          </a:xfrm>
+          <a:prstGeom prst="rect">
+            <a:avLst/>
+          </a:prstGeom>
+          <a:noFill/>
+          <a:ln/>
+        </p:spPr>
+        <p:txBody>
+          <a:bodyPr wrap="square" lIns="0" tIns="0" rIns="0" bIns="0" rtlCol="0" anchor="t"/>
+          <a:lstStyle/>
+          <a:p>
+            <a:pPr algn="ctr" indent="0" marL="0">
+              <a:buNone/>
+            </a:pPr>
+            <a:r>
+              <a:rPr lang="en-US" sz="750" i="1" dirty="0">
+                <a:solidFill>
+                  <a:srgbClr val="94A3B8"/>
+                </a:solidFill>
+                <a:latin typeface="Calibri" pitchFamily="34" charset="0"/>
+                <a:ea typeface="Calibri" pitchFamily="34" charset="-122"/>
+                <a:cs typeface="Calibri" pitchFamily="34" charset="-120"/>
+              </a:rPr>
+              <a:t>/ee/</a:t>
+            </a:r>
+            <a:endParaRPr lang="en-US" sz="750" dirty="0"/>
           </a:p>
         </p:txBody>
       </p:sp>
@@ -36090,7 +36705,7 @@
                 <a:ea typeface="Trebuchet MS" pitchFamily="34" charset="-122"/>
                 <a:cs typeface="Trebuchet MS" pitchFamily="34" charset="-120"/>
               </a:rPr>
-              <a:t>sec-</a:t>
+              <a:t>dict-</a:t>
             </a:r>
             <a:endParaRPr lang="en-US" sz="1300" dirty="0"/>
           </a:p>
@@ -36154,7 +36769,7 @@
                 <a:ea typeface="Trebuchet MS" pitchFamily="34" charset="-122"/>
                 <a:cs typeface="Trebuchet MS" pitchFamily="34" charset="-120"/>
               </a:rPr>
-              <a:t>legend</a:t>
+              <a:t>element</a:t>
             </a:r>
             <a:endParaRPr lang="en-US" sz="1300" dirty="0"/>
           </a:p>
@@ -36282,7 +36897,7 @@
                 <a:ea typeface="Trebuchet MS" pitchFamily="34" charset="-122"/>
                 <a:cs typeface="Trebuchet MS" pitchFamily="34" charset="-120"/>
               </a:rPr>
-              <a:t>ordin-</a:t>
+              <a:t>vision-</a:t>
             </a:r>
             <a:endParaRPr lang="en-US" sz="1300" dirty="0"/>
           </a:p>
@@ -36346,7 +36961,7 @@
                 <a:ea typeface="Trebuchet MS" pitchFamily="34" charset="-122"/>
                 <a:cs typeface="Trebuchet MS" pitchFamily="34" charset="-120"/>
               </a:rPr>
-              <a:t>vision</a:t>
+              <a:t>secret</a:t>
             </a:r>
             <a:endParaRPr lang="en-US" sz="1300" dirty="0"/>
           </a:p>
@@ -36499,7 +37114,7 @@
                 <a:ea typeface="Trebuchet MS" pitchFamily="34" charset="-122"/>
                 <a:cs typeface="Trebuchet MS" pitchFamily="34" charset="-120"/>
               </a:rPr>
-              <a:t>custom</a:t>
+              <a:t>vision</a:t>
             </a:r>
             <a:endParaRPr lang="en-US" sz="1300" dirty="0"/>
           </a:p>
@@ -36588,7 +37203,7 @@
                 <a:ea typeface="Trebuchet MS" pitchFamily="34" charset="-122"/>
                 <a:cs typeface="Trebuchet MS" pitchFamily="34" charset="-120"/>
               </a:rPr>
-              <a:t>imagin-</a:t>
+              <a:t>secret-</a:t>
             </a:r>
             <a:endParaRPr lang="en-US" sz="1300" dirty="0"/>
           </a:p>
@@ -36652,7 +37267,7 @@
                 <a:ea typeface="Trebuchet MS" pitchFamily="34" charset="-122"/>
                 <a:cs typeface="Trebuchet MS" pitchFamily="34" charset="-120"/>
               </a:rPr>
-              <a:t>dict</a:t>
+              <a:t>custom</a:t>
             </a:r>
             <a:endParaRPr lang="en-US" sz="1300" dirty="0"/>
           </a:p>
@@ -36741,7 +37356,7 @@
                 <a:ea typeface="Trebuchet MS" pitchFamily="34" charset="-122"/>
                 <a:cs typeface="Trebuchet MS" pitchFamily="34" charset="-120"/>
               </a:rPr>
-              <a:t>volunt-</a:t>
+              <a:t>revolution-</a:t>
             </a:r>
             <a:endParaRPr lang="en-US" sz="1300" dirty="0"/>
           </a:p>
@@ -36805,7 +37420,7 @@
                 <a:ea typeface="Trebuchet MS" pitchFamily="34" charset="-122"/>
                 <a:cs typeface="Trebuchet MS" pitchFamily="34" charset="-120"/>
               </a:rPr>
-              <a:t>libr</a:t>
+              <a:t>bounty</a:t>
             </a:r>
             <a:endParaRPr lang="en-US" sz="1300" dirty="0"/>
           </a:p>
@@ -37001,7 +37616,7 @@
                 <a:ea typeface="Trebuchet MS" pitchFamily="34" charset="-122"/>
                 <a:cs typeface="Trebuchet MS" pitchFamily="34" charset="-120"/>
               </a:rPr>
-              <a:t>library</a:t>
+              <a:t>elementary</a:t>
             </a:r>
             <a:endParaRPr lang="en-US" sz="1200" dirty="0"/>
           </a:p>
@@ -37067,7 +37682,7 @@
                 <a:ea typeface="Trebuchet MS" pitchFamily="34" charset="-122"/>
                 <a:cs typeface="Trebuchet MS" pitchFamily="34" charset="-120"/>
               </a:rPr>
-              <a:t>ordinary</a:t>
+              <a:t>visionary</a:t>
             </a:r>
             <a:endParaRPr lang="en-US" sz="1200" dirty="0"/>
           </a:p>
@@ -37133,7 +37748,7 @@
                 <a:ea typeface="Trebuchet MS" pitchFamily="34" charset="-122"/>
                 <a:cs typeface="Trebuchet MS" pitchFamily="34" charset="-120"/>
               </a:rPr>
-              <a:t>voluntary</a:t>
+              <a:t>customary</a:t>
             </a:r>
             <a:endParaRPr lang="en-US" sz="1200" dirty="0"/>
           </a:p>
@@ -37199,7 +37814,7 @@
                 <a:ea typeface="Trebuchet MS" pitchFamily="34" charset="-122"/>
                 <a:cs typeface="Trebuchet MS" pitchFamily="34" charset="-120"/>
               </a:rPr>
-              <a:t>imaginary</a:t>
+              <a:t>secretary</a:t>
             </a:r>
             <a:endParaRPr lang="en-US" sz="1200" dirty="0"/>
           </a:p>
@@ -37265,7 +37880,7 @@
                 <a:ea typeface="Trebuchet MS" pitchFamily="34" charset="-122"/>
                 <a:cs typeface="Trebuchet MS" pitchFamily="34" charset="-120"/>
               </a:rPr>
-              <a:t>elementary</a:t>
+              <a:t>honorary</a:t>
             </a:r>
             <a:endParaRPr lang="en-US" sz="1200" dirty="0"/>
           </a:p>
@@ -37397,7 +38012,7 @@
                 <a:ea typeface="Trebuchet MS" pitchFamily="34" charset="-122"/>
                 <a:cs typeface="Trebuchet MS" pitchFamily="34" charset="-120"/>
               </a:rPr>
-              <a:t>visionary</a:t>
+              <a:t>voluntary</a:t>
             </a:r>
             <a:endParaRPr lang="en-US" sz="1200" dirty="0"/>
           </a:p>
@@ -38181,7 +38796,7 @@
                 <a:ea typeface="Calibri" pitchFamily="34" charset="-122"/>
                 <a:cs typeface="Calibri" pitchFamily="34" charset="-120"/>
               </a:rPr>
-              <a:t>A meaningful word part added to the beginning of a root to change its meaning. E.g. 'un-' in 'library' means 'not'.</a:t>
+              <a:t>A meaningful word part added to the beginning of a root to change its meaning. E.g. 'un-' in 'elementary' means 'not'.</a:t>
             </a:r>
             <a:endParaRPr lang="en-US" sz="1350" dirty="0"/>
           </a:p>
@@ -38724,7 +39339,7 @@
                 <a:ea typeface="Calibri" pitchFamily="34" charset="-122"/>
                 <a:cs typeface="Calibri" pitchFamily="34" charset="-120"/>
               </a:rPr>
-              <a:t>2.  The suffix '-ary' always makes a word into a verb.</a:t>
+              <a:t>2.  The word 'dictionary' contains the suffix '-ary'.</a:t>
             </a:r>
             <a:endParaRPr lang="en-US" sz="1300" dirty="0"/>
           </a:p>
@@ -38747,11 +39362,11 @@
             </a:avLst>
           </a:prstGeom>
           <a:solidFill>
-            <a:srgbClr val="FEE2E2"/>
-          </a:solidFill>
-          <a:ln w="12700">
-            <a:solidFill>
-              <a:srgbClr val="DC2626"/>
+            <a:srgbClr val="DCFCE7"/>
+          </a:solidFill>
+          <a:ln w="12700">
+            <a:solidFill>
+              <a:srgbClr val="16A34A"/>
             </a:solidFill>
             <a:prstDash val="solid"/>
           </a:ln>
@@ -38784,13 +39399,13 @@
             <a:r>
               <a:rPr lang="en-US" sz="1100" b="1" dirty="0">
                 <a:solidFill>
-                  <a:srgbClr val="DC2626"/>
+                  <a:srgbClr val="16A34A"/>
                 </a:solidFill>
                 <a:latin typeface="Trebuchet MS" pitchFamily="34" charset="0"/>
                 <a:ea typeface="Trebuchet MS" pitchFamily="34" charset="-122"/>
                 <a:cs typeface="Trebuchet MS" pitchFamily="34" charset="-120"/>
               </a:rPr>
-              <a:t>FALSE</a:t>
+              <a:t>TRUE</a:t>
             </a:r>
             <a:endParaRPr lang="en-US" sz="1100" dirty="0"/>
           </a:p>
@@ -38863,7 +39478,7 @@
                 <a:ea typeface="Calibri" pitchFamily="34" charset="-122"/>
                 <a:cs typeface="Calibri" pitchFamily="34" charset="-120"/>
               </a:rPr>
-              <a:t>3.  The word 'dictionary' ends in the suffix '-ary'.</a:t>
+              <a:t>3.  The suffix '-ary' can mean 'relating to' or 'connected with' something.</a:t>
             </a:r>
             <a:endParaRPr lang="en-US" sz="1300" dirty="0"/>
           </a:p>
@@ -39002,7 +39617,7 @@
                 <a:ea typeface="Calibri" pitchFamily="34" charset="-122"/>
                 <a:cs typeface="Calibri" pitchFamily="34" charset="-120"/>
               </a:rPr>
-              <a:t>4.  Words ending in '-ary' are often adjectives or nouns.</a:t>
+              <a:t>4.  The suffix '-ary' changes a noun into a verb.</a:t>
             </a:r>
             <a:endParaRPr lang="en-US" sz="1300" dirty="0"/>
           </a:p>
@@ -39025,11 +39640,11 @@
             </a:avLst>
           </a:prstGeom>
           <a:solidFill>
-            <a:srgbClr val="DCFCE7"/>
-          </a:solidFill>
-          <a:ln w="12700">
-            <a:solidFill>
-              <a:srgbClr val="16A34A"/>
+            <a:srgbClr val="FEE2E2"/>
+          </a:solidFill>
+          <a:ln w="12700">
+            <a:solidFill>
+              <a:srgbClr val="DC2626"/>
             </a:solidFill>
             <a:prstDash val="solid"/>
           </a:ln>
@@ -39062,13 +39677,13 @@
             <a:r>
               <a:rPr lang="en-US" sz="1100" b="1" dirty="0">
                 <a:solidFill>
-                  <a:srgbClr val="16A34A"/>
+                  <a:srgbClr val="DC2626"/>
                 </a:solidFill>
                 <a:latin typeface="Trebuchet MS" pitchFamily="34" charset="0"/>
                 <a:ea typeface="Trebuchet MS" pitchFamily="34" charset="-122"/>
                 <a:cs typeface="Trebuchet MS" pitchFamily="34" charset="-120"/>
               </a:rPr>
-              <a:t>TRUE</a:t>
+              <a:t>FALSE</a:t>
             </a:r>
             <a:endParaRPr lang="en-US" sz="1100" dirty="0"/>
           </a:p>
@@ -39141,7 +39756,7 @@
                 <a:ea typeface="Calibri" pitchFamily="34" charset="-122"/>
                 <a:cs typeface="Calibri" pitchFamily="34" charset="-120"/>
               </a:rPr>
-              <a:t>5.  The suffix '-ary' means 'not' or 'without'.</a:t>
+              <a:t>5.  Words ending in '-ary' are always verbs (action words).</a:t>
             </a:r>
             <a:endParaRPr lang="en-US" sz="1300" dirty="0"/>
           </a:p>
@@ -39846,7 +40461,7 @@
                 <a:ea typeface="Trebuchet MS" pitchFamily="34" charset="-122"/>
                 <a:cs typeface="Trebuchet MS" pitchFamily="34" charset="-120"/>
               </a:rPr>
-              <a:t>library</a:t>
+              <a:t>elementary</a:t>
             </a:r>
             <a:endParaRPr lang="en-US" sz="1300" dirty="0"/>
           </a:p>
@@ -39912,7 +40527,7 @@
                 <a:ea typeface="Trebuchet MS" pitchFamily="34" charset="-122"/>
                 <a:cs typeface="Trebuchet MS" pitchFamily="34" charset="-120"/>
               </a:rPr>
-              <a:t>ordinary</a:t>
+              <a:t>visionary</a:t>
             </a:r>
             <a:endParaRPr lang="en-US" sz="1300" dirty="0"/>
           </a:p>
@@ -39978,7 +40593,7 @@
                 <a:ea typeface="Trebuchet MS" pitchFamily="34" charset="-122"/>
                 <a:cs typeface="Trebuchet MS" pitchFamily="34" charset="-120"/>
               </a:rPr>
-              <a:t>voluntary</a:t>
+              <a:t>customary</a:t>
             </a:r>
             <a:endParaRPr lang="en-US" sz="1300" dirty="0"/>
           </a:p>
@@ -40044,7 +40659,7 @@
                 <a:ea typeface="Trebuchet MS" pitchFamily="34" charset="-122"/>
                 <a:cs typeface="Trebuchet MS" pitchFamily="34" charset="-120"/>
               </a:rPr>
-              <a:t>imaginary</a:t>
+              <a:t>secretary</a:t>
             </a:r>
             <a:endParaRPr lang="en-US" sz="1300" dirty="0"/>
           </a:p>
@@ -40110,7 +40725,7 @@
                 <a:ea typeface="Trebuchet MS" pitchFamily="34" charset="-122"/>
                 <a:cs typeface="Trebuchet MS" pitchFamily="34" charset="-120"/>
               </a:rPr>
-              <a:t>elementary</a:t>
+              <a:t>honorary</a:t>
             </a:r>
             <a:endParaRPr lang="en-US" sz="1300" dirty="0"/>
           </a:p>
@@ -40769,7 +41384,7 @@
                 <a:ea typeface="Trebuchet MS" pitchFamily="34" charset="-122"/>
                 <a:cs typeface="Trebuchet MS" pitchFamily="34" charset="-120"/>
               </a:rPr>
-              <a:t>sec-</a:t>
+              <a:t>dict-</a:t>
             </a:r>
             <a:endParaRPr lang="en-US" sz="1300" dirty="0"/>
           </a:p>
@@ -40833,7 +41448,7 @@
                 <a:ea typeface="Trebuchet MS" pitchFamily="34" charset="-122"/>
                 <a:cs typeface="Trebuchet MS" pitchFamily="34" charset="-120"/>
               </a:rPr>
-              <a:t>legend</a:t>
+              <a:t>element</a:t>
             </a:r>
             <a:endParaRPr lang="en-US" sz="1300" dirty="0"/>
           </a:p>
@@ -40961,7 +41576,7 @@
                 <a:ea typeface="Trebuchet MS" pitchFamily="34" charset="-122"/>
                 <a:cs typeface="Trebuchet MS" pitchFamily="34" charset="-120"/>
               </a:rPr>
-              <a:t>ordin-</a:t>
+              <a:t>vision-</a:t>
             </a:r>
             <a:endParaRPr lang="en-US" sz="1300" dirty="0"/>
           </a:p>
@@ -41025,7 +41640,7 @@
                 <a:ea typeface="Trebuchet MS" pitchFamily="34" charset="-122"/>
                 <a:cs typeface="Trebuchet MS" pitchFamily="34" charset="-120"/>
               </a:rPr>
-              <a:t>vision</a:t>
+              <a:t>secret</a:t>
             </a:r>
             <a:endParaRPr lang="en-US" sz="1300" dirty="0"/>
           </a:p>
@@ -41178,7 +41793,7 @@
                 <a:ea typeface="Trebuchet MS" pitchFamily="34" charset="-122"/>
                 <a:cs typeface="Trebuchet MS" pitchFamily="34" charset="-120"/>
               </a:rPr>
-              <a:t>custom</a:t>
+              <a:t>vision</a:t>
             </a:r>
             <a:endParaRPr lang="en-US" sz="1300" dirty="0"/>
           </a:p>
@@ -41267,7 +41882,7 @@
                 <a:ea typeface="Trebuchet MS" pitchFamily="34" charset="-122"/>
                 <a:cs typeface="Trebuchet MS" pitchFamily="34" charset="-120"/>
               </a:rPr>
-              <a:t>imagin-</a:t>
+              <a:t>secret-</a:t>
             </a:r>
             <a:endParaRPr lang="en-US" sz="1300" dirty="0"/>
           </a:p>
@@ -41331,7 +41946,7 @@
                 <a:ea typeface="Trebuchet MS" pitchFamily="34" charset="-122"/>
                 <a:cs typeface="Trebuchet MS" pitchFamily="34" charset="-120"/>
               </a:rPr>
-              <a:t>dict</a:t>
+              <a:t>custom</a:t>
             </a:r>
             <a:endParaRPr lang="en-US" sz="1300" dirty="0"/>
           </a:p>
@@ -41420,7 +42035,7 @@
                 <a:ea typeface="Trebuchet MS" pitchFamily="34" charset="-122"/>
                 <a:cs typeface="Trebuchet MS" pitchFamily="34" charset="-120"/>
               </a:rPr>
-              <a:t>volunt-</a:t>
+              <a:t>revolution-</a:t>
             </a:r>
             <a:endParaRPr lang="en-US" sz="1300" dirty="0"/>
           </a:p>
@@ -41484,7 +42099,7 @@
                 <a:ea typeface="Trebuchet MS" pitchFamily="34" charset="-122"/>
                 <a:cs typeface="Trebuchet MS" pitchFamily="34" charset="-120"/>
               </a:rPr>
-              <a:t>libr</a:t>
+              <a:t>bounty</a:t>
             </a:r>
             <a:endParaRPr lang="en-US" sz="1300" dirty="0"/>
           </a:p>
@@ -41563,7 +42178,7 @@
         <p:spPr>
           <a:xfrm>
             <a:off x="1508760" y="4178808"/>
-            <a:ext cx="950976" cy="420624"/>
+            <a:ext cx="1097280" cy="420624"/>
           </a:xfrm>
           <a:prstGeom prst="rect">
             <a:avLst>
@@ -41597,7 +42212,7 @@
         <p:spPr>
           <a:xfrm>
             <a:off x="1508760" y="4178808"/>
-            <a:ext cx="950976" cy="420624"/>
+            <a:ext cx="1097280" cy="420624"/>
           </a:xfrm>
           <a:prstGeom prst="rect">
             <a:avLst/>
@@ -41621,7 +42236,7 @@
                 <a:ea typeface="Trebuchet MS" pitchFamily="34" charset="-122"/>
                 <a:cs typeface="Trebuchet MS" pitchFamily="34" charset="-120"/>
               </a:rPr>
-              <a:t>sec-</a:t>
+              <a:t>dict-</a:t>
             </a:r>
             <a:endParaRPr lang="en-US" sz="1300" dirty="0"/>
           </a:p>
@@ -41635,7 +42250,7 @@
         </p:nvSpPr>
         <p:spPr>
           <a:xfrm>
-            <a:off x="2487168" y="4178808"/>
+            <a:off x="2633472" y="4178808"/>
             <a:ext cx="320040" cy="420624"/>
           </a:xfrm>
           <a:prstGeom prst="rect">
@@ -41674,8 +42289,8 @@
         </p:nvSpPr>
         <p:spPr>
           <a:xfrm>
-            <a:off x="2834640" y="4178808"/>
-            <a:ext cx="1243584" cy="420624"/>
+            <a:off x="2980944" y="4178808"/>
+            <a:ext cx="1389888" cy="420624"/>
           </a:xfrm>
           <a:prstGeom prst="rect">
             <a:avLst>
@@ -41708,8 +42323,8 @@
         </p:nvSpPr>
         <p:spPr>
           <a:xfrm>
-            <a:off x="2834640" y="4178808"/>
-            <a:ext cx="1243584" cy="420624"/>
+            <a:off x="2980944" y="4178808"/>
+            <a:ext cx="1389888" cy="420624"/>
           </a:xfrm>
           <a:prstGeom prst="rect">
             <a:avLst/>
@@ -41733,7 +42348,7 @@
                 <a:ea typeface="Trebuchet MS" pitchFamily="34" charset="-122"/>
                 <a:cs typeface="Trebuchet MS" pitchFamily="34" charset="-120"/>
               </a:rPr>
-              <a:t>legend</a:t>
+              <a:t>element</a:t>
             </a:r>
             <a:endParaRPr lang="en-US" sz="1300" dirty="0"/>
           </a:p>
@@ -41747,7 +42362,7 @@
         </p:nvSpPr>
         <p:spPr>
           <a:xfrm>
-            <a:off x="4105656" y="4178808"/>
+            <a:off x="4398264" y="4178808"/>
             <a:ext cx="320040" cy="420624"/>
           </a:xfrm>
           <a:prstGeom prst="rect">
@@ -41786,7 +42401,7 @@
         </p:nvSpPr>
         <p:spPr>
           <a:xfrm>
-            <a:off x="4453128" y="4178808"/>
+            <a:off x="4745736" y="4178808"/>
             <a:ext cx="950976" cy="420624"/>
           </a:xfrm>
           <a:prstGeom prst="rect">
@@ -41820,7 +42435,7 @@
         </p:nvSpPr>
         <p:spPr>
           <a:xfrm>
-            <a:off x="4453128" y="4178808"/>
+            <a:off x="4745736" y="4178808"/>
             <a:ext cx="950976" cy="420624"/>
           </a:xfrm>
           <a:prstGeom prst="rect">
@@ -41859,7 +42474,7 @@
         </p:nvSpPr>
         <p:spPr>
           <a:xfrm>
-            <a:off x="5477256" y="4178808"/>
+            <a:off x="5769864" y="4178808"/>
             <a:ext cx="365760" cy="420624"/>
           </a:xfrm>
           <a:prstGeom prst="rect">
@@ -41898,7 +42513,7 @@
         </p:nvSpPr>
         <p:spPr>
           <a:xfrm>
-            <a:off x="5888736" y="4178808"/>
+            <a:off x="6181344" y="4178808"/>
             <a:ext cx="2194560" cy="420624"/>
           </a:xfrm>
           <a:prstGeom prst="rect">
@@ -41925,7 +42540,7 @@
         </p:nvSpPr>
         <p:spPr>
           <a:xfrm>
-            <a:off x="5888736" y="4178808"/>
+            <a:off x="6181344" y="4178808"/>
             <a:ext cx="2194560" cy="420624"/>
           </a:xfrm>
           <a:prstGeom prst="rect">
@@ -42420,7 +43035,7 @@
                 <a:ea typeface="Calibri" pitchFamily="34" charset="-122"/>
                 <a:cs typeface="Calibri" pitchFamily="34" charset="-120"/>
               </a:rPr>
-              <a:t>Not real; existing only in your mind or imagination.</a:t>
+              <a:t>A person whose job is to help with letters, organising and office work.</a:t>
             </a:r>
             <a:endParaRPr lang="en-US" sz="1200" dirty="0"/>
           </a:p>
@@ -42493,7 +43108,7 @@
                 <a:ea typeface="Trebuchet MS" pitchFamily="34" charset="-122"/>
                 <a:cs typeface="Trebuchet MS" pitchFamily="34" charset="-120"/>
               </a:rPr>
-              <a:t>library</a:t>
+              <a:t>elementary</a:t>
             </a:r>
             <a:endParaRPr lang="en-US" sz="1200" dirty="0"/>
           </a:p>
@@ -42559,7 +43174,7 @@
                 <a:ea typeface="Calibri" pitchFamily="34" charset="-122"/>
                 <a:cs typeface="Calibri" pitchFamily="34" charset="-120"/>
               </a:rPr>
-              <a:t>Something you choose to do yourself, without being forced or paid.</a:t>
+              <a:t>Something that is the usual or normal way of doing things.</a:t>
             </a:r>
             <a:endParaRPr lang="en-US" sz="1200" dirty="0"/>
           </a:p>
@@ -42632,7 +43247,7 @@
                 <a:ea typeface="Trebuchet MS" pitchFamily="34" charset="-122"/>
                 <a:cs typeface="Trebuchet MS" pitchFamily="34" charset="-120"/>
               </a:rPr>
-              <a:t>ordinary</a:t>
+              <a:t>visionary</a:t>
             </a:r>
             <a:endParaRPr lang="en-US" sz="1200" dirty="0"/>
           </a:p>
@@ -42698,7 +43313,7 @@
                 <a:ea typeface="Calibri" pitchFamily="34" charset="-122"/>
                 <a:cs typeface="Calibri" pitchFamily="34" charset="-120"/>
               </a:rPr>
-              <a:t>Simple and basic; relating to the first or easiest stage of learning something.</a:t>
+              <a:t>Given as a special honour, without the usual requirements.</a:t>
             </a:r>
             <a:endParaRPr lang="en-US" sz="1200" dirty="0"/>
           </a:p>
@@ -42771,7 +43386,7 @@
                 <a:ea typeface="Trebuchet MS" pitchFamily="34" charset="-122"/>
                 <a:cs typeface="Trebuchet MS" pitchFamily="34" charset="-120"/>
               </a:rPr>
-              <a:t>voluntary</a:t>
+              <a:t>customary</a:t>
             </a:r>
             <a:endParaRPr lang="en-US" sz="1200" dirty="0"/>
           </a:p>
@@ -42837,7 +43452,7 @@
                 <a:ea typeface="Calibri" pitchFamily="34" charset="-122"/>
                 <a:cs typeface="Calibri" pitchFamily="34" charset="-120"/>
               </a:rPr>
-              <a:t>Normal or usual; not special or different from what you'd expect.</a:t>
+              <a:t>Someone who has big, imaginative ideas about the future.</a:t>
             </a:r>
             <a:endParaRPr lang="en-US" sz="1200" dirty="0"/>
           </a:p>
@@ -42910,7 +43525,7 @@
                 <a:ea typeface="Trebuchet MS" pitchFamily="34" charset="-122"/>
                 <a:cs typeface="Trebuchet MS" pitchFamily="34" charset="-120"/>
               </a:rPr>
-              <a:t>imaginary</a:t>
+              <a:t>secretary</a:t>
             </a:r>
             <a:endParaRPr lang="en-US" sz="1200" dirty="0"/>
           </a:p>
@@ -42976,7 +43591,7 @@
                 <a:ea typeface="Calibri" pitchFamily="34" charset="-122"/>
                 <a:cs typeface="Calibri" pitchFamily="34" charset="-120"/>
               </a:rPr>
-              <a:t>So famous or impressive that people tell stories and talk about it for a long time.</a:t>
+              <a:t>So famous or impressive that people tell stories about it.</a:t>
             </a:r>
             <a:endParaRPr lang="en-US" sz="1200" dirty="0"/>
           </a:p>
@@ -43049,7 +43664,7 @@
                 <a:ea typeface="Trebuchet MS" pitchFamily="34" charset="-122"/>
                 <a:cs typeface="Trebuchet MS" pitchFamily="34" charset="-120"/>
               </a:rPr>
-              <a:t>elementary</a:t>
+              <a:t>honorary</a:t>
             </a:r>
             <a:endParaRPr lang="en-US" sz="1200" dirty="0"/>
           </a:p>
@@ -43115,7 +43730,7 @@
                 <a:ea typeface="Calibri" pitchFamily="34" charset="-122"/>
                 <a:cs typeface="Calibri" pitchFamily="34" charset="-120"/>
               </a:rPr>
-              <a:t>A book that lists words in alphabetical order and explains what they mean.</a:t>
+              <a:t>A book where you can look up the meanings and spellings of words.</a:t>
             </a:r>
             <a:endParaRPr lang="en-US" sz="1200" dirty="0"/>
           </a:p>
@@ -43254,7 +43869,7 @@
                 <a:ea typeface="Calibri" pitchFamily="34" charset="-122"/>
                 <a:cs typeface="Calibri" pitchFamily="34" charset="-120"/>
               </a:rPr>
-              <a:t>A place where books and other resources are kept for people to borrow and read.</a:t>
+              <a:t>Basic or simple; related to the early stages of learning something.</a:t>
             </a:r>
             <a:endParaRPr lang="en-US" sz="1200" dirty="0"/>
           </a:p>
@@ -43749,7 +44364,7 @@
                 <a:ea typeface="Calibri" pitchFamily="34" charset="-122"/>
                 <a:cs typeface="Calibri" pitchFamily="34" charset="-120"/>
               </a:rPr>
-              <a:t>We visited the library to find books about Australian animals.</a:t>
+              <a:t>The teacher asked us to look up the word in the dictionary.</a:t>
             </a:r>
             <a:endParaRPr lang="en-US" sz="1500" dirty="0"/>
           </a:p>
@@ -43913,7 +44528,7 @@
                 <a:ea typeface="Calibri" pitchFamily="34" charset="-122"/>
                 <a:cs typeface="Calibri" pitchFamily="34" charset="-120"/>
               </a:rPr>
-              <a:t>The teacher said our homework was voluntary, so we did not have to hand it in.</a:t>
+              <a:t>It is customary to say thank you when someone gives you a gift.</a:t>
             </a:r>
             <a:endParaRPr lang="en-US" sz="1500" dirty="0"/>
           </a:p>
@@ -44077,7 +44692,7 @@
                 <a:ea typeface="Calibri" pitchFamily="34" charset="-122"/>
                 <a:cs typeface="Calibri" pitchFamily="34" charset="-120"/>
               </a:rPr>
-              <a:t>The dragon in the story was imaginary, but it felt very real to the children.</a:t>
+              <a:t>She did voluntary work at the animal shelter on weekends.</a:t>
             </a:r>
             <a:endParaRPr lang="en-US" sz="1500" dirty="0"/>
           </a:p>
